--- a/ResumeFit-Seminar.pptx
+++ b/ResumeFit-Seminar.pptx
@@ -5,32 +5,30 @@
     <p:sldMasterId id="2147483648" r:id="rId1"/>
   </p:sldMasterIdLst>
   <p:sldIdLst>
-    <p:sldId id="256" r:id="rId7"/>
-    <p:sldId id="257" r:id="rId8"/>
-    <p:sldId id="258" r:id="rId9"/>
-    <p:sldId id="259" r:id="rId10"/>
-    <p:sldId id="260" r:id="rId11"/>
-    <p:sldId id="261" r:id="rId12"/>
-    <p:sldId id="262" r:id="rId13"/>
-    <p:sldId id="263" r:id="rId14"/>
-    <p:sldId id="264" r:id="rId15"/>
-    <p:sldId id="265" r:id="rId16"/>
-    <p:sldId id="266" r:id="rId17"/>
-    <p:sldId id="267" r:id="rId18"/>
-    <p:sldId id="268" r:id="rId19"/>
-    <p:sldId id="269" r:id="rId20"/>
-    <p:sldId id="270" r:id="rId21"/>
-    <p:sldId id="271" r:id="rId22"/>
-    <p:sldId id="272" r:id="rId23"/>
-    <p:sldId id="273" r:id="rId24"/>
-    <p:sldId id="274" r:id="rId25"/>
-    <p:sldId id="275" r:id="rId26"/>
-    <p:sldId id="276" r:id="rId27"/>
-    <p:sldId id="277" r:id="rId28"/>
-    <p:sldId id="278" r:id="rId29"/>
-    <p:sldId id="279" r:id="rId30"/>
+    <p:sldId id="256" r:id="rId2"/>
+    <p:sldId id="257" r:id="rId3"/>
+    <p:sldId id="258" r:id="rId4"/>
+    <p:sldId id="259" r:id="rId5"/>
+    <p:sldId id="260" r:id="rId6"/>
+    <p:sldId id="261" r:id="rId7"/>
+    <p:sldId id="262" r:id="rId8"/>
+    <p:sldId id="263" r:id="rId9"/>
+    <p:sldId id="264" r:id="rId10"/>
+    <p:sldId id="265" r:id="rId11"/>
+    <p:sldId id="266" r:id="rId12"/>
+    <p:sldId id="267" r:id="rId13"/>
+    <p:sldId id="268" r:id="rId14"/>
+    <p:sldId id="269" r:id="rId15"/>
+    <p:sldId id="270" r:id="rId16"/>
+    <p:sldId id="271" r:id="rId17"/>
+    <p:sldId id="272" r:id="rId18"/>
+    <p:sldId id="273" r:id="rId19"/>
+    <p:sldId id="274" r:id="rId20"/>
+    <p:sldId id="275" r:id="rId21"/>
+    <p:sldId id="278" r:id="rId22"/>
+    <p:sldId id="279" r:id="rId23"/>
   </p:sldIdLst>
-  <p:sldSz cx="12191695" cy="6858000" type="screen4x3"/>
+  <p:sldSz cx="12192000" cy="6858000"/>
   <p:notesSz cx="6858000" cy="9144000"/>
   <p:defaultTextStyle>
     <a:defPPr>
@@ -127,6 +125,22 @@
       </a:defRPr>
     </a:lvl9pPr>
   </p:defaultTextStyle>
+  <p:extLst>
+    <p:ext uri="{EFAFB233-063F-42B5-8137-9DF3F51BA10A}">
+      <p15:sldGuideLst xmlns:p15="http://schemas.microsoft.com/office/powerpoint/2012/main">
+        <p15:guide id="1" orient="horz" pos="2160">
+          <p15:clr>
+            <a:srgbClr val="A4A3A4"/>
+          </p15:clr>
+        </p15:guide>
+        <p15:guide id="2" pos="2880">
+          <p15:clr>
+            <a:srgbClr val="A4A3A4"/>
+          </p15:clr>
+        </p15:guide>
+      </p15:sldGuideLst>
+    </p:ext>
+  </p:extLst>
 </p:presentation>
 </file>
 
@@ -168,10 +182,9 @@
           <a:lstStyle/>
           <a:p>
             <a:r>
-              <a:rPr lang="en-US" smtClean="0"/>
+              <a:rPr lang="en-US"/>
               <a:t>Click to edit Master title style</a:t>
             </a:r>
-            <a:endParaRPr lang="en-US"/>
           </a:p>
         </p:txBody>
       </p:sp>
@@ -287,10 +300,9 @@
           </a:lstStyle>
           <a:p>
             <a:r>
-              <a:rPr lang="en-US" smtClean="0"/>
+              <a:rPr lang="en-US"/>
               <a:t>Click to edit Master subtitle style</a:t>
             </a:r>
-            <a:endParaRPr lang="en-US"/>
           </a:p>
         </p:txBody>
       </p:sp>
@@ -311,7 +323,7 @@
           <a:p>
             <a:fld id="{5BCAD085-E8A6-8845-BD4E-CB4CCA059FC4}" type="datetimeFigureOut">
               <a:rPr lang="en-US" smtClean="0"/>
-              <a:t>1/27/13</a:t>
+              <a:t>9/26/26</a:t>
             </a:fld>
             <a:endParaRPr lang="en-US"/>
           </a:p>
@@ -405,10 +417,9 @@
           <a:lstStyle/>
           <a:p>
             <a:r>
-              <a:rPr lang="en-US" smtClean="0"/>
+              <a:rPr lang="en-US"/>
               <a:t>Click to edit Master title style</a:t>
             </a:r>
-            <a:endParaRPr lang="en-US"/>
           </a:p>
         </p:txBody>
       </p:sp>
@@ -429,38 +440,37 @@
           <a:p>
             <a:pPr lvl="0"/>
             <a:r>
-              <a:rPr lang="en-US" smtClean="0"/>
+              <a:rPr lang="en-US"/>
               <a:t>Click to edit Master text styles</a:t>
             </a:r>
           </a:p>
           <a:p>
             <a:pPr lvl="1"/>
             <a:r>
-              <a:rPr lang="en-US" smtClean="0"/>
+              <a:rPr lang="en-US"/>
               <a:t>Second level</a:t>
             </a:r>
           </a:p>
           <a:p>
             <a:pPr lvl="2"/>
             <a:r>
-              <a:rPr lang="en-US" smtClean="0"/>
+              <a:rPr lang="en-US"/>
               <a:t>Third level</a:t>
             </a:r>
           </a:p>
           <a:p>
             <a:pPr lvl="3"/>
             <a:r>
-              <a:rPr lang="en-US" smtClean="0"/>
+              <a:rPr lang="en-US"/>
               <a:t>Fourth level</a:t>
             </a:r>
           </a:p>
           <a:p>
             <a:pPr lvl="4"/>
             <a:r>
-              <a:rPr lang="en-US" smtClean="0"/>
+              <a:rPr lang="en-US"/>
               <a:t>Fifth level</a:t>
             </a:r>
-            <a:endParaRPr lang="en-US"/>
           </a:p>
         </p:txBody>
       </p:sp>
@@ -481,7 +491,7 @@
           <a:p>
             <a:fld id="{5BCAD085-E8A6-8845-BD4E-CB4CCA059FC4}" type="datetimeFigureOut">
               <a:rPr lang="en-US" smtClean="0"/>
-              <a:t>1/27/13</a:t>
+              <a:t>9/26/26</a:t>
             </a:fld>
             <a:endParaRPr lang="en-US"/>
           </a:p>
@@ -580,10 +590,9 @@
           <a:lstStyle/>
           <a:p>
             <a:r>
-              <a:rPr lang="en-US" smtClean="0"/>
+              <a:rPr lang="en-US"/>
               <a:t>Click to edit Master title style</a:t>
             </a:r>
-            <a:endParaRPr lang="en-US"/>
           </a:p>
         </p:txBody>
       </p:sp>
@@ -609,38 +618,37 @@
           <a:p>
             <a:pPr lvl="0"/>
             <a:r>
-              <a:rPr lang="en-US" smtClean="0"/>
+              <a:rPr lang="en-US"/>
               <a:t>Click to edit Master text styles</a:t>
             </a:r>
           </a:p>
           <a:p>
             <a:pPr lvl="1"/>
             <a:r>
-              <a:rPr lang="en-US" smtClean="0"/>
+              <a:rPr lang="en-US"/>
               <a:t>Second level</a:t>
             </a:r>
           </a:p>
           <a:p>
             <a:pPr lvl="2"/>
             <a:r>
-              <a:rPr lang="en-US" smtClean="0"/>
+              <a:rPr lang="en-US"/>
               <a:t>Third level</a:t>
             </a:r>
           </a:p>
           <a:p>
             <a:pPr lvl="3"/>
             <a:r>
-              <a:rPr lang="en-US" smtClean="0"/>
+              <a:rPr lang="en-US"/>
               <a:t>Fourth level</a:t>
             </a:r>
           </a:p>
           <a:p>
             <a:pPr lvl="4"/>
             <a:r>
-              <a:rPr lang="en-US" smtClean="0"/>
+              <a:rPr lang="en-US"/>
               <a:t>Fifth level</a:t>
             </a:r>
-            <a:endParaRPr lang="en-US"/>
           </a:p>
         </p:txBody>
       </p:sp>
@@ -661,7 +669,7 @@
           <a:p>
             <a:fld id="{5BCAD085-E8A6-8845-BD4E-CB4CCA059FC4}" type="datetimeFigureOut">
               <a:rPr lang="en-US" smtClean="0"/>
-              <a:t>1/27/13</a:t>
+              <a:t>9/26/26</a:t>
             </a:fld>
             <a:endParaRPr lang="en-US"/>
           </a:p>
@@ -755,10 +763,9 @@
           <a:lstStyle/>
           <a:p>
             <a:r>
-              <a:rPr lang="en-US" smtClean="0"/>
+              <a:rPr lang="en-US"/>
               <a:t>Click to edit Master title style</a:t>
             </a:r>
-            <a:endParaRPr lang="en-US"/>
           </a:p>
         </p:txBody>
       </p:sp>
@@ -779,38 +786,37 @@
           <a:p>
             <a:pPr lvl="0"/>
             <a:r>
-              <a:rPr lang="en-US" smtClean="0"/>
+              <a:rPr lang="en-US"/>
               <a:t>Click to edit Master text styles</a:t>
             </a:r>
           </a:p>
           <a:p>
             <a:pPr lvl="1"/>
             <a:r>
-              <a:rPr lang="en-US" smtClean="0"/>
+              <a:rPr lang="en-US"/>
               <a:t>Second level</a:t>
             </a:r>
           </a:p>
           <a:p>
             <a:pPr lvl="2"/>
             <a:r>
-              <a:rPr lang="en-US" smtClean="0"/>
+              <a:rPr lang="en-US"/>
               <a:t>Third level</a:t>
             </a:r>
           </a:p>
           <a:p>
             <a:pPr lvl="3"/>
             <a:r>
-              <a:rPr lang="en-US" smtClean="0"/>
+              <a:rPr lang="en-US"/>
               <a:t>Fourth level</a:t>
             </a:r>
           </a:p>
           <a:p>
             <a:pPr lvl="4"/>
             <a:r>
-              <a:rPr lang="en-US" smtClean="0"/>
+              <a:rPr lang="en-US"/>
               <a:t>Fifth level</a:t>
             </a:r>
-            <a:endParaRPr lang="en-US"/>
           </a:p>
         </p:txBody>
       </p:sp>
@@ -831,7 +837,7 @@
           <a:p>
             <a:fld id="{5BCAD085-E8A6-8845-BD4E-CB4CCA059FC4}" type="datetimeFigureOut">
               <a:rPr lang="en-US" smtClean="0"/>
-              <a:t>1/27/13</a:t>
+              <a:t>9/26/26</a:t>
             </a:fld>
             <a:endParaRPr lang="en-US"/>
           </a:p>
@@ -934,10 +940,9 @@
           </a:lstStyle>
           <a:p>
             <a:r>
-              <a:rPr lang="en-US" smtClean="0"/>
+              <a:rPr lang="en-US"/>
               <a:t>Click to edit Master title style</a:t>
             </a:r>
-            <a:endParaRPr lang="en-US"/>
           </a:p>
         </p:txBody>
       </p:sp>
@@ -1054,7 +1059,7 @@
           <a:p>
             <a:pPr lvl="0"/>
             <a:r>
-              <a:rPr lang="en-US" smtClean="0"/>
+              <a:rPr lang="en-US"/>
               <a:t>Click to edit Master text styles</a:t>
             </a:r>
           </a:p>
@@ -1077,7 +1082,7 @@
           <a:p>
             <a:fld id="{5BCAD085-E8A6-8845-BD4E-CB4CCA059FC4}" type="datetimeFigureOut">
               <a:rPr lang="en-US" smtClean="0"/>
-              <a:t>1/27/13</a:t>
+              <a:t>9/26/26</a:t>
             </a:fld>
             <a:endParaRPr lang="en-US"/>
           </a:p>
@@ -1171,10 +1176,9 @@
           <a:lstStyle/>
           <a:p>
             <a:r>
-              <a:rPr lang="en-US" smtClean="0"/>
+              <a:rPr lang="en-US"/>
               <a:t>Click to edit Master title style</a:t>
             </a:r>
-            <a:endParaRPr lang="en-US"/>
           </a:p>
         </p:txBody>
       </p:sp>
@@ -1228,38 +1232,37 @@
           <a:p>
             <a:pPr lvl="0"/>
             <a:r>
-              <a:rPr lang="en-US" smtClean="0"/>
+              <a:rPr lang="en-US"/>
               <a:t>Click to edit Master text styles</a:t>
             </a:r>
           </a:p>
           <a:p>
             <a:pPr lvl="1"/>
             <a:r>
-              <a:rPr lang="en-US" smtClean="0"/>
+              <a:rPr lang="en-US"/>
               <a:t>Second level</a:t>
             </a:r>
           </a:p>
           <a:p>
             <a:pPr lvl="2"/>
             <a:r>
-              <a:rPr lang="en-US" smtClean="0"/>
+              <a:rPr lang="en-US"/>
               <a:t>Third level</a:t>
             </a:r>
           </a:p>
           <a:p>
             <a:pPr lvl="3"/>
             <a:r>
-              <a:rPr lang="en-US" smtClean="0"/>
+              <a:rPr lang="en-US"/>
               <a:t>Fourth level</a:t>
             </a:r>
           </a:p>
           <a:p>
             <a:pPr lvl="4"/>
             <a:r>
-              <a:rPr lang="en-US" smtClean="0"/>
+              <a:rPr lang="en-US"/>
               <a:t>Fifth level</a:t>
             </a:r>
-            <a:endParaRPr lang="en-US"/>
           </a:p>
         </p:txBody>
       </p:sp>
@@ -1313,38 +1316,37 @@
           <a:p>
             <a:pPr lvl="0"/>
             <a:r>
-              <a:rPr lang="en-US" smtClean="0"/>
+              <a:rPr lang="en-US"/>
               <a:t>Click to edit Master text styles</a:t>
             </a:r>
           </a:p>
           <a:p>
             <a:pPr lvl="1"/>
             <a:r>
-              <a:rPr lang="en-US" smtClean="0"/>
+              <a:rPr lang="en-US"/>
               <a:t>Second level</a:t>
             </a:r>
           </a:p>
           <a:p>
             <a:pPr lvl="2"/>
             <a:r>
-              <a:rPr lang="en-US" smtClean="0"/>
+              <a:rPr lang="en-US"/>
               <a:t>Third level</a:t>
             </a:r>
           </a:p>
           <a:p>
             <a:pPr lvl="3"/>
             <a:r>
-              <a:rPr lang="en-US" smtClean="0"/>
+              <a:rPr lang="en-US"/>
               <a:t>Fourth level</a:t>
             </a:r>
           </a:p>
           <a:p>
             <a:pPr lvl="4"/>
             <a:r>
-              <a:rPr lang="en-US" smtClean="0"/>
+              <a:rPr lang="en-US"/>
               <a:t>Fifth level</a:t>
             </a:r>
-            <a:endParaRPr lang="en-US"/>
           </a:p>
         </p:txBody>
       </p:sp>
@@ -1365,7 +1367,7 @@
           <a:p>
             <a:fld id="{5BCAD085-E8A6-8845-BD4E-CB4CCA059FC4}" type="datetimeFigureOut">
               <a:rPr lang="en-US" smtClean="0"/>
-              <a:t>1/27/13</a:t>
+              <a:t>9/26/26</a:t>
             </a:fld>
             <a:endParaRPr lang="en-US"/>
           </a:p>
@@ -1463,10 +1465,9 @@
           </a:lstStyle>
           <a:p>
             <a:r>
-              <a:rPr lang="en-US" smtClean="0"/>
+              <a:rPr lang="en-US"/>
               <a:t>Click to edit Master title style</a:t>
             </a:r>
-            <a:endParaRPr lang="en-US"/>
           </a:p>
         </p:txBody>
       </p:sp>
@@ -1529,7 +1530,7 @@
           <a:p>
             <a:pPr lvl="0"/>
             <a:r>
-              <a:rPr lang="en-US" smtClean="0"/>
+              <a:rPr lang="en-US"/>
               <a:t>Click to edit Master text styles</a:t>
             </a:r>
           </a:p>
@@ -1585,38 +1586,37 @@
           <a:p>
             <a:pPr lvl="0"/>
             <a:r>
-              <a:rPr lang="en-US" smtClean="0"/>
+              <a:rPr lang="en-US"/>
               <a:t>Click to edit Master text styles</a:t>
             </a:r>
           </a:p>
           <a:p>
             <a:pPr lvl="1"/>
             <a:r>
-              <a:rPr lang="en-US" smtClean="0"/>
+              <a:rPr lang="en-US"/>
               <a:t>Second level</a:t>
             </a:r>
           </a:p>
           <a:p>
             <a:pPr lvl="2"/>
             <a:r>
-              <a:rPr lang="en-US" smtClean="0"/>
+              <a:rPr lang="en-US"/>
               <a:t>Third level</a:t>
             </a:r>
           </a:p>
           <a:p>
             <a:pPr lvl="3"/>
             <a:r>
-              <a:rPr lang="en-US" smtClean="0"/>
+              <a:rPr lang="en-US"/>
               <a:t>Fourth level</a:t>
             </a:r>
           </a:p>
           <a:p>
             <a:pPr lvl="4"/>
             <a:r>
-              <a:rPr lang="en-US" smtClean="0"/>
+              <a:rPr lang="en-US"/>
               <a:t>Fifth level</a:t>
             </a:r>
-            <a:endParaRPr lang="en-US"/>
           </a:p>
         </p:txBody>
       </p:sp>
@@ -1679,7 +1679,7 @@
           <a:p>
             <a:pPr lvl="0"/>
             <a:r>
-              <a:rPr lang="en-US" smtClean="0"/>
+              <a:rPr lang="en-US"/>
               <a:t>Click to edit Master text styles</a:t>
             </a:r>
           </a:p>
@@ -1735,38 +1735,37 @@
           <a:p>
             <a:pPr lvl="0"/>
             <a:r>
-              <a:rPr lang="en-US" smtClean="0"/>
+              <a:rPr lang="en-US"/>
               <a:t>Click to edit Master text styles</a:t>
             </a:r>
           </a:p>
           <a:p>
             <a:pPr lvl="1"/>
             <a:r>
-              <a:rPr lang="en-US" smtClean="0"/>
+              <a:rPr lang="en-US"/>
               <a:t>Second level</a:t>
             </a:r>
           </a:p>
           <a:p>
             <a:pPr lvl="2"/>
             <a:r>
-              <a:rPr lang="en-US" smtClean="0"/>
+              <a:rPr lang="en-US"/>
               <a:t>Third level</a:t>
             </a:r>
           </a:p>
           <a:p>
             <a:pPr lvl="3"/>
             <a:r>
-              <a:rPr lang="en-US" smtClean="0"/>
+              <a:rPr lang="en-US"/>
               <a:t>Fourth level</a:t>
             </a:r>
           </a:p>
           <a:p>
             <a:pPr lvl="4"/>
             <a:r>
-              <a:rPr lang="en-US" smtClean="0"/>
+              <a:rPr lang="en-US"/>
               <a:t>Fifth level</a:t>
             </a:r>
-            <a:endParaRPr lang="en-US"/>
           </a:p>
         </p:txBody>
       </p:sp>
@@ -1787,7 +1786,7 @@
           <a:p>
             <a:fld id="{5BCAD085-E8A6-8845-BD4E-CB4CCA059FC4}" type="datetimeFigureOut">
               <a:rPr lang="en-US" smtClean="0"/>
-              <a:t>1/27/13</a:t>
+              <a:t>9/26/26</a:t>
             </a:fld>
             <a:endParaRPr lang="en-US"/>
           </a:p>
@@ -1881,10 +1880,9 @@
           <a:lstStyle/>
           <a:p>
             <a:r>
-              <a:rPr lang="en-US" smtClean="0"/>
+              <a:rPr lang="en-US"/>
               <a:t>Click to edit Master title style</a:t>
             </a:r>
-            <a:endParaRPr lang="en-US"/>
           </a:p>
         </p:txBody>
       </p:sp>
@@ -1905,7 +1903,7 @@
           <a:p>
             <a:fld id="{5BCAD085-E8A6-8845-BD4E-CB4CCA059FC4}" type="datetimeFigureOut">
               <a:rPr lang="en-US" smtClean="0"/>
-              <a:t>1/27/13</a:t>
+              <a:t>9/26/26</a:t>
             </a:fld>
             <a:endParaRPr lang="en-US"/>
           </a:p>
@@ -2000,7 +1998,7 @@
           <a:p>
             <a:fld id="{5BCAD085-E8A6-8845-BD4E-CB4CCA059FC4}" type="datetimeFigureOut">
               <a:rPr lang="en-US" smtClean="0"/>
-              <a:t>1/27/13</a:t>
+              <a:t>9/26/26</a:t>
             </a:fld>
             <a:endParaRPr lang="en-US"/>
           </a:p>
@@ -2103,10 +2101,9 @@
           </a:lstStyle>
           <a:p>
             <a:r>
-              <a:rPr lang="en-US" smtClean="0"/>
+              <a:rPr lang="en-US"/>
               <a:t>Click to edit Master title style</a:t>
             </a:r>
-            <a:endParaRPr lang="en-US"/>
           </a:p>
         </p:txBody>
       </p:sp>
@@ -2160,38 +2157,37 @@
           <a:p>
             <a:pPr lvl="0"/>
             <a:r>
-              <a:rPr lang="en-US" smtClean="0"/>
+              <a:rPr lang="en-US"/>
               <a:t>Click to edit Master text styles</a:t>
             </a:r>
           </a:p>
           <a:p>
             <a:pPr lvl="1"/>
             <a:r>
-              <a:rPr lang="en-US" smtClean="0"/>
+              <a:rPr lang="en-US"/>
               <a:t>Second level</a:t>
             </a:r>
           </a:p>
           <a:p>
             <a:pPr lvl="2"/>
             <a:r>
-              <a:rPr lang="en-US" smtClean="0"/>
+              <a:rPr lang="en-US"/>
               <a:t>Third level</a:t>
             </a:r>
           </a:p>
           <a:p>
             <a:pPr lvl="3"/>
             <a:r>
-              <a:rPr lang="en-US" smtClean="0"/>
+              <a:rPr lang="en-US"/>
               <a:t>Fourth level</a:t>
             </a:r>
           </a:p>
           <a:p>
             <a:pPr lvl="4"/>
             <a:r>
-              <a:rPr lang="en-US" smtClean="0"/>
+              <a:rPr lang="en-US"/>
               <a:t>Fifth level</a:t>
             </a:r>
-            <a:endParaRPr lang="en-US"/>
           </a:p>
         </p:txBody>
       </p:sp>
@@ -2254,7 +2250,7 @@
           <a:p>
             <a:pPr lvl="0"/>
             <a:r>
-              <a:rPr lang="en-US" smtClean="0"/>
+              <a:rPr lang="en-US"/>
               <a:t>Click to edit Master text styles</a:t>
             </a:r>
           </a:p>
@@ -2277,7 +2273,7 @@
           <a:p>
             <a:fld id="{5BCAD085-E8A6-8845-BD4E-CB4CCA059FC4}" type="datetimeFigureOut">
               <a:rPr lang="en-US" smtClean="0"/>
-              <a:t>1/27/13</a:t>
+              <a:t>9/26/26</a:t>
             </a:fld>
             <a:endParaRPr lang="en-US"/>
           </a:p>
@@ -2380,10 +2376,9 @@
           </a:lstStyle>
           <a:p>
             <a:r>
-              <a:rPr lang="en-US" smtClean="0"/>
+              <a:rPr lang="en-US"/>
               <a:t>Click to edit Master title style</a:t>
             </a:r>
-            <a:endParaRPr lang="en-US"/>
           </a:p>
         </p:txBody>
       </p:sp>
@@ -2507,7 +2502,7 @@
           <a:p>
             <a:pPr lvl="0"/>
             <a:r>
-              <a:rPr lang="en-US" smtClean="0"/>
+              <a:rPr lang="en-US"/>
               <a:t>Click to edit Master text styles</a:t>
             </a:r>
           </a:p>
@@ -2530,7 +2525,7 @@
           <a:p>
             <a:fld id="{5BCAD085-E8A6-8845-BD4E-CB4CCA059FC4}" type="datetimeFigureOut">
               <a:rPr lang="en-US" smtClean="0"/>
-              <a:t>1/27/13</a:t>
+              <a:t>9/26/26</a:t>
             </a:fld>
             <a:endParaRPr lang="en-US"/>
           </a:p>
@@ -2639,10 +2634,9 @@
           <a:lstStyle/>
           <a:p>
             <a:r>
-              <a:rPr lang="en-US" smtClean="0"/>
+              <a:rPr lang="en-US"/>
               <a:t>Click to edit Master title style</a:t>
             </a:r>
-            <a:endParaRPr lang="en-US"/>
           </a:p>
         </p:txBody>
       </p:sp>
@@ -2673,38 +2667,37 @@
           <a:p>
             <a:pPr lvl="0"/>
             <a:r>
-              <a:rPr lang="en-US" smtClean="0"/>
+              <a:rPr lang="en-US"/>
               <a:t>Click to edit Master text styles</a:t>
             </a:r>
           </a:p>
           <a:p>
             <a:pPr lvl="1"/>
             <a:r>
-              <a:rPr lang="en-US" smtClean="0"/>
+              <a:rPr lang="en-US"/>
               <a:t>Second level</a:t>
             </a:r>
           </a:p>
           <a:p>
             <a:pPr lvl="2"/>
             <a:r>
-              <a:rPr lang="en-US" smtClean="0"/>
+              <a:rPr lang="en-US"/>
               <a:t>Third level</a:t>
             </a:r>
           </a:p>
           <a:p>
             <a:pPr lvl="3"/>
             <a:r>
-              <a:rPr lang="en-US" smtClean="0"/>
+              <a:rPr lang="en-US"/>
               <a:t>Fourth level</a:t>
             </a:r>
           </a:p>
           <a:p>
             <a:pPr lvl="4"/>
             <a:r>
-              <a:rPr lang="en-US" smtClean="0"/>
+              <a:rPr lang="en-US"/>
               <a:t>Fifth level</a:t>
             </a:r>
-            <a:endParaRPr lang="en-US"/>
           </a:p>
         </p:txBody>
       </p:sp>
@@ -2743,7 +2736,7 @@
           <a:p>
             <a:fld id="{5BCAD085-E8A6-8845-BD4E-CB4CCA059FC4}" type="datetimeFigureOut">
               <a:rPr lang="en-US" smtClean="0"/>
-              <a:t>1/27/13</a:t>
+              <a:t>9/26/26</a:t>
             </a:fld>
             <a:endParaRPr lang="en-US"/>
           </a:p>
@@ -3102,7 +3095,7 @@
 </file>
 
 <file path=ppt/slides/slide1.xml><?xml version="1.0" encoding="utf-8"?>
-<p:sld xmlns:a="http://schemas.openxmlformats.org/drawingml/2006/main" xmlns:p="http://schemas.openxmlformats.org/presentationml/2006/main" xmlns:r="http://schemas.openxmlformats.org/officeDocument/2006/relationships">
+<p:sld xmlns:a="http://schemas.openxmlformats.org/drawingml/2006/main" xmlns:r="http://schemas.openxmlformats.org/officeDocument/2006/relationships" xmlns:p="http://schemas.openxmlformats.org/presentationml/2006/main">
   <p:cSld>
     <p:spTree>
       <p:nvGrpSpPr>
@@ -3110,7 +3103,14 @@
         <p:cNvGrpSpPr/>
         <p:nvPr/>
       </p:nvGrpSpPr>
-      <p:grpSpPr/>
+      <p:grpSpPr>
+        <a:xfrm>
+          <a:off x="0" y="0"/>
+          <a:ext cx="0" cy="0"/>
+          <a:chOff x="0" y="0"/>
+          <a:chExt cx="0" cy="0"/>
+        </a:xfrm>
+      </p:grpSpPr>
       <p:sp>
         <p:nvSpPr>
           <p:cNvPr id="2" name="Rectangle 1"/>
@@ -3151,6 +3151,7 @@
           <a:lstStyle/>
           <a:p>
             <a:pPr algn="ctr"/>
+            <a:endParaRPr/>
           </a:p>
         </p:txBody>
       </p:sp>
@@ -3194,6 +3195,7 @@
           <a:lstStyle/>
           <a:p>
             <a:pPr algn="ctr"/>
+            <a:endParaRPr/>
           </a:p>
         </p:txBody>
       </p:sp>
@@ -3206,7 +3208,7 @@
           <p:nvPr/>
         </p:nvPicPr>
         <p:blipFill>
-          <a:blip r:embed="rId2"/>
+          <a:blip r:embed="rId4"/>
           <a:stretch>
             <a:fillRect/>
           </a:stretch>
@@ -3230,7 +3232,7 @@
         <p:spPr>
           <a:xfrm>
             <a:off x="640080" y="1874519"/>
-            <a:ext cx="10972800" cy="3840480"/>
+            <a:ext cx="10972800" cy="2015936"/>
           </a:xfrm>
           <a:prstGeom prst="rect">
             <a:avLst/>
@@ -3249,7 +3251,7 @@
               </a:spcAft>
             </a:pPr>
             <a:r>
-              <a:rPr sz="1600" b="1">
+              <a:rPr sz="1600" b="1" dirty="0">
                 <a:solidFill>
                   <a:srgbClr val="93C5FD"/>
                 </a:solidFill>
@@ -3265,61 +3267,54 @@
               </a:spcAft>
             </a:pPr>
             <a:r>
-              <a:rPr sz="5400" b="1">
+              <a:rPr sz="5400" b="1" dirty="0">
                 <a:solidFill>
                   <a:srgbClr val="FFFFFF"/>
                 </a:solidFill>
                 <a:latin typeface="Calibri"/>
               </a:rPr>
+              <a:t>Meet TEQGRID</a:t>
+            </a:r>
+          </a:p>
+          <a:p>
+            <a:pPr algn="l">
+              <a:spcAft>
+                <a:spcPts val="600"/>
+              </a:spcAft>
+            </a:pPr>
+            <a:r>
+              <a:rPr sz="2200" b="0" dirty="0" err="1">
+                <a:solidFill>
+                  <a:srgbClr val="CBD5E1"/>
+                </a:solidFill>
+                <a:latin typeface="Calibri"/>
+              </a:rPr>
               <a:t>ResumeFit</a:t>
             </a:r>
-          </a:p>
-          <a:p>
-            <a:pPr algn="l">
-              <a:spcAft>
-                <a:spcPts val="600"/>
-              </a:spcAft>
-            </a:pPr>
-            <a:r>
-              <a:rPr sz="2600" b="0">
+            <a:r>
+              <a:rPr sz="2200" b="0" dirty="0">
                 <a:solidFill>
                   <a:srgbClr val="CBD5E1"/>
                 </a:solidFill>
                 <a:latin typeface="Calibri"/>
               </a:rPr>
-              <a:t>Match a resume to a job with a real AI API</a:t>
-            </a:r>
-          </a:p>
-          <a:p>
-            <a:pPr algn="l">
-              <a:spcAft>
-                <a:spcPts val="600"/>
-              </a:spcAft>
-            </a:pPr>
-            <a:r>
-              <a:rPr sz="1800" b="0">
+              <a:t>  ·  match a resume to a job with a real AI API</a:t>
+            </a:r>
+          </a:p>
+          <a:p>
+            <a:pPr algn="l">
+              <a:spcAft>
+                <a:spcPts val="600"/>
+              </a:spcAft>
+            </a:pPr>
+            <a:r>
+              <a:rPr sz="1800" b="0" dirty="0">
                 <a:solidFill>
                   <a:srgbClr val="94A3B8"/>
                 </a:solidFill>
                 <a:latin typeface="Calibri"/>
               </a:rPr>
               <a:t>React Native + Google Gemini  ·  live on a phone</a:t>
-            </a:r>
-          </a:p>
-          <a:p>
-            <a:pPr algn="l">
-              <a:spcAft>
-                <a:spcPts val="600"/>
-              </a:spcAft>
-            </a:pPr>
-            <a:r>
-              <a:rPr sz="1600" b="0">
-                <a:solidFill>
-                  <a:srgbClr val="93C5FD"/>
-                </a:solidFill>
-                <a:latin typeface="Calibri"/>
-              </a:rPr>
-              <a:t>Click ♪ on this slide for music</a:t>
             </a:r>
           </a:p>
         </p:txBody>
@@ -3333,16 +3328,16 @@
             <a:picLocks noChangeAspect="1"/>
           </p:cNvPicPr>
           <p:nvPr>
-            <a:videoFile r:link="rId4"/>
+            <a:audioFile r:link="rId2"/>
             <p:extLst>
               <p:ext uri="{DAA4B4D4-6D71-4841-9C94-3DE7FCFB9230}">
-                <p14:media xmlns:p14="http://schemas.microsoft.com/office/powerpoint/2010/main" r:embed="rId3"/>
+                <p14:media xmlns:p14="http://schemas.microsoft.com/office/powerpoint/2010/main" r:embed="rId1"/>
               </p:ext>
             </p:extLst>
           </p:nvPr>
         </p:nvPicPr>
         <p:blipFill>
-          <a:blip r:embed="rId2"/>
+          <a:blip r:embed="rId4"/>
           <a:stretch>
             <a:fillRect/>
           </a:stretch>
@@ -3381,7 +3376,7 @@
           <a:p>
             <a:pPr algn="r"/>
             <a:r>
-              <a:rPr sz="1200" b="1">
+              <a:rPr sz="1200" b="1" dirty="0">
                 <a:solidFill>
                   <a:srgbClr val="FFFFFF"/>
                 </a:solidFill>
@@ -3402,7 +3397,7 @@
       <p:par>
         <p:cTn id="1" dur="indefinite" restart="never" nodeType="tmRoot">
           <p:childTnLst>
-            <p:video>
+            <p:audio>
               <p:cMediaNode vol="80000">
                 <p:cTn id="2" fill="hold" display="0">
                   <p:stCondLst>
@@ -3413,7 +3408,7 @@
                   <p:spTgt spid="6"/>
                 </p:tgtEl>
               </p:cMediaNode>
-            </p:video>
+            </p:audio>
           </p:childTnLst>
         </p:cTn>
       </p:par>
@@ -3423,7 +3418,7 @@
 </file>
 
 <file path=ppt/slides/slide10.xml><?xml version="1.0" encoding="utf-8"?>
-<p:sld xmlns:a="http://schemas.openxmlformats.org/drawingml/2006/main" xmlns:p="http://schemas.openxmlformats.org/presentationml/2006/main" xmlns:r="http://schemas.openxmlformats.org/officeDocument/2006/relationships">
+<p:sld xmlns:a="http://schemas.openxmlformats.org/drawingml/2006/main" xmlns:r="http://schemas.openxmlformats.org/officeDocument/2006/relationships" xmlns:p="http://schemas.openxmlformats.org/presentationml/2006/main">
   <p:cSld>
     <p:spTree>
       <p:nvGrpSpPr>
@@ -3431,7 +3426,14 @@
         <p:cNvGrpSpPr/>
         <p:nvPr/>
       </p:nvGrpSpPr>
-      <p:grpSpPr/>
+      <p:grpSpPr>
+        <a:xfrm>
+          <a:off x="0" y="0"/>
+          <a:ext cx="0" cy="0"/>
+          <a:chOff x="0" y="0"/>
+          <a:chExt cx="0" cy="0"/>
+        </a:xfrm>
+      </p:grpSpPr>
       <p:sp>
         <p:nvSpPr>
           <p:cNvPr id="2" name="Rectangle 1"/>
@@ -3472,6 +3474,7 @@
           <a:lstStyle/>
           <a:p>
             <a:pPr algn="ctr"/>
+            <a:endParaRPr/>
           </a:p>
         </p:txBody>
       </p:sp>
@@ -3515,6 +3518,7 @@
           <a:lstStyle/>
           <a:p>
             <a:pPr algn="ctr"/>
+            <a:endParaRPr/>
           </a:p>
         </p:txBody>
       </p:sp>
@@ -3636,6 +3640,7 @@
           <a:lstStyle/>
           <a:p>
             <a:pPr algn="ctr"/>
+            <a:endParaRPr/>
           </a:p>
         </p:txBody>
       </p:sp>
@@ -3734,6 +3739,7 @@
           <a:lstStyle/>
           <a:p>
             <a:pPr algn="ctr"/>
+            <a:endParaRPr/>
           </a:p>
         </p:txBody>
       </p:sp>
@@ -3777,6 +3783,7 @@
           <a:lstStyle/>
           <a:p>
             <a:pPr algn="ctr"/>
+            <a:endParaRPr/>
           </a:p>
         </p:txBody>
       </p:sp>
@@ -3875,6 +3882,7 @@
           <a:lstStyle/>
           <a:p>
             <a:pPr algn="ctr"/>
+            <a:endParaRPr/>
           </a:p>
         </p:txBody>
       </p:sp>
@@ -3918,6 +3926,7 @@
           <a:lstStyle/>
           <a:p>
             <a:pPr algn="ctr"/>
+            <a:endParaRPr/>
           </a:p>
         </p:txBody>
       </p:sp>
@@ -4016,6 +4025,7 @@
           <a:lstStyle/>
           <a:p>
             <a:pPr algn="ctr"/>
+            <a:endParaRPr/>
           </a:p>
         </p:txBody>
       </p:sp>
@@ -4059,6 +4069,7 @@
           <a:lstStyle/>
           <a:p>
             <a:pPr algn="ctr"/>
+            <a:endParaRPr/>
           </a:p>
         </p:txBody>
       </p:sp>
@@ -4157,6 +4168,7 @@
           <a:lstStyle/>
           <a:p>
             <a:pPr algn="ctr"/>
+            <a:endParaRPr/>
           </a:p>
         </p:txBody>
       </p:sp>
@@ -4200,6 +4212,7 @@
           <a:lstStyle/>
           <a:p>
             <a:pPr algn="ctr"/>
+            <a:endParaRPr/>
           </a:p>
         </p:txBody>
       </p:sp>
@@ -4298,6 +4311,7 @@
           <a:lstStyle/>
           <a:p>
             <a:pPr algn="ctr"/>
+            <a:endParaRPr/>
           </a:p>
         </p:txBody>
       </p:sp>
@@ -4341,6 +4355,7 @@
           <a:lstStyle/>
           <a:p>
             <a:pPr algn="ctr"/>
+            <a:endParaRPr/>
           </a:p>
         </p:txBody>
       </p:sp>
@@ -4439,6 +4454,7 @@
           <a:lstStyle/>
           <a:p>
             <a:pPr algn="ctr"/>
+            <a:endParaRPr/>
           </a:p>
         </p:txBody>
       </p:sp>
@@ -4482,6 +4498,7 @@
           <a:lstStyle/>
           <a:p>
             <a:pPr algn="ctr"/>
+            <a:endParaRPr/>
           </a:p>
         </p:txBody>
       </p:sp>
@@ -4580,6 +4597,7 @@
           <a:lstStyle/>
           <a:p>
             <a:pPr algn="ctr"/>
+            <a:endParaRPr/>
           </a:p>
         </p:txBody>
       </p:sp>
@@ -4623,6 +4641,7 @@
           <a:lstStyle/>
           <a:p>
             <a:pPr algn="ctr"/>
+            <a:endParaRPr/>
           </a:p>
         </p:txBody>
       </p:sp>
@@ -4792,6 +4811,7 @@
           <a:lstStyle/>
           <a:p>
             <a:pPr algn="ctr"/>
+            <a:endParaRPr/>
           </a:p>
         </p:txBody>
       </p:sp>
@@ -4824,7 +4844,7 @@
                 </a:solidFill>
                 <a:latin typeface="Calibri"/>
               </a:rPr>
-              <a:t>ResumeFit  ·  TEQGRID seminar</a:t>
+              <a:t>Meet TEQGRID  ·  ResumeFit seminar</a:t>
             </a:r>
           </a:p>
         </p:txBody>
@@ -4873,7 +4893,7 @@
 </file>
 
 <file path=ppt/slides/slide11.xml><?xml version="1.0" encoding="utf-8"?>
-<p:sld xmlns:a="http://schemas.openxmlformats.org/drawingml/2006/main" xmlns:p="http://schemas.openxmlformats.org/presentationml/2006/main" xmlns:r="http://schemas.openxmlformats.org/officeDocument/2006/relationships">
+<p:sld xmlns:a="http://schemas.openxmlformats.org/drawingml/2006/main" xmlns:r="http://schemas.openxmlformats.org/officeDocument/2006/relationships" xmlns:p="http://schemas.openxmlformats.org/presentationml/2006/main">
   <p:cSld>
     <p:spTree>
       <p:nvGrpSpPr>
@@ -4881,7 +4901,14 @@
         <p:cNvGrpSpPr/>
         <p:nvPr/>
       </p:nvGrpSpPr>
-      <p:grpSpPr/>
+      <p:grpSpPr>
+        <a:xfrm>
+          <a:off x="0" y="0"/>
+          <a:ext cx="0" cy="0"/>
+          <a:chOff x="0" y="0"/>
+          <a:chExt cx="0" cy="0"/>
+        </a:xfrm>
+      </p:grpSpPr>
       <p:sp>
         <p:nvSpPr>
           <p:cNvPr id="2" name="Rectangle 1"/>
@@ -4922,6 +4949,7 @@
           <a:lstStyle/>
           <a:p>
             <a:pPr algn="ctr"/>
+            <a:endParaRPr/>
           </a:p>
         </p:txBody>
       </p:sp>
@@ -4965,6 +4993,7 @@
           <a:lstStyle/>
           <a:p>
             <a:pPr algn="ctr"/>
+            <a:endParaRPr/>
           </a:p>
         </p:txBody>
       </p:sp>
@@ -5079,6 +5108,7 @@
           <a:lstStyle/>
           <a:p>
             <a:pPr algn="ctr"/>
+            <a:endParaRPr/>
           </a:p>
         </p:txBody>
       </p:sp>
@@ -5111,7 +5141,7 @@
                 </a:solidFill>
                 <a:latin typeface="Calibri"/>
               </a:rPr>
-              <a:t>ResumeFit  ·  TEQGRID seminar</a:t>
+              <a:t>Meet TEQGRID  ·  ResumeFit seminar</a:t>
             </a:r>
           </a:p>
         </p:txBody>
@@ -5160,7 +5190,7 @@
 </file>
 
 <file path=ppt/slides/slide12.xml><?xml version="1.0" encoding="utf-8"?>
-<p:sld xmlns:a="http://schemas.openxmlformats.org/drawingml/2006/main" xmlns:p="http://schemas.openxmlformats.org/presentationml/2006/main" xmlns:r="http://schemas.openxmlformats.org/officeDocument/2006/relationships">
+<p:sld xmlns:a="http://schemas.openxmlformats.org/drawingml/2006/main" xmlns:r="http://schemas.openxmlformats.org/officeDocument/2006/relationships" xmlns:p="http://schemas.openxmlformats.org/presentationml/2006/main">
   <p:cSld>
     <p:spTree>
       <p:nvGrpSpPr>
@@ -5168,7 +5198,14 @@
         <p:cNvGrpSpPr/>
         <p:nvPr/>
       </p:nvGrpSpPr>
-      <p:grpSpPr/>
+      <p:grpSpPr>
+        <a:xfrm>
+          <a:off x="0" y="0"/>
+          <a:ext cx="0" cy="0"/>
+          <a:chOff x="0" y="0"/>
+          <a:chExt cx="0" cy="0"/>
+        </a:xfrm>
+      </p:grpSpPr>
       <p:sp>
         <p:nvSpPr>
           <p:cNvPr id="2" name="Rectangle 1"/>
@@ -5209,6 +5246,7 @@
           <a:lstStyle/>
           <a:p>
             <a:pPr algn="ctr"/>
+            <a:endParaRPr/>
           </a:p>
         </p:txBody>
       </p:sp>
@@ -5252,6 +5290,7 @@
           <a:lstStyle/>
           <a:p>
             <a:pPr algn="ctr"/>
+            <a:endParaRPr/>
           </a:p>
         </p:txBody>
       </p:sp>
@@ -5508,6 +5547,7 @@
           <a:lstStyle/>
           <a:p>
             <a:pPr algn="ctr"/>
+            <a:endParaRPr/>
           </a:p>
         </p:txBody>
       </p:sp>
@@ -5590,6 +5630,7 @@
           <a:lstStyle/>
           <a:p>
             <a:pPr algn="ctr"/>
+            <a:endParaRPr/>
           </a:p>
         </p:txBody>
       </p:sp>
@@ -5622,7 +5663,7 @@
                 </a:solidFill>
                 <a:latin typeface="Calibri"/>
               </a:rPr>
-              <a:t>ResumeFit  ·  TEQGRID seminar</a:t>
+              <a:t>Meet TEQGRID  ·  ResumeFit seminar</a:t>
             </a:r>
           </a:p>
         </p:txBody>
@@ -5671,7 +5712,7 @@
 </file>
 
 <file path=ppt/slides/slide13.xml><?xml version="1.0" encoding="utf-8"?>
-<p:sld xmlns:a="http://schemas.openxmlformats.org/drawingml/2006/main" xmlns:p="http://schemas.openxmlformats.org/presentationml/2006/main" xmlns:r="http://schemas.openxmlformats.org/officeDocument/2006/relationships">
+<p:sld xmlns:a="http://schemas.openxmlformats.org/drawingml/2006/main" xmlns:r="http://schemas.openxmlformats.org/officeDocument/2006/relationships" xmlns:p="http://schemas.openxmlformats.org/presentationml/2006/main">
   <p:cSld>
     <p:spTree>
       <p:nvGrpSpPr>
@@ -5679,7 +5720,14 @@
         <p:cNvGrpSpPr/>
         <p:nvPr/>
       </p:nvGrpSpPr>
-      <p:grpSpPr/>
+      <p:grpSpPr>
+        <a:xfrm>
+          <a:off x="0" y="0"/>
+          <a:ext cx="0" cy="0"/>
+          <a:chOff x="0" y="0"/>
+          <a:chExt cx="0" cy="0"/>
+        </a:xfrm>
+      </p:grpSpPr>
       <p:sp>
         <p:nvSpPr>
           <p:cNvPr id="2" name="Rectangle 1"/>
@@ -5720,6 +5768,7 @@
           <a:lstStyle/>
           <a:p>
             <a:pPr algn="ctr"/>
+            <a:endParaRPr/>
           </a:p>
         </p:txBody>
       </p:sp>
@@ -5763,6 +5812,7 @@
           <a:lstStyle/>
           <a:p>
             <a:pPr algn="ctr"/>
+            <a:endParaRPr/>
           </a:p>
         </p:txBody>
       </p:sp>
@@ -5884,6 +5934,7 @@
           <a:lstStyle/>
           <a:p>
             <a:pPr algn="ctr"/>
+            <a:endParaRPr/>
           </a:p>
         </p:txBody>
       </p:sp>
@@ -5962,6 +6013,7 @@
           <a:lstStyle/>
           <a:p>
             <a:pPr algn="ctr"/>
+            <a:endParaRPr/>
           </a:p>
         </p:txBody>
       </p:sp>
@@ -6044,6 +6096,7 @@
           <a:lstStyle/>
           <a:p>
             <a:pPr algn="ctr"/>
+            <a:endParaRPr/>
           </a:p>
         </p:txBody>
       </p:sp>
@@ -6087,6 +6140,7 @@
           <a:lstStyle/>
           <a:p>
             <a:pPr algn="ctr"/>
+            <a:endParaRPr/>
           </a:p>
         </p:txBody>
       </p:sp>
@@ -6165,6 +6219,7 @@
           <a:lstStyle/>
           <a:p>
             <a:pPr algn="ctr"/>
+            <a:endParaRPr/>
           </a:p>
         </p:txBody>
       </p:sp>
@@ -6247,6 +6302,7 @@
           <a:lstStyle/>
           <a:p>
             <a:pPr algn="ctr"/>
+            <a:endParaRPr/>
           </a:p>
         </p:txBody>
       </p:sp>
@@ -6290,6 +6346,7 @@
           <a:lstStyle/>
           <a:p>
             <a:pPr algn="ctr"/>
+            <a:endParaRPr/>
           </a:p>
         </p:txBody>
       </p:sp>
@@ -6368,6 +6425,7 @@
           <a:lstStyle/>
           <a:p>
             <a:pPr algn="ctr"/>
+            <a:endParaRPr/>
           </a:p>
         </p:txBody>
       </p:sp>
@@ -6450,6 +6508,7 @@
           <a:lstStyle/>
           <a:p>
             <a:pPr algn="ctr"/>
+            <a:endParaRPr/>
           </a:p>
         </p:txBody>
       </p:sp>
@@ -6493,6 +6552,7 @@
           <a:lstStyle/>
           <a:p>
             <a:pPr algn="ctr"/>
+            <a:endParaRPr/>
           </a:p>
         </p:txBody>
       </p:sp>
@@ -6571,6 +6631,7 @@
           <a:lstStyle/>
           <a:p>
             <a:pPr algn="ctr"/>
+            <a:endParaRPr/>
           </a:p>
         </p:txBody>
       </p:sp>
@@ -6653,6 +6714,7 @@
           <a:lstStyle/>
           <a:p>
             <a:pPr algn="ctr"/>
+            <a:endParaRPr/>
           </a:p>
         </p:txBody>
       </p:sp>
@@ -6696,6 +6758,7 @@
           <a:lstStyle/>
           <a:p>
             <a:pPr algn="ctr"/>
+            <a:endParaRPr/>
           </a:p>
         </p:txBody>
       </p:sp>
@@ -6774,6 +6837,7 @@
           <a:lstStyle/>
           <a:p>
             <a:pPr algn="ctr"/>
+            <a:endParaRPr/>
           </a:p>
         </p:txBody>
       </p:sp>
@@ -6856,6 +6920,7 @@
           <a:lstStyle/>
           <a:p>
             <a:pPr algn="ctr"/>
+            <a:endParaRPr/>
           </a:p>
         </p:txBody>
       </p:sp>
@@ -6899,6 +6964,7 @@
           <a:lstStyle/>
           <a:p>
             <a:pPr algn="ctr"/>
+            <a:endParaRPr/>
           </a:p>
         </p:txBody>
       </p:sp>
@@ -6977,6 +7043,7 @@
           <a:lstStyle/>
           <a:p>
             <a:pPr algn="ctr"/>
+            <a:endParaRPr/>
           </a:p>
         </p:txBody>
       </p:sp>
@@ -7124,6 +7191,7 @@
           <a:lstStyle/>
           <a:p>
             <a:pPr algn="ctr"/>
+            <a:endParaRPr/>
           </a:p>
         </p:txBody>
       </p:sp>
@@ -7205,6 +7273,7 @@
           <a:lstStyle/>
           <a:p>
             <a:pPr algn="ctr"/>
+            <a:endParaRPr/>
           </a:p>
         </p:txBody>
       </p:sp>
@@ -7286,6 +7355,7 @@
           <a:lstStyle/>
           <a:p>
             <a:pPr algn="ctr"/>
+            <a:endParaRPr/>
           </a:p>
         </p:txBody>
       </p:sp>
@@ -7404,6 +7474,7 @@
           <a:lstStyle/>
           <a:p>
             <a:pPr algn="ctr"/>
+            <a:endParaRPr/>
           </a:p>
         </p:txBody>
       </p:sp>
@@ -7436,7 +7507,7 @@
                 </a:solidFill>
                 <a:latin typeface="Calibri"/>
               </a:rPr>
-              <a:t>ResumeFit  ·  TEQGRID seminar</a:t>
+              <a:t>Meet TEQGRID  ·  ResumeFit seminar</a:t>
             </a:r>
           </a:p>
         </p:txBody>
@@ -7485,7 +7556,7 @@
 </file>
 
 <file path=ppt/slides/slide14.xml><?xml version="1.0" encoding="utf-8"?>
-<p:sld xmlns:a="http://schemas.openxmlformats.org/drawingml/2006/main" xmlns:p="http://schemas.openxmlformats.org/presentationml/2006/main" xmlns:r="http://schemas.openxmlformats.org/officeDocument/2006/relationships">
+<p:sld xmlns:a="http://schemas.openxmlformats.org/drawingml/2006/main" xmlns:r="http://schemas.openxmlformats.org/officeDocument/2006/relationships" xmlns:p="http://schemas.openxmlformats.org/presentationml/2006/main">
   <p:cSld>
     <p:spTree>
       <p:nvGrpSpPr>
@@ -7493,7 +7564,14 @@
         <p:cNvGrpSpPr/>
         <p:nvPr/>
       </p:nvGrpSpPr>
-      <p:grpSpPr/>
+      <p:grpSpPr>
+        <a:xfrm>
+          <a:off x="0" y="0"/>
+          <a:ext cx="0" cy="0"/>
+          <a:chOff x="0" y="0"/>
+          <a:chExt cx="0" cy="0"/>
+        </a:xfrm>
+      </p:grpSpPr>
       <p:sp>
         <p:nvSpPr>
           <p:cNvPr id="2" name="Rectangle 1"/>
@@ -7534,6 +7612,7 @@
           <a:lstStyle/>
           <a:p>
             <a:pPr algn="ctr"/>
+            <a:endParaRPr/>
           </a:p>
         </p:txBody>
       </p:sp>
@@ -7577,6 +7656,7 @@
           <a:lstStyle/>
           <a:p>
             <a:pPr algn="ctr"/>
+            <a:endParaRPr/>
           </a:p>
         </p:txBody>
       </p:sp>
@@ -7691,6 +7771,7 @@
           <a:lstStyle/>
           <a:p>
             <a:pPr algn="ctr"/>
+            <a:endParaRPr/>
           </a:p>
         </p:txBody>
       </p:sp>
@@ -7723,7 +7804,7 @@
                 </a:solidFill>
                 <a:latin typeface="Calibri"/>
               </a:rPr>
-              <a:t>ResumeFit  ·  TEQGRID seminar</a:t>
+              <a:t>Meet TEQGRID  ·  ResumeFit seminar</a:t>
             </a:r>
           </a:p>
         </p:txBody>
@@ -7772,7 +7853,7 @@
 </file>
 
 <file path=ppt/slides/slide15.xml><?xml version="1.0" encoding="utf-8"?>
-<p:sld xmlns:a="http://schemas.openxmlformats.org/drawingml/2006/main" xmlns:p="http://schemas.openxmlformats.org/presentationml/2006/main" xmlns:r="http://schemas.openxmlformats.org/officeDocument/2006/relationships">
+<p:sld xmlns:a="http://schemas.openxmlformats.org/drawingml/2006/main" xmlns:r="http://schemas.openxmlformats.org/officeDocument/2006/relationships" xmlns:p="http://schemas.openxmlformats.org/presentationml/2006/main">
   <p:cSld>
     <p:spTree>
       <p:nvGrpSpPr>
@@ -7780,7 +7861,14 @@
         <p:cNvGrpSpPr/>
         <p:nvPr/>
       </p:nvGrpSpPr>
-      <p:grpSpPr/>
+      <p:grpSpPr>
+        <a:xfrm>
+          <a:off x="0" y="0"/>
+          <a:ext cx="0" cy="0"/>
+          <a:chOff x="0" y="0"/>
+          <a:chExt cx="0" cy="0"/>
+        </a:xfrm>
+      </p:grpSpPr>
       <p:sp>
         <p:nvSpPr>
           <p:cNvPr id="2" name="Rectangle 1"/>
@@ -7821,6 +7909,7 @@
           <a:lstStyle/>
           <a:p>
             <a:pPr algn="ctr"/>
+            <a:endParaRPr/>
           </a:p>
         </p:txBody>
       </p:sp>
@@ -7864,6 +7953,7 @@
           <a:lstStyle/>
           <a:p>
             <a:pPr algn="ctr"/>
+            <a:endParaRPr/>
           </a:p>
         </p:txBody>
       </p:sp>
@@ -8104,6 +8194,7 @@
           <a:lstStyle/>
           <a:p>
             <a:pPr algn="ctr"/>
+            <a:endParaRPr/>
           </a:p>
         </p:txBody>
       </p:sp>
@@ -8186,6 +8277,7 @@
           <a:lstStyle/>
           <a:p>
             <a:pPr algn="ctr"/>
+            <a:endParaRPr/>
           </a:p>
         </p:txBody>
       </p:sp>
@@ -8218,7 +8310,7 @@
                 </a:solidFill>
                 <a:latin typeface="Calibri"/>
               </a:rPr>
-              <a:t>ResumeFit  ·  TEQGRID seminar</a:t>
+              <a:t>Meet TEQGRID  ·  ResumeFit seminar</a:t>
             </a:r>
           </a:p>
         </p:txBody>
@@ -8267,7 +8359,7 @@
 </file>
 
 <file path=ppt/slides/slide16.xml><?xml version="1.0" encoding="utf-8"?>
-<p:sld xmlns:a="http://schemas.openxmlformats.org/drawingml/2006/main" xmlns:p="http://schemas.openxmlformats.org/presentationml/2006/main" xmlns:r="http://schemas.openxmlformats.org/officeDocument/2006/relationships">
+<p:sld xmlns:a="http://schemas.openxmlformats.org/drawingml/2006/main" xmlns:r="http://schemas.openxmlformats.org/officeDocument/2006/relationships" xmlns:p="http://schemas.openxmlformats.org/presentationml/2006/main">
   <p:cSld>
     <p:spTree>
       <p:nvGrpSpPr>
@@ -8275,7 +8367,14 @@
         <p:cNvGrpSpPr/>
         <p:nvPr/>
       </p:nvGrpSpPr>
-      <p:grpSpPr/>
+      <p:grpSpPr>
+        <a:xfrm>
+          <a:off x="0" y="0"/>
+          <a:ext cx="0" cy="0"/>
+          <a:chOff x="0" y="0"/>
+          <a:chExt cx="0" cy="0"/>
+        </a:xfrm>
+      </p:grpSpPr>
       <p:sp>
         <p:nvSpPr>
           <p:cNvPr id="2" name="Rectangle 1"/>
@@ -8316,6 +8415,7 @@
           <a:lstStyle/>
           <a:p>
             <a:pPr algn="ctr"/>
+            <a:endParaRPr/>
           </a:p>
         </p:txBody>
       </p:sp>
@@ -8359,6 +8459,7 @@
           <a:lstStyle/>
           <a:p>
             <a:pPr algn="ctr"/>
+            <a:endParaRPr/>
           </a:p>
         </p:txBody>
       </p:sp>
@@ -8480,6 +8581,7 @@
           <a:lstStyle/>
           <a:p>
             <a:pPr algn="ctr"/>
+            <a:endParaRPr/>
           </a:p>
         </p:txBody>
       </p:sp>
@@ -8523,6 +8625,7 @@
           <a:lstStyle/>
           <a:p>
             <a:pPr algn="ctr"/>
+            <a:endParaRPr/>
           </a:p>
         </p:txBody>
       </p:sp>
@@ -8898,6 +9001,7 @@
           <a:lstStyle/>
           <a:p>
             <a:pPr algn="ctr"/>
+            <a:endParaRPr/>
           </a:p>
         </p:txBody>
       </p:sp>
@@ -8930,7 +9034,7 @@
                 </a:solidFill>
                 <a:latin typeface="Calibri"/>
               </a:rPr>
-              <a:t>ResumeFit  ·  TEQGRID seminar</a:t>
+              <a:t>Meet TEQGRID  ·  ResumeFit seminar</a:t>
             </a:r>
           </a:p>
         </p:txBody>
@@ -8979,7 +9083,7 @@
 </file>
 
 <file path=ppt/slides/slide17.xml><?xml version="1.0" encoding="utf-8"?>
-<p:sld xmlns:a="http://schemas.openxmlformats.org/drawingml/2006/main" xmlns:p="http://schemas.openxmlformats.org/presentationml/2006/main" xmlns:r="http://schemas.openxmlformats.org/officeDocument/2006/relationships">
+<p:sld xmlns:a="http://schemas.openxmlformats.org/drawingml/2006/main" xmlns:r="http://schemas.openxmlformats.org/officeDocument/2006/relationships" xmlns:p="http://schemas.openxmlformats.org/presentationml/2006/main">
   <p:cSld>
     <p:spTree>
       <p:nvGrpSpPr>
@@ -8987,7 +9091,14 @@
         <p:cNvGrpSpPr/>
         <p:nvPr/>
       </p:nvGrpSpPr>
-      <p:grpSpPr/>
+      <p:grpSpPr>
+        <a:xfrm>
+          <a:off x="0" y="0"/>
+          <a:ext cx="0" cy="0"/>
+          <a:chOff x="0" y="0"/>
+          <a:chExt cx="0" cy="0"/>
+        </a:xfrm>
+      </p:grpSpPr>
       <p:sp>
         <p:nvSpPr>
           <p:cNvPr id="2" name="Rectangle 1"/>
@@ -9028,6 +9139,7 @@
           <a:lstStyle/>
           <a:p>
             <a:pPr algn="ctr"/>
+            <a:endParaRPr/>
           </a:p>
         </p:txBody>
       </p:sp>
@@ -9071,6 +9183,7 @@
           <a:lstStyle/>
           <a:p>
             <a:pPr algn="ctr"/>
+            <a:endParaRPr/>
           </a:p>
         </p:txBody>
       </p:sp>
@@ -9311,6 +9424,7 @@
           <a:lstStyle/>
           <a:p>
             <a:pPr algn="ctr"/>
+            <a:endParaRPr/>
           </a:p>
         </p:txBody>
       </p:sp>
@@ -9393,6 +9507,7 @@
           <a:lstStyle/>
           <a:p>
             <a:pPr algn="ctr"/>
+            <a:endParaRPr/>
           </a:p>
         </p:txBody>
       </p:sp>
@@ -9425,7 +9540,7 @@
                 </a:solidFill>
                 <a:latin typeface="Calibri"/>
               </a:rPr>
-              <a:t>ResumeFit  ·  TEQGRID seminar</a:t>
+              <a:t>Meet TEQGRID  ·  ResumeFit seminar</a:t>
             </a:r>
           </a:p>
         </p:txBody>
@@ -9474,7 +9589,7 @@
 </file>
 
 <file path=ppt/slides/slide18.xml><?xml version="1.0" encoding="utf-8"?>
-<p:sld xmlns:a="http://schemas.openxmlformats.org/drawingml/2006/main" xmlns:p="http://schemas.openxmlformats.org/presentationml/2006/main" xmlns:r="http://schemas.openxmlformats.org/officeDocument/2006/relationships">
+<p:sld xmlns:a="http://schemas.openxmlformats.org/drawingml/2006/main" xmlns:r="http://schemas.openxmlformats.org/officeDocument/2006/relationships" xmlns:p="http://schemas.openxmlformats.org/presentationml/2006/main">
   <p:cSld>
     <p:spTree>
       <p:nvGrpSpPr>
@@ -9482,7 +9597,14 @@
         <p:cNvGrpSpPr/>
         <p:nvPr/>
       </p:nvGrpSpPr>
-      <p:grpSpPr/>
+      <p:grpSpPr>
+        <a:xfrm>
+          <a:off x="0" y="0"/>
+          <a:ext cx="0" cy="0"/>
+          <a:chOff x="0" y="0"/>
+          <a:chExt cx="0" cy="0"/>
+        </a:xfrm>
+      </p:grpSpPr>
       <p:sp>
         <p:nvSpPr>
           <p:cNvPr id="2" name="Rectangle 1"/>
@@ -9523,6 +9645,7 @@
           <a:lstStyle/>
           <a:p>
             <a:pPr algn="ctr"/>
+            <a:endParaRPr/>
           </a:p>
         </p:txBody>
       </p:sp>
@@ -9566,6 +9689,7 @@
           <a:lstStyle/>
           <a:p>
             <a:pPr algn="ctr"/>
+            <a:endParaRPr/>
           </a:p>
         </p:txBody>
       </p:sp>
@@ -9649,10 +9773,10 @@
             <a:picLocks noChangeAspect="1"/>
           </p:cNvPicPr>
           <p:nvPr>
-            <a:videoFile r:link="rId3"/>
+            <a:audioFile r:link="rId2"/>
             <p:extLst>
               <p:ext uri="{DAA4B4D4-6D71-4841-9C94-3DE7FCFB9230}">
-                <p14:media xmlns:p14="http://schemas.microsoft.com/office/powerpoint/2010/main" r:embed="rId2"/>
+                <p14:media xmlns:p14="http://schemas.microsoft.com/office/powerpoint/2010/main" r:embed="rId1"/>
               </p:ext>
             </p:extLst>
           </p:nvPr>
@@ -9748,6 +9872,7 @@
           <a:lstStyle/>
           <a:p>
             <a:pPr algn="ctr"/>
+            <a:endParaRPr/>
           </a:p>
         </p:txBody>
       </p:sp>
@@ -9780,7 +9905,7 @@
                 </a:solidFill>
                 <a:latin typeface="Calibri"/>
               </a:rPr>
-              <a:t>ResumeFit  ·  TEQGRID seminar</a:t>
+              <a:t>Meet TEQGRID  ·  ResumeFit seminar</a:t>
             </a:r>
           </a:p>
         </p:txBody>
@@ -9830,7 +9955,7 @@
       <p:par>
         <p:cTn id="1" dur="indefinite" restart="never" nodeType="tmRoot">
           <p:childTnLst>
-            <p:video>
+            <p:audio>
               <p:cMediaNode vol="80000">
                 <p:cTn id="2" fill="hold" display="0">
                   <p:stCondLst>
@@ -9841,7 +9966,7 @@
                   <p:spTgt spid="5"/>
                 </p:tgtEl>
               </p:cMediaNode>
-            </p:video>
+            </p:audio>
           </p:childTnLst>
         </p:cTn>
       </p:par>
@@ -9851,7 +9976,7 @@
 </file>
 
 <file path=ppt/slides/slide19.xml><?xml version="1.0" encoding="utf-8"?>
-<p:sld xmlns:a="http://schemas.openxmlformats.org/drawingml/2006/main" xmlns:p="http://schemas.openxmlformats.org/presentationml/2006/main" xmlns:r="http://schemas.openxmlformats.org/officeDocument/2006/relationships">
+<p:sld xmlns:a="http://schemas.openxmlformats.org/drawingml/2006/main" xmlns:r="http://schemas.openxmlformats.org/officeDocument/2006/relationships" xmlns:p="http://schemas.openxmlformats.org/presentationml/2006/main">
   <p:cSld>
     <p:spTree>
       <p:nvGrpSpPr>
@@ -9859,7 +9984,14 @@
         <p:cNvGrpSpPr/>
         <p:nvPr/>
       </p:nvGrpSpPr>
-      <p:grpSpPr/>
+      <p:grpSpPr>
+        <a:xfrm>
+          <a:off x="0" y="0"/>
+          <a:ext cx="0" cy="0"/>
+          <a:chOff x="0" y="0"/>
+          <a:chExt cx="0" cy="0"/>
+        </a:xfrm>
+      </p:grpSpPr>
       <p:sp>
         <p:nvSpPr>
           <p:cNvPr id="2" name="Rectangle 1"/>
@@ -9900,6 +10032,7 @@
           <a:lstStyle/>
           <a:p>
             <a:pPr algn="ctr"/>
+            <a:endParaRPr/>
           </a:p>
         </p:txBody>
       </p:sp>
@@ -9943,6 +10076,7 @@
           <a:lstStyle/>
           <a:p>
             <a:pPr algn="ctr"/>
+            <a:endParaRPr/>
           </a:p>
         </p:txBody>
       </p:sp>
@@ -10183,6 +10317,7 @@
           <a:lstStyle/>
           <a:p>
             <a:pPr algn="ctr"/>
+            <a:endParaRPr/>
           </a:p>
         </p:txBody>
       </p:sp>
@@ -10234,10 +10369,10 @@
             <a:picLocks noChangeAspect="1"/>
           </p:cNvPicPr>
           <p:nvPr>
-            <a:videoFile r:link="rId3"/>
+            <a:audioFile r:link="rId2"/>
             <p:extLst>
               <p:ext uri="{DAA4B4D4-6D71-4841-9C94-3DE7FCFB9230}">
-                <p14:media xmlns:p14="http://schemas.microsoft.com/office/powerpoint/2010/main" r:embed="rId2"/>
+                <p14:media xmlns:p14="http://schemas.microsoft.com/office/powerpoint/2010/main" r:embed="rId1"/>
               </p:ext>
             </p:extLst>
           </p:nvPr>
@@ -10333,6 +10468,7 @@
           <a:lstStyle/>
           <a:p>
             <a:pPr algn="ctr"/>
+            <a:endParaRPr/>
           </a:p>
         </p:txBody>
       </p:sp>
@@ -10365,7 +10501,7 @@
                 </a:solidFill>
                 <a:latin typeface="Calibri"/>
               </a:rPr>
-              <a:t>ResumeFit  ·  TEQGRID seminar</a:t>
+              <a:t>Meet TEQGRID  ·  ResumeFit seminar</a:t>
             </a:r>
           </a:p>
         </p:txBody>
@@ -10415,7 +10551,7 @@
       <p:par>
         <p:cTn id="1" dur="indefinite" restart="never" nodeType="tmRoot">
           <p:childTnLst>
-            <p:video>
+            <p:audio>
               <p:cMediaNode vol="80000">
                 <p:cTn id="2" fill="hold" display="0">
                   <p:stCondLst>
@@ -10426,7 +10562,7 @@
                   <p:spTgt spid="9"/>
                 </p:tgtEl>
               </p:cMediaNode>
-            </p:video>
+            </p:audio>
           </p:childTnLst>
         </p:cTn>
       </p:par>
@@ -10436,7 +10572,7 @@
 </file>
 
 <file path=ppt/slides/slide2.xml><?xml version="1.0" encoding="utf-8"?>
-<p:sld xmlns:a="http://schemas.openxmlformats.org/drawingml/2006/main" xmlns:p="http://schemas.openxmlformats.org/presentationml/2006/main" xmlns:r="http://schemas.openxmlformats.org/officeDocument/2006/relationships">
+<p:sld xmlns:a="http://schemas.openxmlformats.org/drawingml/2006/main" xmlns:r="http://schemas.openxmlformats.org/officeDocument/2006/relationships" xmlns:p="http://schemas.openxmlformats.org/presentationml/2006/main">
   <p:cSld>
     <p:spTree>
       <p:nvGrpSpPr>
@@ -10444,7 +10580,14 @@
         <p:cNvGrpSpPr/>
         <p:nvPr/>
       </p:nvGrpSpPr>
-      <p:grpSpPr/>
+      <p:grpSpPr>
+        <a:xfrm>
+          <a:off x="0" y="0"/>
+          <a:ext cx="0" cy="0"/>
+          <a:chOff x="0" y="0"/>
+          <a:chExt cx="0" cy="0"/>
+        </a:xfrm>
+      </p:grpSpPr>
       <p:sp>
         <p:nvSpPr>
           <p:cNvPr id="2" name="Rectangle 1"/>
@@ -10485,6 +10628,7 @@
           <a:lstStyle/>
           <a:p>
             <a:pPr algn="ctr"/>
+            <a:endParaRPr/>
           </a:p>
         </p:txBody>
       </p:sp>
@@ -10528,6 +10672,7 @@
           <a:lstStyle/>
           <a:p>
             <a:pPr algn="ctr"/>
+            <a:endParaRPr/>
           </a:p>
         </p:txBody>
       </p:sp>
@@ -10649,6 +10794,7 @@
           <a:lstStyle/>
           <a:p>
             <a:pPr algn="ctr"/>
+            <a:endParaRPr/>
           </a:p>
         </p:txBody>
       </p:sp>
@@ -10809,6 +10955,7 @@
           <a:lstStyle/>
           <a:p>
             <a:pPr algn="ctr"/>
+            <a:endParaRPr/>
           </a:p>
         </p:txBody>
       </p:sp>
@@ -10969,6 +11116,7 @@
           <a:lstStyle/>
           <a:p>
             <a:pPr algn="ctr"/>
+            <a:endParaRPr/>
           </a:p>
         </p:txBody>
       </p:sp>
@@ -11129,6 +11277,7 @@
           <a:lstStyle/>
           <a:p>
             <a:pPr algn="ctr"/>
+            <a:endParaRPr/>
           </a:p>
         </p:txBody>
       </p:sp>
@@ -11289,6 +11438,7 @@
           <a:lstStyle/>
           <a:p>
             <a:pPr algn="ctr"/>
+            <a:endParaRPr/>
           </a:p>
         </p:txBody>
       </p:sp>
@@ -11449,6 +11599,7 @@
           <a:lstStyle/>
           <a:p>
             <a:pPr algn="ctr"/>
+            <a:endParaRPr/>
           </a:p>
         </p:txBody>
       </p:sp>
@@ -11609,6 +11760,7 @@
           <a:lstStyle/>
           <a:p>
             <a:pPr algn="ctr"/>
+            <a:endParaRPr/>
           </a:p>
         </p:txBody>
       </p:sp>
@@ -11769,6 +11921,7 @@
           <a:lstStyle/>
           <a:p>
             <a:pPr algn="ctr"/>
+            <a:endParaRPr/>
           </a:p>
         </p:txBody>
       </p:sp>
@@ -11884,7 +12037,7 @@
                 </a:solidFill>
                 <a:latin typeface="Calibri"/>
               </a:rPr>
-              <a:t>Top 3 win</a:t>
+              <a:t>Scan the QR  ·  top 3 win</a:t>
             </a:r>
           </a:p>
         </p:txBody>
@@ -11929,6 +12082,7 @@
           <a:lstStyle/>
           <a:p>
             <a:pPr algn="ctr"/>
+            <a:endParaRPr/>
           </a:p>
         </p:txBody>
       </p:sp>
@@ -12058,10 +12212,10 @@
             <a:picLocks noChangeAspect="1"/>
           </p:cNvPicPr>
           <p:nvPr>
-            <a:videoFile r:link="rId3"/>
+            <a:audioFile r:link="rId2"/>
             <p:extLst>
               <p:ext uri="{DAA4B4D4-6D71-4841-9C94-3DE7FCFB9230}">
-                <p14:media xmlns:p14="http://schemas.microsoft.com/office/powerpoint/2010/main" r:embed="rId2"/>
+                <p14:media xmlns:p14="http://schemas.microsoft.com/office/powerpoint/2010/main" r:embed="rId1"/>
               </p:ext>
             </p:extLst>
           </p:nvPr>
@@ -12157,6 +12311,7 @@
           <a:lstStyle/>
           <a:p>
             <a:pPr algn="ctr"/>
+            <a:endParaRPr/>
           </a:p>
         </p:txBody>
       </p:sp>
@@ -12189,7 +12344,7 @@
                 </a:solidFill>
                 <a:latin typeface="Calibri"/>
               </a:rPr>
-              <a:t>ResumeFit  ·  TEQGRID seminar</a:t>
+              <a:t>Meet TEQGRID  ·  ResumeFit seminar</a:t>
             </a:r>
           </a:p>
         </p:txBody>
@@ -12239,7 +12394,7 @@
       <p:par>
         <p:cTn id="1" dur="indefinite" restart="never" nodeType="tmRoot">
           <p:childTnLst>
-            <p:video>
+            <p:audio>
               <p:cMediaNode vol="80000">
                 <p:cTn id="2" fill="hold" display="0">
                   <p:stCondLst>
@@ -12250,7 +12405,7 @@
                   <p:spTgt spid="42"/>
                 </p:tgtEl>
               </p:cMediaNode>
-            </p:video>
+            </p:audio>
           </p:childTnLst>
         </p:cTn>
       </p:par>
@@ -12260,7 +12415,7 @@
 </file>
 
 <file path=ppt/slides/slide20.xml><?xml version="1.0" encoding="utf-8"?>
-<p:sld xmlns:a="http://schemas.openxmlformats.org/drawingml/2006/main" xmlns:p="http://schemas.openxmlformats.org/presentationml/2006/main" xmlns:r="http://schemas.openxmlformats.org/officeDocument/2006/relationships">
+<p:sld xmlns:a="http://schemas.openxmlformats.org/drawingml/2006/main" xmlns:r="http://schemas.openxmlformats.org/officeDocument/2006/relationships" xmlns:p="http://schemas.openxmlformats.org/presentationml/2006/main">
   <p:cSld>
     <p:spTree>
       <p:nvGrpSpPr>
@@ -12268,7 +12423,14 @@
         <p:cNvGrpSpPr/>
         <p:nvPr/>
       </p:nvGrpSpPr>
-      <p:grpSpPr/>
+      <p:grpSpPr>
+        <a:xfrm>
+          <a:off x="0" y="0"/>
+          <a:ext cx="0" cy="0"/>
+          <a:chOff x="0" y="0"/>
+          <a:chExt cx="0" cy="0"/>
+        </a:xfrm>
+      </p:grpSpPr>
       <p:sp>
         <p:nvSpPr>
           <p:cNvPr id="2" name="Rectangle 1"/>
@@ -12309,6 +12471,7 @@
           <a:lstStyle/>
           <a:p>
             <a:pPr algn="ctr"/>
+            <a:endParaRPr/>
           </a:p>
         </p:txBody>
       </p:sp>
@@ -12352,6 +12515,7 @@
           <a:lstStyle/>
           <a:p>
             <a:pPr algn="ctr"/>
+            <a:endParaRPr/>
           </a:p>
         </p:txBody>
       </p:sp>
@@ -12363,8 +12527,8 @@
         </p:nvSpPr>
         <p:spPr>
           <a:xfrm>
-            <a:off x="731520" y="2103120"/>
-            <a:ext cx="10515600" cy="2926080"/>
+            <a:off x="640080" y="640080"/>
+            <a:ext cx="6583680" cy="5303520"/>
           </a:xfrm>
           <a:prstGeom prst="rect">
             <a:avLst/>
@@ -12389,7 +12553,39 @@
                 </a:solidFill>
                 <a:latin typeface="Calibri"/>
               </a:rPr>
-              <a:t>WRITE A / B / C  ·  NO PHONES</a:t>
+              <a:t>08  ·  QUIZ</a:t>
+            </a:r>
+          </a:p>
+          <a:p>
+            <a:pPr algn="l">
+              <a:spcAft>
+                <a:spcPts val="600"/>
+              </a:spcAft>
+            </a:pPr>
+            <a:r>
+              <a:rPr sz="4800" b="1">
+                <a:solidFill>
+                  <a:srgbClr val="FFFFFF"/>
+                </a:solidFill>
+                <a:latin typeface="Calibri"/>
+              </a:rPr>
+              <a:t>Meet TEQGRID</a:t>
+            </a:r>
+          </a:p>
+          <a:p>
+            <a:pPr algn="l">
+              <a:spcAft>
+                <a:spcPts val="600"/>
+              </a:spcAft>
+            </a:pPr>
+            <a:r>
+              <a:rPr sz="2200" b="0">
+                <a:solidFill>
+                  <a:srgbClr val="CBD5E1"/>
+                </a:solidFill>
+                <a:latin typeface="Calibri"/>
+              </a:rPr>
+              <a:t>Scan the QR and take the 10-question quiz</a:t>
             </a:r>
           </a:p>
           <a:p>
@@ -12405,40 +12601,988 @@
                 </a:solidFill>
                 <a:latin typeface="Calibri"/>
               </a:rPr>
-              <a:t>08</a:t>
-            </a:r>
-          </a:p>
-          <a:p>
-            <a:pPr algn="l">
-              <a:spcAft>
-                <a:spcPts val="600"/>
-              </a:spcAft>
-            </a:pPr>
-            <a:r>
-              <a:rPr sz="4000" b="1">
-                <a:solidFill>
-                  <a:srgbClr val="FFFFFF"/>
-                </a:solidFill>
-                <a:latin typeface="Calibri"/>
-              </a:rPr>
-              <a:t>10-question test</a:t>
-            </a:r>
+              <a:t>Phones up  ·  one scan each  ·  top 3 win</a:t>
+            </a:r>
+          </a:p>
+        </p:txBody>
+      </p:sp>
+      <p:sp>
+        <p:nvSpPr>
+          <p:cNvPr id="5" name="Rounded Rectangle 4"/>
+          <p:cNvSpPr/>
+          <p:nvPr/>
+        </p:nvSpPr>
+        <p:spPr>
+          <a:xfrm>
+            <a:off x="7498079" y="1097280"/>
+            <a:ext cx="4114800" cy="4114800"/>
+          </a:xfrm>
+          <a:prstGeom prst="roundRect">
+            <a:avLst/>
+          </a:prstGeom>
+          <a:solidFill>
+            <a:srgbClr val="FFFFFF"/>
+          </a:solidFill>
+          <a:ln>
+            <a:noFill/>
+          </a:ln>
+        </p:spPr>
+        <p:style>
+          <a:lnRef idx="1">
+            <a:schemeClr val="accent1"/>
+          </a:lnRef>
+          <a:fillRef idx="3">
+            <a:schemeClr val="accent1"/>
+          </a:fillRef>
+          <a:effectRef idx="2">
+            <a:schemeClr val="accent1"/>
+          </a:effectRef>
+          <a:fontRef idx="minor">
+            <a:schemeClr val="lt1"/>
+          </a:fontRef>
+        </p:style>
+        <p:txBody>
+          <a:bodyPr rtlCol="0" anchor="ctr"/>
+          <a:lstStyle/>
+          <a:p>
+            <a:pPr algn="ctr"/>
+            <a:endParaRPr/>
           </a:p>
         </p:txBody>
       </p:sp>
       <p:pic>
         <p:nvPicPr>
-          <p:cNvPr id="5" name="seminar-music.mp3">
+          <p:cNvPr id="6" name="Picture 5" descr="quiz-qr.jpg"/>
+          <p:cNvPicPr>
+            <a:picLocks noChangeAspect="1"/>
+          </p:cNvPicPr>
+          <p:nvPr/>
+        </p:nvPicPr>
+        <p:blipFill>
+          <a:blip r:embed="rId4"/>
+          <a:stretch>
+            <a:fillRect/>
+          </a:stretch>
+        </p:blipFill>
+        <p:spPr>
+          <a:xfrm>
+            <a:off x="7680960" y="1280160"/>
+            <a:ext cx="3749039" cy="3749039"/>
+          </a:xfrm>
+          <a:prstGeom prst="rect">
+            <a:avLst/>
+          </a:prstGeom>
+        </p:spPr>
+      </p:pic>
+      <p:sp>
+        <p:nvSpPr>
+          <p:cNvPr id="7" name="TextBox 6"/>
+          <p:cNvSpPr txBox="1"/>
+          <p:nvPr/>
+        </p:nvSpPr>
+        <p:spPr>
+          <a:xfrm>
+            <a:off x="7635240" y="5212080"/>
+            <a:ext cx="3840480" cy="640080"/>
+          </a:xfrm>
+          <a:prstGeom prst="rect">
+            <a:avLst/>
+          </a:prstGeom>
+          <a:noFill/>
+        </p:spPr>
+        <p:txBody>
+          <a:bodyPr wrap="square">
+            <a:spAutoFit/>
+          </a:bodyPr>
+          <a:lstStyle/>
+          <a:p>
+            <a:pPr algn="l">
+              <a:spcAft>
+                <a:spcPts val="600"/>
+              </a:spcAft>
+            </a:pPr>
+            <a:r>
+              <a:rPr sz="1600" b="1">
+                <a:solidFill>
+                  <a:srgbClr val="93C5FD"/>
+                </a:solidFill>
+                <a:latin typeface="Calibri"/>
+              </a:rPr>
+              <a:t>Scan to start the quiz</a:t>
+            </a:r>
+          </a:p>
+        </p:txBody>
+      </p:sp>
+      <p:pic>
+        <p:nvPicPr>
+          <p:cNvPr id="8" name="seminar-music.mp3">
             <a:hlinkClick r:id="" action="ppaction://media"/>
           </p:cNvPr>
           <p:cNvPicPr>
             <a:picLocks noChangeAspect="1"/>
           </p:cNvPicPr>
           <p:nvPr>
-            <a:videoFile r:link="rId3"/>
+            <a:audioFile r:link="rId2"/>
             <p:extLst>
               <p:ext uri="{DAA4B4D4-6D71-4841-9C94-3DE7FCFB9230}">
-                <p14:media xmlns:p14="http://schemas.microsoft.com/office/powerpoint/2010/main" r:embed="rId2"/>
+                <p14:media xmlns:p14="http://schemas.microsoft.com/office/powerpoint/2010/main" r:embed="rId1"/>
+              </p:ext>
+            </p:extLst>
+          </p:nvPr>
+        </p:nvPicPr>
+        <p:blipFill>
+          <a:blip r:embed="rId5"/>
+          <a:stretch>
+            <a:fillRect/>
+          </a:stretch>
+        </p:blipFill>
+        <p:spPr>
+          <a:xfrm>
+            <a:off x="11292840" y="164592"/>
+            <a:ext cx="566928" cy="566928"/>
+          </a:xfrm>
+          <a:prstGeom prst="rect">
+            <a:avLst/>
+          </a:prstGeom>
+        </p:spPr>
+      </p:pic>
+      <p:sp>
+        <p:nvSpPr>
+          <p:cNvPr id="9" name="TextBox 8"/>
+          <p:cNvSpPr txBox="1"/>
+          <p:nvPr/>
+        </p:nvSpPr>
+        <p:spPr>
+          <a:xfrm>
+            <a:off x="9784080" y="256032"/>
+            <a:ext cx="1417320" cy="365760"/>
+          </a:xfrm>
+          <a:prstGeom prst="rect">
+            <a:avLst/>
+          </a:prstGeom>
+          <a:noFill/>
+        </p:spPr>
+        <p:txBody>
+          <a:bodyPr wrap="none">
+            <a:spAutoFit/>
+          </a:bodyPr>
+          <a:lstStyle/>
+          <a:p>
+            <a:pPr algn="r"/>
+            <a:r>
+              <a:rPr sz="1200" b="1">
+                <a:solidFill>
+                  <a:srgbClr val="FFFFFF"/>
+                </a:solidFill>
+                <a:latin typeface="Calibri"/>
+              </a:rPr>
+              <a:t>♪  play</a:t>
+            </a:r>
+          </a:p>
+        </p:txBody>
+      </p:sp>
+      <p:sp>
+        <p:nvSpPr>
+          <p:cNvPr id="10" name="Rectangle 9"/>
+          <p:cNvSpPr/>
+          <p:nvPr/>
+        </p:nvSpPr>
+        <p:spPr>
+          <a:xfrm>
+            <a:off x="0" y="6601968"/>
+            <a:ext cx="12191695" cy="256032"/>
+          </a:xfrm>
+          <a:prstGeom prst="rect">
+            <a:avLst/>
+          </a:prstGeom>
+          <a:solidFill>
+            <a:srgbClr val="0F172A"/>
+          </a:solidFill>
+          <a:ln>
+            <a:noFill/>
+          </a:ln>
+        </p:spPr>
+        <p:style>
+          <a:lnRef idx="1">
+            <a:schemeClr val="accent1"/>
+          </a:lnRef>
+          <a:fillRef idx="3">
+            <a:schemeClr val="accent1"/>
+          </a:fillRef>
+          <a:effectRef idx="2">
+            <a:schemeClr val="accent1"/>
+          </a:effectRef>
+          <a:fontRef idx="minor">
+            <a:schemeClr val="lt1"/>
+          </a:fontRef>
+        </p:style>
+        <p:txBody>
+          <a:bodyPr rtlCol="0" anchor="ctr"/>
+          <a:lstStyle/>
+          <a:p>
+            <a:pPr algn="ctr"/>
+            <a:endParaRPr/>
+          </a:p>
+        </p:txBody>
+      </p:sp>
+      <p:sp>
+        <p:nvSpPr>
+          <p:cNvPr id="11" name="TextBox 10"/>
+          <p:cNvSpPr txBox="1"/>
+          <p:nvPr/>
+        </p:nvSpPr>
+        <p:spPr>
+          <a:xfrm>
+            <a:off x="365760" y="6601968"/>
+            <a:ext cx="9144000" cy="256032"/>
+          </a:xfrm>
+          <a:prstGeom prst="rect">
+            <a:avLst/>
+          </a:prstGeom>
+          <a:noFill/>
+        </p:spPr>
+        <p:txBody>
+          <a:bodyPr wrap="none">
+            <a:spAutoFit/>
+          </a:bodyPr>
+          <a:lstStyle/>
+          <a:p>
+            <a:r>
+              <a:rPr sz="1100" b="0">
+                <a:solidFill>
+                  <a:srgbClr val="FFFFFF"/>
+                </a:solidFill>
+                <a:latin typeface="Calibri"/>
+              </a:rPr>
+              <a:t>Meet TEQGRID  ·  ResumeFit seminar</a:t>
+            </a:r>
+          </a:p>
+        </p:txBody>
+      </p:sp>
+      <p:sp>
+        <p:nvSpPr>
+          <p:cNvPr id="12" name="TextBox 11"/>
+          <p:cNvSpPr txBox="1"/>
+          <p:nvPr/>
+        </p:nvSpPr>
+        <p:spPr>
+          <a:xfrm>
+            <a:off x="10607040" y="6601968"/>
+            <a:ext cx="1280160" cy="256032"/>
+          </a:xfrm>
+          <a:prstGeom prst="rect">
+            <a:avLst/>
+          </a:prstGeom>
+          <a:noFill/>
+        </p:spPr>
+        <p:txBody>
+          <a:bodyPr wrap="none">
+            <a:spAutoFit/>
+          </a:bodyPr>
+          <a:lstStyle/>
+          <a:p>
+            <a:pPr algn="r"/>
+            <a:r>
+              <a:rPr sz="1100" b="0">
+                <a:solidFill>
+                  <a:srgbClr val="FFFFFF"/>
+                </a:solidFill>
+                <a:latin typeface="Calibri"/>
+              </a:rPr>
+              <a:t>20  /  24</a:t>
+            </a:r>
+          </a:p>
+        </p:txBody>
+      </p:sp>
+    </p:spTree>
+  </p:cSld>
+  <p:clrMapOvr>
+    <a:masterClrMapping/>
+  </p:clrMapOvr>
+  <p:timing>
+    <p:tnLst>
+      <p:par>
+        <p:cTn id="1" dur="indefinite" restart="never" nodeType="tmRoot">
+          <p:childTnLst>
+            <p:audio>
+              <p:cMediaNode vol="80000">
+                <p:cTn id="2" fill="hold" display="0">
+                  <p:stCondLst>
+                    <p:cond delay="indefinite"/>
+                  </p:stCondLst>
+                </p:cTn>
+                <p:tgtEl>
+                  <p:spTgt spid="8"/>
+                </p:tgtEl>
+              </p:cMediaNode>
+            </p:audio>
+          </p:childTnLst>
+        </p:cTn>
+      </p:par>
+    </p:tnLst>
+  </p:timing>
+</p:sld>
+</file>
+
+<file path=ppt/slides/slide21.xml><?xml version="1.0" encoding="utf-8"?>
+<p:sld xmlns:a="http://schemas.openxmlformats.org/drawingml/2006/main" xmlns:r="http://schemas.openxmlformats.org/officeDocument/2006/relationships" xmlns:p="http://schemas.openxmlformats.org/presentationml/2006/main">
+  <p:cSld>
+    <p:spTree>
+      <p:nvGrpSpPr>
+        <p:cNvPr id="1" name=""/>
+        <p:cNvGrpSpPr/>
+        <p:nvPr/>
+      </p:nvGrpSpPr>
+      <p:grpSpPr>
+        <a:xfrm>
+          <a:off x="0" y="0"/>
+          <a:ext cx="0" cy="0"/>
+          <a:chOff x="0" y="0"/>
+          <a:chExt cx="0" cy="0"/>
+        </a:xfrm>
+      </p:grpSpPr>
+      <p:sp>
+        <p:nvSpPr>
+          <p:cNvPr id="2" name="Rectangle 1"/>
+          <p:cNvSpPr/>
+          <p:nvPr/>
+        </p:nvSpPr>
+        <p:spPr>
+          <a:xfrm>
+            <a:off x="0" y="0"/>
+            <a:ext cx="12191695" cy="6858000"/>
+          </a:xfrm>
+          <a:prstGeom prst="rect">
+            <a:avLst/>
+          </a:prstGeom>
+          <a:solidFill>
+            <a:srgbClr val="0F172A"/>
+          </a:solidFill>
+          <a:ln>
+            <a:noFill/>
+          </a:ln>
+        </p:spPr>
+        <p:style>
+          <a:lnRef idx="1">
+            <a:schemeClr val="accent1"/>
+          </a:lnRef>
+          <a:fillRef idx="3">
+            <a:schemeClr val="accent1"/>
+          </a:fillRef>
+          <a:effectRef idx="2">
+            <a:schemeClr val="accent1"/>
+          </a:effectRef>
+          <a:fontRef idx="minor">
+            <a:schemeClr val="lt1"/>
+          </a:fontRef>
+        </p:style>
+        <p:txBody>
+          <a:bodyPr rtlCol="0" anchor="ctr"/>
+          <a:lstStyle/>
+          <a:p>
+            <a:pPr algn="ctr"/>
+            <a:endParaRPr/>
+          </a:p>
+        </p:txBody>
+      </p:sp>
+      <p:sp>
+        <p:nvSpPr>
+          <p:cNvPr id="3" name="Rectangle 2"/>
+          <p:cNvSpPr/>
+          <p:nvPr/>
+        </p:nvSpPr>
+        <p:spPr>
+          <a:xfrm>
+            <a:off x="0" y="0"/>
+            <a:ext cx="164592" cy="6858000"/>
+          </a:xfrm>
+          <a:prstGeom prst="rect">
+            <a:avLst/>
+          </a:prstGeom>
+          <a:solidFill>
+            <a:srgbClr val="2563EB"/>
+          </a:solidFill>
+          <a:ln>
+            <a:noFill/>
+          </a:ln>
+        </p:spPr>
+        <p:style>
+          <a:lnRef idx="1">
+            <a:schemeClr val="accent1"/>
+          </a:lnRef>
+          <a:fillRef idx="3">
+            <a:schemeClr val="accent1"/>
+          </a:fillRef>
+          <a:effectRef idx="2">
+            <a:schemeClr val="accent1"/>
+          </a:effectRef>
+          <a:fontRef idx="minor">
+            <a:schemeClr val="lt1"/>
+          </a:fontRef>
+        </p:style>
+        <p:txBody>
+          <a:bodyPr rtlCol="0" anchor="ctr"/>
+          <a:lstStyle/>
+          <a:p>
+            <a:pPr algn="ctr"/>
+            <a:endParaRPr/>
+          </a:p>
+        </p:txBody>
+      </p:sp>
+      <p:sp>
+        <p:nvSpPr>
+          <p:cNvPr id="4" name="TextBox 3"/>
+          <p:cNvSpPr txBox="1"/>
+          <p:nvPr/>
+        </p:nvSpPr>
+        <p:spPr>
+          <a:xfrm>
+            <a:off x="640080" y="411480"/>
+            <a:ext cx="10972800" cy="1097280"/>
+          </a:xfrm>
+          <a:prstGeom prst="rect">
+            <a:avLst/>
+          </a:prstGeom>
+          <a:noFill/>
+        </p:spPr>
+        <p:txBody>
+          <a:bodyPr wrap="square">
+            <a:spAutoFit/>
+          </a:bodyPr>
+          <a:lstStyle/>
+          <a:p>
+            <a:pPr algn="l">
+              <a:spcAft>
+                <a:spcPts val="600"/>
+              </a:spcAft>
+            </a:pPr>
+            <a:r>
+              <a:rPr sz="1600" b="1">
+                <a:solidFill>
+                  <a:srgbClr val="93C5FD"/>
+                </a:solidFill>
+                <a:latin typeface="Calibri"/>
+              </a:rPr>
+              <a:t>QUIZ WINNERS</a:t>
+            </a:r>
+          </a:p>
+          <a:p>
+            <a:pPr algn="l">
+              <a:spcAft>
+                <a:spcPts val="600"/>
+              </a:spcAft>
+            </a:pPr>
+            <a:r>
+              <a:rPr sz="3400" b="1">
+                <a:solidFill>
+                  <a:srgbClr val="FFFFFF"/>
+                </a:solidFill>
+                <a:latin typeface="Calibri"/>
+              </a:rPr>
+              <a:t>Top 3 students take the quiz</a:t>
+            </a:r>
+          </a:p>
+        </p:txBody>
+      </p:sp>
+      <p:sp>
+        <p:nvSpPr>
+          <p:cNvPr id="5" name="Rounded Rectangle 4"/>
+          <p:cNvSpPr/>
+          <p:nvPr/>
+        </p:nvSpPr>
+        <p:spPr>
+          <a:xfrm>
+            <a:off x="640080" y="1920240"/>
+            <a:ext cx="3520440" cy="3383280"/>
+          </a:xfrm>
+          <a:prstGeom prst="roundRect">
+            <a:avLst/>
+          </a:prstGeom>
+          <a:solidFill>
+            <a:srgbClr val="FFFFFF"/>
+          </a:solidFill>
+          <a:ln>
+            <a:noFill/>
+          </a:ln>
+        </p:spPr>
+        <p:style>
+          <a:lnRef idx="1">
+            <a:schemeClr val="accent1"/>
+          </a:lnRef>
+          <a:fillRef idx="3">
+            <a:schemeClr val="accent1"/>
+          </a:fillRef>
+          <a:effectRef idx="2">
+            <a:schemeClr val="accent1"/>
+          </a:effectRef>
+          <a:fontRef idx="minor">
+            <a:schemeClr val="lt1"/>
+          </a:fontRef>
+        </p:style>
+        <p:txBody>
+          <a:bodyPr rtlCol="0" anchor="ctr"/>
+          <a:lstStyle/>
+          <a:p>
+            <a:pPr algn="ctr"/>
+            <a:endParaRPr/>
+          </a:p>
+        </p:txBody>
+      </p:sp>
+      <p:sp>
+        <p:nvSpPr>
+          <p:cNvPr id="6" name="Oval 5"/>
+          <p:cNvSpPr/>
+          <p:nvPr/>
+        </p:nvSpPr>
+        <p:spPr>
+          <a:xfrm>
+            <a:off x="1965960" y="2148840"/>
+            <a:ext cx="868680" cy="868680"/>
+          </a:xfrm>
+          <a:prstGeom prst="ellipse">
+            <a:avLst/>
+          </a:prstGeom>
+          <a:solidFill>
+            <a:srgbClr val="D97706"/>
+          </a:solidFill>
+          <a:ln>
+            <a:noFill/>
+          </a:ln>
+        </p:spPr>
+        <p:style>
+          <a:lnRef idx="1">
+            <a:schemeClr val="accent1"/>
+          </a:lnRef>
+          <a:fillRef idx="3">
+            <a:schemeClr val="accent1"/>
+          </a:fillRef>
+          <a:effectRef idx="2">
+            <a:schemeClr val="accent1"/>
+          </a:effectRef>
+          <a:fontRef idx="minor">
+            <a:schemeClr val="lt1"/>
+          </a:fontRef>
+        </p:style>
+        <p:txBody>
+          <a:bodyPr rtlCol="0" anchor="ctr"/>
+          <a:lstStyle/>
+          <a:p>
+            <a:pPr algn="ctr"/>
+            <a:endParaRPr/>
+          </a:p>
+        </p:txBody>
+      </p:sp>
+      <p:sp>
+        <p:nvSpPr>
+          <p:cNvPr id="7" name="TextBox 6"/>
+          <p:cNvSpPr txBox="1"/>
+          <p:nvPr/>
+        </p:nvSpPr>
+        <p:spPr>
+          <a:xfrm>
+            <a:off x="1965960" y="2304288"/>
+            <a:ext cx="868680" cy="640080"/>
+          </a:xfrm>
+          <a:prstGeom prst="rect">
+            <a:avLst/>
+          </a:prstGeom>
+          <a:noFill/>
+        </p:spPr>
+        <p:txBody>
+          <a:bodyPr wrap="none">
+            <a:spAutoFit/>
+          </a:bodyPr>
+          <a:lstStyle/>
+          <a:p>
+            <a:pPr algn="ctr"/>
+            <a:r>
+              <a:rPr sz="1600" b="1">
+                <a:solidFill>
+                  <a:srgbClr val="FFFFFF"/>
+                </a:solidFill>
+                <a:latin typeface="Calibri"/>
+              </a:rPr>
+              <a:t>1st</a:t>
+            </a:r>
+          </a:p>
+        </p:txBody>
+      </p:sp>
+      <p:sp>
+        <p:nvSpPr>
+          <p:cNvPr id="8" name="TextBox 7"/>
+          <p:cNvSpPr txBox="1"/>
+          <p:nvPr/>
+        </p:nvSpPr>
+        <p:spPr>
+          <a:xfrm>
+            <a:off x="868680" y="3200400"/>
+            <a:ext cx="3063240" cy="430887"/>
+          </a:xfrm>
+          <a:prstGeom prst="rect">
+            <a:avLst/>
+          </a:prstGeom>
+          <a:noFill/>
+        </p:spPr>
+        <p:txBody>
+          <a:bodyPr wrap="square">
+            <a:spAutoFit/>
+          </a:bodyPr>
+          <a:lstStyle/>
+          <a:p>
+            <a:pPr algn="l">
+              <a:spcAft>
+                <a:spcPts val="600"/>
+              </a:spcAft>
+            </a:pPr>
+            <a:r>
+              <a:rPr sz="2200" b="1" dirty="0">
+                <a:solidFill>
+                  <a:srgbClr val="0F172A"/>
+                </a:solidFill>
+                <a:latin typeface="Calibri"/>
+              </a:rPr>
+              <a:t>Gold</a:t>
+            </a:r>
+          </a:p>
+        </p:txBody>
+      </p:sp>
+      <p:sp>
+        <p:nvSpPr>
+          <p:cNvPr id="9" name="Rounded Rectangle 8"/>
+          <p:cNvSpPr/>
+          <p:nvPr/>
+        </p:nvSpPr>
+        <p:spPr>
+          <a:xfrm>
+            <a:off x="4389119" y="1920240"/>
+            <a:ext cx="3520440" cy="3383280"/>
+          </a:xfrm>
+          <a:prstGeom prst="roundRect">
+            <a:avLst/>
+          </a:prstGeom>
+          <a:solidFill>
+            <a:srgbClr val="FFFFFF"/>
+          </a:solidFill>
+          <a:ln>
+            <a:noFill/>
+          </a:ln>
+        </p:spPr>
+        <p:style>
+          <a:lnRef idx="1">
+            <a:schemeClr val="accent1"/>
+          </a:lnRef>
+          <a:fillRef idx="3">
+            <a:schemeClr val="accent1"/>
+          </a:fillRef>
+          <a:effectRef idx="2">
+            <a:schemeClr val="accent1"/>
+          </a:effectRef>
+          <a:fontRef idx="minor">
+            <a:schemeClr val="lt1"/>
+          </a:fontRef>
+        </p:style>
+        <p:txBody>
+          <a:bodyPr rtlCol="0" anchor="ctr"/>
+          <a:lstStyle/>
+          <a:p>
+            <a:pPr algn="ctr"/>
+            <a:endParaRPr/>
+          </a:p>
+        </p:txBody>
+      </p:sp>
+      <p:sp>
+        <p:nvSpPr>
+          <p:cNvPr id="10" name="Oval 9"/>
+          <p:cNvSpPr/>
+          <p:nvPr/>
+        </p:nvSpPr>
+        <p:spPr>
+          <a:xfrm>
+            <a:off x="5714999" y="2148840"/>
+            <a:ext cx="868680" cy="868680"/>
+          </a:xfrm>
+          <a:prstGeom prst="ellipse">
+            <a:avLst/>
+          </a:prstGeom>
+          <a:solidFill>
+            <a:srgbClr val="64748B"/>
+          </a:solidFill>
+          <a:ln>
+            <a:noFill/>
+          </a:ln>
+        </p:spPr>
+        <p:style>
+          <a:lnRef idx="1">
+            <a:schemeClr val="accent1"/>
+          </a:lnRef>
+          <a:fillRef idx="3">
+            <a:schemeClr val="accent1"/>
+          </a:fillRef>
+          <a:effectRef idx="2">
+            <a:schemeClr val="accent1"/>
+          </a:effectRef>
+          <a:fontRef idx="minor">
+            <a:schemeClr val="lt1"/>
+          </a:fontRef>
+        </p:style>
+        <p:txBody>
+          <a:bodyPr rtlCol="0" anchor="ctr"/>
+          <a:lstStyle/>
+          <a:p>
+            <a:pPr algn="ctr"/>
+            <a:endParaRPr/>
+          </a:p>
+        </p:txBody>
+      </p:sp>
+      <p:sp>
+        <p:nvSpPr>
+          <p:cNvPr id="11" name="TextBox 10"/>
+          <p:cNvSpPr txBox="1"/>
+          <p:nvPr/>
+        </p:nvSpPr>
+        <p:spPr>
+          <a:xfrm>
+            <a:off x="5714999" y="2304288"/>
+            <a:ext cx="868680" cy="640080"/>
+          </a:xfrm>
+          <a:prstGeom prst="rect">
+            <a:avLst/>
+          </a:prstGeom>
+          <a:noFill/>
+        </p:spPr>
+        <p:txBody>
+          <a:bodyPr wrap="none">
+            <a:spAutoFit/>
+          </a:bodyPr>
+          <a:lstStyle/>
+          <a:p>
+            <a:pPr algn="ctr"/>
+            <a:r>
+              <a:rPr sz="1600" b="1">
+                <a:solidFill>
+                  <a:srgbClr val="FFFFFF"/>
+                </a:solidFill>
+                <a:latin typeface="Calibri"/>
+              </a:rPr>
+              <a:t>2nd</a:t>
+            </a:r>
+          </a:p>
+        </p:txBody>
+      </p:sp>
+      <p:sp>
+        <p:nvSpPr>
+          <p:cNvPr id="12" name="TextBox 11"/>
+          <p:cNvSpPr txBox="1"/>
+          <p:nvPr/>
+        </p:nvSpPr>
+        <p:spPr>
+          <a:xfrm>
+            <a:off x="4617719" y="3200400"/>
+            <a:ext cx="3063240" cy="430887"/>
+          </a:xfrm>
+          <a:prstGeom prst="rect">
+            <a:avLst/>
+          </a:prstGeom>
+          <a:noFill/>
+        </p:spPr>
+        <p:txBody>
+          <a:bodyPr wrap="square">
+            <a:spAutoFit/>
+          </a:bodyPr>
+          <a:lstStyle/>
+          <a:p>
+            <a:pPr algn="l">
+              <a:spcAft>
+                <a:spcPts val="600"/>
+              </a:spcAft>
+            </a:pPr>
+            <a:r>
+              <a:rPr sz="2200" b="1" dirty="0">
+                <a:solidFill>
+                  <a:srgbClr val="0F172A"/>
+                </a:solidFill>
+                <a:latin typeface="Calibri"/>
+              </a:rPr>
+              <a:t>Silver</a:t>
+            </a:r>
+          </a:p>
+        </p:txBody>
+      </p:sp>
+      <p:sp>
+        <p:nvSpPr>
+          <p:cNvPr id="13" name="Rounded Rectangle 12"/>
+          <p:cNvSpPr/>
+          <p:nvPr/>
+        </p:nvSpPr>
+        <p:spPr>
+          <a:xfrm>
+            <a:off x="8138158" y="1920240"/>
+            <a:ext cx="3520440" cy="3383280"/>
+          </a:xfrm>
+          <a:prstGeom prst="roundRect">
+            <a:avLst/>
+          </a:prstGeom>
+          <a:solidFill>
+            <a:srgbClr val="FFFFFF"/>
+          </a:solidFill>
+          <a:ln>
+            <a:noFill/>
+          </a:ln>
+        </p:spPr>
+        <p:style>
+          <a:lnRef idx="1">
+            <a:schemeClr val="accent1"/>
+          </a:lnRef>
+          <a:fillRef idx="3">
+            <a:schemeClr val="accent1"/>
+          </a:fillRef>
+          <a:effectRef idx="2">
+            <a:schemeClr val="accent1"/>
+          </a:effectRef>
+          <a:fontRef idx="minor">
+            <a:schemeClr val="lt1"/>
+          </a:fontRef>
+        </p:style>
+        <p:txBody>
+          <a:bodyPr rtlCol="0" anchor="ctr"/>
+          <a:lstStyle/>
+          <a:p>
+            <a:pPr algn="ctr"/>
+            <a:endParaRPr/>
+          </a:p>
+        </p:txBody>
+      </p:sp>
+      <p:sp>
+        <p:nvSpPr>
+          <p:cNvPr id="14" name="Oval 13"/>
+          <p:cNvSpPr/>
+          <p:nvPr/>
+        </p:nvSpPr>
+        <p:spPr>
+          <a:xfrm>
+            <a:off x="9464038" y="2148840"/>
+            <a:ext cx="868680" cy="868680"/>
+          </a:xfrm>
+          <a:prstGeom prst="ellipse">
+            <a:avLst/>
+          </a:prstGeom>
+          <a:solidFill>
+            <a:srgbClr val="B45309"/>
+          </a:solidFill>
+          <a:ln>
+            <a:noFill/>
+          </a:ln>
+        </p:spPr>
+        <p:style>
+          <a:lnRef idx="1">
+            <a:schemeClr val="accent1"/>
+          </a:lnRef>
+          <a:fillRef idx="3">
+            <a:schemeClr val="accent1"/>
+          </a:fillRef>
+          <a:effectRef idx="2">
+            <a:schemeClr val="accent1"/>
+          </a:effectRef>
+          <a:fontRef idx="minor">
+            <a:schemeClr val="lt1"/>
+          </a:fontRef>
+        </p:style>
+        <p:txBody>
+          <a:bodyPr rtlCol="0" anchor="ctr"/>
+          <a:lstStyle/>
+          <a:p>
+            <a:pPr algn="ctr"/>
+            <a:endParaRPr/>
+          </a:p>
+        </p:txBody>
+      </p:sp>
+      <p:sp>
+        <p:nvSpPr>
+          <p:cNvPr id="15" name="TextBox 14"/>
+          <p:cNvSpPr txBox="1"/>
+          <p:nvPr/>
+        </p:nvSpPr>
+        <p:spPr>
+          <a:xfrm>
+            <a:off x="9464038" y="2304288"/>
+            <a:ext cx="868680" cy="640080"/>
+          </a:xfrm>
+          <a:prstGeom prst="rect">
+            <a:avLst/>
+          </a:prstGeom>
+          <a:noFill/>
+        </p:spPr>
+        <p:txBody>
+          <a:bodyPr wrap="none">
+            <a:spAutoFit/>
+          </a:bodyPr>
+          <a:lstStyle/>
+          <a:p>
+            <a:pPr algn="ctr"/>
+            <a:r>
+              <a:rPr sz="1600" b="1">
+                <a:solidFill>
+                  <a:srgbClr val="FFFFFF"/>
+                </a:solidFill>
+                <a:latin typeface="Calibri"/>
+              </a:rPr>
+              <a:t>3rd</a:t>
+            </a:r>
+          </a:p>
+        </p:txBody>
+      </p:sp>
+      <p:sp>
+        <p:nvSpPr>
+          <p:cNvPr id="16" name="TextBox 15"/>
+          <p:cNvSpPr txBox="1"/>
+          <p:nvPr/>
+        </p:nvSpPr>
+        <p:spPr>
+          <a:xfrm>
+            <a:off x="8366758" y="3246120"/>
+            <a:ext cx="3063240" cy="430887"/>
+          </a:xfrm>
+          <a:prstGeom prst="rect">
+            <a:avLst/>
+          </a:prstGeom>
+          <a:noFill/>
+        </p:spPr>
+        <p:txBody>
+          <a:bodyPr wrap="square">
+            <a:spAutoFit/>
+          </a:bodyPr>
+          <a:lstStyle/>
+          <a:p>
+            <a:pPr algn="l">
+              <a:spcAft>
+                <a:spcPts val="600"/>
+              </a:spcAft>
+            </a:pPr>
+            <a:r>
+              <a:rPr sz="2200" b="1" dirty="0">
+                <a:solidFill>
+                  <a:srgbClr val="0F172A"/>
+                </a:solidFill>
+                <a:latin typeface="Calibri"/>
+              </a:rPr>
+              <a:t>Bronze</a:t>
+            </a:r>
+          </a:p>
+        </p:txBody>
+      </p:sp>
+      <p:pic>
+        <p:nvPicPr>
+          <p:cNvPr id="17" name="seminar-music.mp3">
+            <a:hlinkClick r:id="" action="ppaction://media"/>
+          </p:cNvPr>
+          <p:cNvPicPr>
+            <a:picLocks noChangeAspect="1"/>
+          </p:cNvPicPr>
+          <p:nvPr>
+            <a:audioFile r:link="rId2"/>
+            <p:extLst>
+              <p:ext uri="{DAA4B4D4-6D71-4841-9C94-3DE7FCFB9230}">
+                <p14:media xmlns:p14="http://schemas.microsoft.com/office/powerpoint/2010/main" r:embed="rId1"/>
               </p:ext>
             </p:extLst>
           </p:nvPr>
@@ -12461,7 +13605,7 @@
       </p:pic>
       <p:sp>
         <p:nvSpPr>
-          <p:cNvPr id="6" name="TextBox 5"/>
+          <p:cNvPr id="18" name="TextBox 17"/>
           <p:cNvSpPr txBox="1"/>
           <p:nvPr/>
         </p:nvSpPr>
@@ -12496,7 +13640,7 @@
       </p:sp>
       <p:sp>
         <p:nvSpPr>
-          <p:cNvPr id="7" name="Rectangle 6"/>
+          <p:cNvPr id="19" name="Rectangle 18"/>
           <p:cNvSpPr/>
           <p:nvPr/>
         </p:nvSpPr>
@@ -12534,12 +13678,13 @@
           <a:lstStyle/>
           <a:p>
             <a:pPr algn="ctr"/>
-          </a:p>
-        </p:txBody>
-      </p:sp>
-      <p:sp>
-        <p:nvSpPr>
-          <p:cNvPr id="8" name="TextBox 7"/>
+            <a:endParaRPr/>
+          </a:p>
+        </p:txBody>
+      </p:sp>
+      <p:sp>
+        <p:nvSpPr>
+          <p:cNvPr id="20" name="TextBox 19"/>
           <p:cNvSpPr txBox="1"/>
           <p:nvPr/>
         </p:nvSpPr>
@@ -12566,14 +13711,14 @@
                 </a:solidFill>
                 <a:latin typeface="Calibri"/>
               </a:rPr>
-              <a:t>ResumeFit  ·  TEQGRID seminar</a:t>
-            </a:r>
-          </a:p>
-        </p:txBody>
-      </p:sp>
-      <p:sp>
-        <p:nvSpPr>
-          <p:cNvPr id="9" name="TextBox 8"/>
+              <a:t>Meet TEQGRID  ·  ResumeFit seminar</a:t>
+            </a:r>
+          </a:p>
+        </p:txBody>
+      </p:sp>
+      <p:sp>
+        <p:nvSpPr>
+          <p:cNvPr id="21" name="TextBox 20"/>
           <p:cNvSpPr txBox="1"/>
           <p:nvPr/>
         </p:nvSpPr>
@@ -12601,7 +13746,7 @@
                 </a:solidFill>
                 <a:latin typeface="Calibri"/>
               </a:rPr>
-              <a:t>20  /  24</a:t>
+              <a:t>23  /  24</a:t>
             </a:r>
           </a:p>
         </p:txBody>
@@ -12616,7 +13761,7 @@
       <p:par>
         <p:cTn id="1" dur="indefinite" restart="never" nodeType="tmRoot">
           <p:childTnLst>
-            <p:video>
+            <p:audio>
               <p:cMediaNode vol="80000">
                 <p:cTn id="2" fill="hold" display="0">
                   <p:stCondLst>
@@ -12624,10 +13769,10 @@
                   </p:stCondLst>
                 </p:cTn>
                 <p:tgtEl>
-                  <p:spTgt spid="5"/>
+                  <p:spTgt spid="17"/>
                 </p:tgtEl>
               </p:cMediaNode>
-            </p:video>
+            </p:audio>
           </p:childTnLst>
         </p:cTn>
       </p:par>
@@ -12636,8 +13781,8 @@
 </p:sld>
 </file>
 
-<file path=ppt/slides/slide21.xml><?xml version="1.0" encoding="utf-8"?>
-<p:sld xmlns:a="http://schemas.openxmlformats.org/drawingml/2006/main" xmlns:p="http://schemas.openxmlformats.org/presentationml/2006/main" xmlns:r="http://schemas.openxmlformats.org/officeDocument/2006/relationships">
+<file path=ppt/slides/slide22.xml><?xml version="1.0" encoding="utf-8"?>
+<p:sld xmlns:a="http://schemas.openxmlformats.org/drawingml/2006/main" xmlns:r="http://schemas.openxmlformats.org/officeDocument/2006/relationships" xmlns:p="http://schemas.openxmlformats.org/presentationml/2006/main">
   <p:cSld>
     <p:spTree>
       <p:nvGrpSpPr>
@@ -12645,7 +13790,14 @@
         <p:cNvGrpSpPr/>
         <p:nvPr/>
       </p:nvGrpSpPr>
-      <p:grpSpPr/>
+      <p:grpSpPr>
+        <a:xfrm>
+          <a:off x="0" y="0"/>
+          <a:ext cx="0" cy="0"/>
+          <a:chOff x="0" y="0"/>
+          <a:chExt cx="0" cy="0"/>
+        </a:xfrm>
+      </p:grpSpPr>
       <p:sp>
         <p:nvSpPr>
           <p:cNvPr id="2" name="Rectangle 1"/>
@@ -12661,7 +13813,7 @@
             <a:avLst/>
           </a:prstGeom>
           <a:solidFill>
-            <a:srgbClr val="F3F6FB"/>
+            <a:srgbClr val="0F172A"/>
           </a:solidFill>
           <a:ln>
             <a:noFill/>
@@ -12686,6 +13838,7 @@
           <a:lstStyle/>
           <a:p>
             <a:pPr algn="ctr"/>
+            <a:endParaRPr/>
           </a:p>
         </p:txBody>
       </p:sp>
@@ -12698,7 +13851,7 @@
         <p:spPr>
           <a:xfrm>
             <a:off x="0" y="0"/>
-            <a:ext cx="109728" cy="6858000"/>
+            <a:ext cx="164592" cy="6858000"/>
           </a:xfrm>
           <a:prstGeom prst="rect">
             <a:avLst/>
@@ -12729,19 +13882,44 @@
           <a:lstStyle/>
           <a:p>
             <a:pPr algn="ctr"/>
-          </a:p>
-        </p:txBody>
-      </p:sp>
-      <p:sp>
-        <p:nvSpPr>
-          <p:cNvPr id="4" name="TextBox 3"/>
+            <a:endParaRPr/>
+          </a:p>
+        </p:txBody>
+      </p:sp>
+      <p:pic>
+        <p:nvPicPr>
+          <p:cNvPr id="4" name="Picture 3" descr="logo.png"/>
+          <p:cNvPicPr>
+            <a:picLocks noChangeAspect="1"/>
+          </p:cNvPicPr>
+          <p:nvPr/>
+        </p:nvPicPr>
+        <p:blipFill>
+          <a:blip r:embed="rId4"/>
+          <a:stretch>
+            <a:fillRect/>
+          </a:stretch>
+        </p:blipFill>
+        <p:spPr>
+          <a:xfrm>
+            <a:off x="685800" y="1051560"/>
+            <a:ext cx="868680" cy="868680"/>
+          </a:xfrm>
+          <a:prstGeom prst="rect">
+            <a:avLst/>
+          </a:prstGeom>
+        </p:spPr>
+      </p:pic>
+      <p:sp>
+        <p:nvSpPr>
+          <p:cNvPr id="5" name="TextBox 4"/>
           <p:cNvSpPr txBox="1"/>
           <p:nvPr/>
         </p:nvSpPr>
         <p:spPr>
           <a:xfrm>
-            <a:off x="502920" y="256032"/>
-            <a:ext cx="10972800" cy="320040"/>
+            <a:off x="685800" y="2103120"/>
+            <a:ext cx="10972800" cy="2323713"/>
           </a:xfrm>
           <a:prstGeom prst="rect">
             <a:avLst/>
@@ -12760,172 +13938,224 @@
               </a:spcAft>
             </a:pPr>
             <a:r>
-              <a:rPr sz="1300" b="1">
-                <a:solidFill>
-                  <a:srgbClr val="2563EB"/>
-                </a:solidFill>
-                <a:latin typeface="Calibri"/>
-              </a:rPr>
-              <a:t>08  ·  QUIZ  1–5</a:t>
-            </a:r>
-          </a:p>
-        </p:txBody>
-      </p:sp>
-      <p:sp>
-        <p:nvSpPr>
-          <p:cNvPr id="5" name="TextBox 4"/>
-          <p:cNvSpPr txBox="1"/>
-          <p:nvPr/>
-        </p:nvSpPr>
-        <p:spPr>
-          <a:xfrm>
-            <a:off x="502920" y="530352"/>
-            <a:ext cx="11155680" cy="640080"/>
-          </a:xfrm>
-          <a:prstGeom prst="rect">
-            <a:avLst/>
-          </a:prstGeom>
-          <a:noFill/>
-        </p:spPr>
-        <p:txBody>
-          <a:bodyPr wrap="square">
-            <a:spAutoFit/>
-          </a:bodyPr>
-          <a:lstStyle/>
-          <a:p>
-            <a:pPr algn="l">
-              <a:spcAft>
-                <a:spcPts val="600"/>
-              </a:spcAft>
-            </a:pPr>
-            <a:r>
-              <a:rPr sz="3000" b="1">
-                <a:solidFill>
-                  <a:srgbClr val="0F172A"/>
-                </a:solidFill>
-                <a:latin typeface="Calibri"/>
-              </a:rPr>
-              <a:t>Circle one letter. 30 seconds each.</a:t>
-            </a:r>
-          </a:p>
-        </p:txBody>
-      </p:sp>
-      <p:sp>
-        <p:nvSpPr>
-          <p:cNvPr id="6" name="TextBox 5"/>
-          <p:cNvSpPr txBox="1"/>
-          <p:nvPr/>
-        </p:nvSpPr>
-        <p:spPr>
-          <a:xfrm>
-            <a:off x="502920" y="1325880"/>
-            <a:ext cx="11155680" cy="4754880"/>
-          </a:xfrm>
-          <a:prstGeom prst="rect">
-            <a:avLst/>
-          </a:prstGeom>
-          <a:noFill/>
-        </p:spPr>
-        <p:txBody>
-          <a:bodyPr wrap="square">
-            <a:spAutoFit/>
-          </a:bodyPr>
-          <a:lstStyle/>
-          <a:p>
-            <a:pPr algn="l">
-              <a:spcAft>
-                <a:spcPts val="600"/>
-              </a:spcAft>
-            </a:pPr>
-            <a:r>
-              <a:rPr sz="2000" b="0">
-                <a:solidFill>
-                  <a:srgbClr val="475569"/>
-                </a:solidFill>
-                <a:latin typeface="Calibri"/>
-              </a:rPr>
-              <a:t>  1. ResumeFit needs which two inputs?   A Photo + recipes   B Resume PDF + job description   C Email + OTP</a:t>
-            </a:r>
-          </a:p>
-          <a:p>
-            <a:pPr algn="l">
-              <a:spcAft>
-                <a:spcPts val="600"/>
-              </a:spcAft>
-            </a:pPr>
-            <a:r>
-              <a:rPr sz="2000" b="0">
-                <a:solidFill>
-                  <a:srgbClr val="475569"/>
-                </a:solidFill>
-                <a:latin typeface="Calibri"/>
-              </a:rPr>
-              <a:t>  2. The Gemini key should live in?   A GitHub   B .env (not committed)   C The Result screen</a:t>
-            </a:r>
-          </a:p>
-          <a:p>
-            <a:pPr algn="l">
-              <a:spcAft>
-                <a:spcPts val="600"/>
-              </a:spcAft>
-            </a:pPr>
-            <a:r>
-              <a:rPr sz="2000" b="0">
-                <a:solidFill>
-                  <a:srgbClr val="475569"/>
-                </a:solidFill>
-                <a:latin typeface="Calibri"/>
-              </a:rPr>
-              <a:t>  3. Gemini must return what the UI can draw as?   A A video   B JSON   C An Excel file</a:t>
-            </a:r>
-          </a:p>
-          <a:p>
-            <a:pPr algn="l">
-              <a:spcAft>
-                <a:spcPts val="600"/>
-              </a:spcAft>
-            </a:pPr>
-            <a:r>
-              <a:rPr sz="2000" b="0">
-                <a:solidFill>
-                  <a:srgbClr val="475569"/>
-                </a:solidFill>
-                <a:latin typeface="Calibri"/>
-              </a:rPr>
-              <a:t>  4. We send the PDF as?   A Base64 inline_data   B A Drive link   C A screenshot</a:t>
-            </a:r>
-          </a:p>
-          <a:p>
-            <a:pPr algn="l">
-              <a:spcAft>
-                <a:spcPts val="600"/>
-              </a:spcAft>
-            </a:pPr>
-            <a:r>
-              <a:rPr sz="2000" b="0">
-                <a:solidFill>
-                  <a:srgbClr val="475569"/>
-                </a:solidFill>
-                <a:latin typeface="Calibri"/>
-              </a:rPr>
-              <a:t>  5. This classroom demo has?   A No backend   B A Node server   C A database</a:t>
+              <a:rPr sz="1600" b="1" dirty="0">
+                <a:solidFill>
+                  <a:srgbClr val="93C5FD"/>
+                </a:solidFill>
+                <a:latin typeface="Calibri"/>
+              </a:rPr>
+              <a:t>THANK YOU</a:t>
+            </a:r>
+          </a:p>
+          <a:p>
+            <a:pPr algn="l">
+              <a:spcAft>
+                <a:spcPts val="600"/>
+              </a:spcAft>
+            </a:pPr>
+            <a:r>
+              <a:rPr sz="3000" b="1" dirty="0">
+                <a:solidFill>
+                  <a:srgbClr val="FFFFFF"/>
+                </a:solidFill>
+                <a:latin typeface="Calibri"/>
+              </a:rPr>
+              <a:t>Clone. Paste your key. Change one prompt line.</a:t>
+            </a:r>
+          </a:p>
+          <a:p>
+            <a:pPr algn="l">
+              <a:spcAft>
+                <a:spcPts val="600"/>
+              </a:spcAft>
+            </a:pPr>
+            <a:r>
+              <a:rPr sz="2200" b="0" dirty="0" err="1">
+                <a:solidFill>
+                  <a:srgbClr val="93C5FD"/>
+                </a:solidFill>
+                <a:latin typeface="Calibri"/>
+              </a:rPr>
+              <a:t>aistudio.google.com</a:t>
+            </a:r>
+            <a:r>
+              <a:rPr sz="2200" b="0" dirty="0">
+                <a:solidFill>
+                  <a:srgbClr val="93C5FD"/>
+                </a:solidFill>
+                <a:latin typeface="Calibri"/>
+              </a:rPr>
+              <a:t>/</a:t>
+            </a:r>
+            <a:r>
+              <a:rPr sz="2200" b="0" dirty="0" err="1">
+                <a:solidFill>
+                  <a:srgbClr val="93C5FD"/>
+                </a:solidFill>
+                <a:latin typeface="Calibri"/>
+              </a:rPr>
+              <a:t>apikey</a:t>
+            </a:r>
+            <a:endParaRPr sz="2200" b="0" dirty="0">
+              <a:solidFill>
+                <a:srgbClr val="93C5FD"/>
+              </a:solidFill>
+              <a:latin typeface="Calibri"/>
+            </a:endParaRPr>
+          </a:p>
+          <a:p>
+            <a:pPr algn="l">
+              <a:spcAft>
+                <a:spcPts val="600"/>
+              </a:spcAft>
+            </a:pPr>
+            <a:r>
+              <a:rPr sz="1800" b="0" dirty="0" err="1">
+                <a:solidFill>
+                  <a:srgbClr val="CBD5E1"/>
+                </a:solidFill>
+                <a:latin typeface="Calibri"/>
+              </a:rPr>
+              <a:t>github.com</a:t>
+            </a:r>
+            <a:r>
+              <a:rPr sz="1800" b="0" dirty="0">
+                <a:solidFill>
+                  <a:srgbClr val="CBD5E1"/>
+                </a:solidFill>
+                <a:latin typeface="Calibri"/>
+              </a:rPr>
+              <a:t>/</a:t>
+            </a:r>
+            <a:r>
+              <a:rPr sz="1800" b="0" dirty="0" err="1">
+                <a:solidFill>
+                  <a:srgbClr val="CBD5E1"/>
+                </a:solidFill>
+                <a:latin typeface="Calibri"/>
+              </a:rPr>
+              <a:t>teqgrid</a:t>
+            </a:r>
+            <a:r>
+              <a:rPr sz="1800" b="0" dirty="0">
+                <a:solidFill>
+                  <a:srgbClr val="CBD5E1"/>
+                </a:solidFill>
+                <a:latin typeface="Calibri"/>
+              </a:rPr>
+              <a:t>/resume-fit</a:t>
+            </a:r>
+          </a:p>
+          <a:p>
+            <a:pPr algn="l">
+              <a:spcAft>
+                <a:spcPts val="600"/>
+              </a:spcAft>
+            </a:pPr>
+            <a:r>
+              <a:rPr sz="1800" b="0" dirty="0" err="1">
+                <a:solidFill>
+                  <a:srgbClr val="94A3B8"/>
+                </a:solidFill>
+                <a:latin typeface="Calibri"/>
+              </a:rPr>
+              <a:t>npm</a:t>
+            </a:r>
+            <a:r>
+              <a:rPr sz="1800" b="0" dirty="0">
+                <a:solidFill>
+                  <a:srgbClr val="94A3B8"/>
+                </a:solidFill>
+                <a:latin typeface="Calibri"/>
+              </a:rPr>
+              <a:t> start    then    </a:t>
+            </a:r>
+            <a:r>
+              <a:rPr sz="1800" b="0" dirty="0" err="1">
+                <a:solidFill>
+                  <a:srgbClr val="94A3B8"/>
+                </a:solidFill>
+                <a:latin typeface="Calibri"/>
+              </a:rPr>
+              <a:t>npm</a:t>
+            </a:r>
+            <a:r>
+              <a:rPr sz="1800" b="0" dirty="0">
+                <a:solidFill>
+                  <a:srgbClr val="94A3B8"/>
+                </a:solidFill>
+                <a:latin typeface="Calibri"/>
+              </a:rPr>
+              <a:t> run </a:t>
+            </a:r>
+            <a:r>
+              <a:rPr sz="1800" b="0" dirty="0" err="1">
+                <a:solidFill>
+                  <a:srgbClr val="94A3B8"/>
+                </a:solidFill>
+                <a:latin typeface="Calibri"/>
+              </a:rPr>
+              <a:t>ios</a:t>
+            </a:r>
+            <a:r>
+              <a:rPr sz="1800" b="0" dirty="0">
+                <a:solidFill>
+                  <a:srgbClr val="94A3B8"/>
+                </a:solidFill>
+                <a:latin typeface="Calibri"/>
+              </a:rPr>
+              <a:t>  /  </a:t>
+            </a:r>
+            <a:r>
+              <a:rPr sz="1800" b="0" dirty="0" err="1">
+                <a:solidFill>
+                  <a:srgbClr val="94A3B8"/>
+                </a:solidFill>
+                <a:latin typeface="Calibri"/>
+              </a:rPr>
+              <a:t>npm</a:t>
+            </a:r>
+            <a:r>
+              <a:rPr sz="1800" b="0" dirty="0">
+                <a:solidFill>
+                  <a:srgbClr val="94A3B8"/>
+                </a:solidFill>
+                <a:latin typeface="Calibri"/>
+              </a:rPr>
+              <a:t> run android</a:t>
+            </a:r>
+          </a:p>
+          <a:p>
+            <a:pPr algn="l">
+              <a:spcAft>
+                <a:spcPts val="600"/>
+              </a:spcAft>
+            </a:pPr>
+            <a:r>
+              <a:rPr sz="1600" b="0" dirty="0">
+                <a:solidFill>
+                  <a:srgbClr val="93C5FD"/>
+                </a:solidFill>
+                <a:latin typeface="Calibri"/>
+              </a:rPr>
+              <a:t> questions anytime  ·  TEQGRID</a:t>
             </a:r>
           </a:p>
         </p:txBody>
       </p:sp>
       <p:pic>
         <p:nvPicPr>
-          <p:cNvPr id="7" name="seminar-music.mp3">
+          <p:cNvPr id="6" name="seminar-music.mp3">
             <a:hlinkClick r:id="" action="ppaction://media"/>
           </p:cNvPr>
           <p:cNvPicPr>
             <a:picLocks noChangeAspect="1"/>
           </p:cNvPicPr>
           <p:nvPr>
-            <a:videoFile r:link="rId3"/>
+            <a:audioFile r:link="rId2"/>
             <p:extLst>
               <p:ext uri="{DAA4B4D4-6D71-4841-9C94-3DE7FCFB9230}">
-                <p14:media xmlns:p14="http://schemas.microsoft.com/office/powerpoint/2010/main" r:embed="rId2"/>
+                <p14:media xmlns:p14="http://schemas.microsoft.com/office/powerpoint/2010/main" r:embed="rId1"/>
               </p:ext>
             </p:extLst>
           </p:nvPr>
@@ -12948,7 +14178,7 @@
       </p:pic>
       <p:sp>
         <p:nvSpPr>
-          <p:cNvPr id="8" name="TextBox 7"/>
+          <p:cNvPr id="7" name="TextBox 6"/>
           <p:cNvSpPr txBox="1"/>
           <p:nvPr/>
         </p:nvSpPr>
@@ -12972,7 +14202,7 @@
             <a:r>
               <a:rPr sz="1200" b="1">
                 <a:solidFill>
-                  <a:srgbClr val="2563EB"/>
+                  <a:srgbClr val="FFFFFF"/>
                 </a:solidFill>
                 <a:latin typeface="Calibri"/>
               </a:rPr>
@@ -12983,7 +14213,7 @@
       </p:sp>
       <p:sp>
         <p:nvSpPr>
-          <p:cNvPr id="9" name="Rectangle 8"/>
+          <p:cNvPr id="8" name="Rectangle 7"/>
           <p:cNvSpPr/>
           <p:nvPr/>
         </p:nvSpPr>
@@ -13021,12 +14251,13 @@
           <a:lstStyle/>
           <a:p>
             <a:pPr algn="ctr"/>
-          </a:p>
-        </p:txBody>
-      </p:sp>
-      <p:sp>
-        <p:nvSpPr>
-          <p:cNvPr id="10" name="TextBox 9"/>
+            <a:endParaRPr/>
+          </a:p>
+        </p:txBody>
+      </p:sp>
+      <p:sp>
+        <p:nvSpPr>
+          <p:cNvPr id="9" name="TextBox 8"/>
           <p:cNvSpPr txBox="1"/>
           <p:nvPr/>
         </p:nvSpPr>
@@ -13053,14 +14284,14 @@
                 </a:solidFill>
                 <a:latin typeface="Calibri"/>
               </a:rPr>
-              <a:t>ResumeFit  ·  TEQGRID seminar</a:t>
-            </a:r>
-          </a:p>
-        </p:txBody>
-      </p:sp>
-      <p:sp>
-        <p:nvSpPr>
-          <p:cNvPr id="11" name="TextBox 10"/>
+              <a:t>Meet TEQGRID  ·  ResumeFit seminar</a:t>
+            </a:r>
+          </a:p>
+        </p:txBody>
+      </p:sp>
+      <p:sp>
+        <p:nvSpPr>
+          <p:cNvPr id="10" name="TextBox 9"/>
           <p:cNvSpPr txBox="1"/>
           <p:nvPr/>
         </p:nvSpPr>
@@ -13088,7 +14319,7 @@
                 </a:solidFill>
                 <a:latin typeface="Calibri"/>
               </a:rPr>
-              <a:t>21  /  24</a:t>
+              <a:t>24  /  24</a:t>
             </a:r>
           </a:p>
         </p:txBody>
@@ -13103,1962 +14334,7 @@
       <p:par>
         <p:cTn id="1" dur="indefinite" restart="never" nodeType="tmRoot">
           <p:childTnLst>
-            <p:video>
-              <p:cMediaNode vol="80000">
-                <p:cTn id="2" fill="hold" display="0">
-                  <p:stCondLst>
-                    <p:cond delay="indefinite"/>
-                  </p:stCondLst>
-                </p:cTn>
-                <p:tgtEl>
-                  <p:spTgt spid="7"/>
-                </p:tgtEl>
-              </p:cMediaNode>
-            </p:video>
-          </p:childTnLst>
-        </p:cTn>
-      </p:par>
-    </p:tnLst>
-  </p:timing>
-</p:sld>
-</file>
-
-<file path=ppt/slides/slide22.xml><?xml version="1.0" encoding="utf-8"?>
-<p:sld xmlns:a="http://schemas.openxmlformats.org/drawingml/2006/main" xmlns:p="http://schemas.openxmlformats.org/presentationml/2006/main" xmlns:r="http://schemas.openxmlformats.org/officeDocument/2006/relationships">
-  <p:cSld>
-    <p:spTree>
-      <p:nvGrpSpPr>
-        <p:cNvPr id="1" name=""/>
-        <p:cNvGrpSpPr/>
-        <p:nvPr/>
-      </p:nvGrpSpPr>
-      <p:grpSpPr/>
-      <p:sp>
-        <p:nvSpPr>
-          <p:cNvPr id="2" name="Rectangle 1"/>
-          <p:cNvSpPr/>
-          <p:nvPr/>
-        </p:nvSpPr>
-        <p:spPr>
-          <a:xfrm>
-            <a:off x="0" y="0"/>
-            <a:ext cx="12191695" cy="6858000"/>
-          </a:xfrm>
-          <a:prstGeom prst="rect">
-            <a:avLst/>
-          </a:prstGeom>
-          <a:solidFill>
-            <a:srgbClr val="F3F6FB"/>
-          </a:solidFill>
-          <a:ln>
-            <a:noFill/>
-          </a:ln>
-        </p:spPr>
-        <p:style>
-          <a:lnRef idx="1">
-            <a:schemeClr val="accent1"/>
-          </a:lnRef>
-          <a:fillRef idx="3">
-            <a:schemeClr val="accent1"/>
-          </a:fillRef>
-          <a:effectRef idx="2">
-            <a:schemeClr val="accent1"/>
-          </a:effectRef>
-          <a:fontRef idx="minor">
-            <a:schemeClr val="lt1"/>
-          </a:fontRef>
-        </p:style>
-        <p:txBody>
-          <a:bodyPr rtlCol="0" anchor="ctr"/>
-          <a:lstStyle/>
-          <a:p>
-            <a:pPr algn="ctr"/>
-          </a:p>
-        </p:txBody>
-      </p:sp>
-      <p:sp>
-        <p:nvSpPr>
-          <p:cNvPr id="3" name="Rectangle 2"/>
-          <p:cNvSpPr/>
-          <p:nvPr/>
-        </p:nvSpPr>
-        <p:spPr>
-          <a:xfrm>
-            <a:off x="0" y="0"/>
-            <a:ext cx="109728" cy="6858000"/>
-          </a:xfrm>
-          <a:prstGeom prst="rect">
-            <a:avLst/>
-          </a:prstGeom>
-          <a:solidFill>
-            <a:srgbClr val="2563EB"/>
-          </a:solidFill>
-          <a:ln>
-            <a:noFill/>
-          </a:ln>
-        </p:spPr>
-        <p:style>
-          <a:lnRef idx="1">
-            <a:schemeClr val="accent1"/>
-          </a:lnRef>
-          <a:fillRef idx="3">
-            <a:schemeClr val="accent1"/>
-          </a:fillRef>
-          <a:effectRef idx="2">
-            <a:schemeClr val="accent1"/>
-          </a:effectRef>
-          <a:fontRef idx="minor">
-            <a:schemeClr val="lt1"/>
-          </a:fontRef>
-        </p:style>
-        <p:txBody>
-          <a:bodyPr rtlCol="0" anchor="ctr"/>
-          <a:lstStyle/>
-          <a:p>
-            <a:pPr algn="ctr"/>
-          </a:p>
-        </p:txBody>
-      </p:sp>
-      <p:sp>
-        <p:nvSpPr>
-          <p:cNvPr id="4" name="TextBox 3"/>
-          <p:cNvSpPr txBox="1"/>
-          <p:nvPr/>
-        </p:nvSpPr>
-        <p:spPr>
-          <a:xfrm>
-            <a:off x="502920" y="256032"/>
-            <a:ext cx="10972800" cy="320040"/>
-          </a:xfrm>
-          <a:prstGeom prst="rect">
-            <a:avLst/>
-          </a:prstGeom>
-          <a:noFill/>
-        </p:spPr>
-        <p:txBody>
-          <a:bodyPr wrap="square">
-            <a:spAutoFit/>
-          </a:bodyPr>
-          <a:lstStyle/>
-          <a:p>
-            <a:pPr algn="l">
-              <a:spcAft>
-                <a:spcPts val="600"/>
-              </a:spcAft>
-            </a:pPr>
-            <a:r>
-              <a:rPr sz="1300" b="1">
-                <a:solidFill>
-                  <a:srgbClr val="2563EB"/>
-                </a:solidFill>
-                <a:latin typeface="Calibri"/>
-              </a:rPr>
-              <a:t>08  ·  QUIZ  6–10</a:t>
-            </a:r>
-          </a:p>
-        </p:txBody>
-      </p:sp>
-      <p:sp>
-        <p:nvSpPr>
-          <p:cNvPr id="5" name="TextBox 4"/>
-          <p:cNvSpPr txBox="1"/>
-          <p:nvPr/>
-        </p:nvSpPr>
-        <p:spPr>
-          <a:xfrm>
-            <a:off x="502920" y="530352"/>
-            <a:ext cx="11155680" cy="640080"/>
-          </a:xfrm>
-          <a:prstGeom prst="rect">
-            <a:avLst/>
-          </a:prstGeom>
-          <a:noFill/>
-        </p:spPr>
-        <p:txBody>
-          <a:bodyPr wrap="square">
-            <a:spAutoFit/>
-          </a:bodyPr>
-          <a:lstStyle/>
-          <a:p>
-            <a:pPr algn="l">
-              <a:spcAft>
-                <a:spcPts val="600"/>
-              </a:spcAft>
-            </a:pPr>
-            <a:r>
-              <a:rPr sz="3000" b="1">
-                <a:solidFill>
-                  <a:srgbClr val="0F172A"/>
-                </a:solidFill>
-                <a:latin typeface="Calibri"/>
-              </a:rPr>
-              <a:t>Same rules. Last five.</a:t>
-            </a:r>
-          </a:p>
-        </p:txBody>
-      </p:sp>
-      <p:sp>
-        <p:nvSpPr>
-          <p:cNvPr id="6" name="TextBox 5"/>
-          <p:cNvSpPr txBox="1"/>
-          <p:nvPr/>
-        </p:nvSpPr>
-        <p:spPr>
-          <a:xfrm>
-            <a:off x="502920" y="1325880"/>
-            <a:ext cx="11155680" cy="4023360"/>
-          </a:xfrm>
-          <a:prstGeom prst="rect">
-            <a:avLst/>
-          </a:prstGeom>
-          <a:noFill/>
-        </p:spPr>
-        <p:txBody>
-          <a:bodyPr wrap="square">
-            <a:spAutoFit/>
-          </a:bodyPr>
-          <a:lstStyle/>
-          <a:p>
-            <a:pPr algn="l">
-              <a:spcAft>
-                <a:spcPts val="600"/>
-              </a:spcAft>
-            </a:pPr>
-            <a:r>
-              <a:rPr sz="2000" b="0">
-                <a:solidFill>
-                  <a:srgbClr val="475569"/>
-                </a:solidFill>
-                <a:latin typeface="Calibri"/>
-              </a:rPr>
-              <a:t>  6. Which file calls Gemini?   A App.tsx   B src/api/gemini.ts   C Info.plist</a:t>
-            </a:r>
-          </a:p>
-          <a:p>
-            <a:pPr algn="l">
-              <a:spcAft>
-                <a:spcPts val="600"/>
-              </a:spcAft>
-            </a:pPr>
-            <a:r>
-              <a:rPr sz="2000" b="0">
-                <a:solidFill>
-                  <a:srgbClr val="475569"/>
-                </a:solidFill>
-                <a:latin typeface="Calibri"/>
-              </a:rPr>
-              <a:t>  7. React Native lets you?   A One JS/TS app → iOS + Android   B Websites only   C iOS only</a:t>
-            </a:r>
-          </a:p>
-          <a:p>
-            <a:pPr algn="l">
-              <a:spcAft>
-                <a:spcPts val="600"/>
-              </a:spcAft>
-            </a:pPr>
-            <a:r>
-              <a:rPr sz="2000" b="0">
-                <a:solidFill>
-                  <a:srgbClr val="475569"/>
-                </a:solidFill>
-                <a:latin typeface="Calibri"/>
-              </a:rPr>
-              <a:t>  8. Delete “do not invent skills” and green chips may?   A Vanish   B Show skills not on the PDF   C Crash Metro</a:t>
-            </a:r>
-          </a:p>
-          <a:p>
-            <a:pPr algn="l">
-              <a:spcAft>
-                <a:spcPts val="600"/>
-              </a:spcAft>
-            </a:pPr>
-            <a:r>
-              <a:rPr sz="2000" b="0">
-                <a:solidFill>
-                  <a:srgbClr val="475569"/>
-                </a:solidFill>
-                <a:latin typeface="Calibri"/>
-              </a:rPr>
-              <a:t>  9. Free key is created at?   A aistudio.google.com/apikey   B github.com   C npmjs.com</a:t>
-            </a:r>
-          </a:p>
-          <a:p>
-            <a:pPr algn="l">
-              <a:spcAft>
-                <a:spcPts val="600"/>
-              </a:spcAft>
-            </a:pPr>
-            <a:r>
-              <a:rPr sz="2000" b="0">
-                <a:solidFill>
-                  <a:srgbClr val="475569"/>
-                </a:solidFill>
-                <a:latin typeface="Calibri"/>
-              </a:rPr>
-              <a:t>  10. For Play Store you should?   A Keep the key in the APK   B Put the key on your server   C Print it on splash</a:t>
-            </a:r>
-          </a:p>
-        </p:txBody>
-      </p:sp>
-      <p:sp>
-        <p:nvSpPr>
-          <p:cNvPr id="7" name="Rounded Rectangle 6"/>
-          <p:cNvSpPr/>
-          <p:nvPr/>
-        </p:nvSpPr>
-        <p:spPr>
-          <a:xfrm>
-            <a:off x="502920" y="5623560"/>
-            <a:ext cx="11155680" cy="777240"/>
-          </a:xfrm>
-          <a:prstGeom prst="roundRect">
-            <a:avLst/>
-          </a:prstGeom>
-          <a:solidFill>
-            <a:srgbClr val="EEF3FF"/>
-          </a:solidFill>
-          <a:ln>
-            <a:noFill/>
-          </a:ln>
-        </p:spPr>
-        <p:style>
-          <a:lnRef idx="1">
-            <a:schemeClr val="accent1"/>
-          </a:lnRef>
-          <a:fillRef idx="3">
-            <a:schemeClr val="accent1"/>
-          </a:fillRef>
-          <a:effectRef idx="2">
-            <a:schemeClr val="accent1"/>
-          </a:effectRef>
-          <a:fontRef idx="minor">
-            <a:schemeClr val="lt1"/>
-          </a:fontRef>
-        </p:style>
-        <p:txBody>
-          <a:bodyPr rtlCol="0" anchor="ctr"/>
-          <a:lstStyle/>
-          <a:p>
-            <a:pPr algn="ctr"/>
-          </a:p>
-        </p:txBody>
-      </p:sp>
-      <p:sp>
-        <p:nvSpPr>
-          <p:cNvPr id="8" name="TextBox 7"/>
-          <p:cNvSpPr txBox="1"/>
-          <p:nvPr/>
-        </p:nvSpPr>
-        <p:spPr>
-          <a:xfrm>
-            <a:off x="685800" y="5742432"/>
-            <a:ext cx="10789920" cy="594360"/>
-          </a:xfrm>
-          <a:prstGeom prst="rect">
-            <a:avLst/>
-          </a:prstGeom>
-          <a:noFill/>
-        </p:spPr>
-        <p:txBody>
-          <a:bodyPr wrap="square">
-            <a:spAutoFit/>
-          </a:bodyPr>
-          <a:lstStyle/>
-          <a:p>
-            <a:pPr algn="l">
-              <a:spcAft>
-                <a:spcPts val="600"/>
-              </a:spcAft>
-            </a:pPr>
-            <a:r>
-              <a:rPr sz="1600" b="1">
-                <a:solidFill>
-                  <a:srgbClr val="1D4ED8"/>
-                </a:solidFill>
-                <a:latin typeface="Calibri"/>
-              </a:rPr>
-              <a:t>Host key: 1B  2B  3B  4A  5A  6B  7A  8B  9A  10B</a:t>
-            </a:r>
-          </a:p>
-        </p:txBody>
-      </p:sp>
-      <p:pic>
-        <p:nvPicPr>
-          <p:cNvPr id="9" name="seminar-music.mp3">
-            <a:hlinkClick r:id="" action="ppaction://media"/>
-          </p:cNvPr>
-          <p:cNvPicPr>
-            <a:picLocks noChangeAspect="1"/>
-          </p:cNvPicPr>
-          <p:nvPr>
-            <a:videoFile r:link="rId3"/>
-            <p:extLst>
-              <p:ext uri="{DAA4B4D4-6D71-4841-9C94-3DE7FCFB9230}">
-                <p14:media xmlns:p14="http://schemas.microsoft.com/office/powerpoint/2010/main" r:embed="rId2"/>
-              </p:ext>
-            </p:extLst>
-          </p:nvPr>
-        </p:nvPicPr>
-        <p:blipFill>
-          <a:blip r:embed="rId4"/>
-          <a:stretch>
-            <a:fillRect/>
-          </a:stretch>
-        </p:blipFill>
-        <p:spPr>
-          <a:xfrm>
-            <a:off x="11292840" y="164592"/>
-            <a:ext cx="566928" cy="566928"/>
-          </a:xfrm>
-          <a:prstGeom prst="rect">
-            <a:avLst/>
-          </a:prstGeom>
-        </p:spPr>
-      </p:pic>
-      <p:sp>
-        <p:nvSpPr>
-          <p:cNvPr id="10" name="TextBox 9"/>
-          <p:cNvSpPr txBox="1"/>
-          <p:nvPr/>
-        </p:nvSpPr>
-        <p:spPr>
-          <a:xfrm>
-            <a:off x="9784080" y="256032"/>
-            <a:ext cx="1417320" cy="365760"/>
-          </a:xfrm>
-          <a:prstGeom prst="rect">
-            <a:avLst/>
-          </a:prstGeom>
-          <a:noFill/>
-        </p:spPr>
-        <p:txBody>
-          <a:bodyPr wrap="none">
-            <a:spAutoFit/>
-          </a:bodyPr>
-          <a:lstStyle/>
-          <a:p>
-            <a:pPr algn="r"/>
-            <a:r>
-              <a:rPr sz="1200" b="1">
-                <a:solidFill>
-                  <a:srgbClr val="2563EB"/>
-                </a:solidFill>
-                <a:latin typeface="Calibri"/>
-              </a:rPr>
-              <a:t>♪  play</a:t>
-            </a:r>
-          </a:p>
-        </p:txBody>
-      </p:sp>
-      <p:sp>
-        <p:nvSpPr>
-          <p:cNvPr id="11" name="Rectangle 10"/>
-          <p:cNvSpPr/>
-          <p:nvPr/>
-        </p:nvSpPr>
-        <p:spPr>
-          <a:xfrm>
-            <a:off x="0" y="6601968"/>
-            <a:ext cx="12191695" cy="256032"/>
-          </a:xfrm>
-          <a:prstGeom prst="rect">
-            <a:avLst/>
-          </a:prstGeom>
-          <a:solidFill>
-            <a:srgbClr val="0F172A"/>
-          </a:solidFill>
-          <a:ln>
-            <a:noFill/>
-          </a:ln>
-        </p:spPr>
-        <p:style>
-          <a:lnRef idx="1">
-            <a:schemeClr val="accent1"/>
-          </a:lnRef>
-          <a:fillRef idx="3">
-            <a:schemeClr val="accent1"/>
-          </a:fillRef>
-          <a:effectRef idx="2">
-            <a:schemeClr val="accent1"/>
-          </a:effectRef>
-          <a:fontRef idx="minor">
-            <a:schemeClr val="lt1"/>
-          </a:fontRef>
-        </p:style>
-        <p:txBody>
-          <a:bodyPr rtlCol="0" anchor="ctr"/>
-          <a:lstStyle/>
-          <a:p>
-            <a:pPr algn="ctr"/>
-          </a:p>
-        </p:txBody>
-      </p:sp>
-      <p:sp>
-        <p:nvSpPr>
-          <p:cNvPr id="12" name="TextBox 11"/>
-          <p:cNvSpPr txBox="1"/>
-          <p:nvPr/>
-        </p:nvSpPr>
-        <p:spPr>
-          <a:xfrm>
-            <a:off x="365760" y="6601968"/>
-            <a:ext cx="9144000" cy="256032"/>
-          </a:xfrm>
-          <a:prstGeom prst="rect">
-            <a:avLst/>
-          </a:prstGeom>
-          <a:noFill/>
-        </p:spPr>
-        <p:txBody>
-          <a:bodyPr wrap="none">
-            <a:spAutoFit/>
-          </a:bodyPr>
-          <a:lstStyle/>
-          <a:p>
-            <a:r>
-              <a:rPr sz="1100" b="0">
-                <a:solidFill>
-                  <a:srgbClr val="FFFFFF"/>
-                </a:solidFill>
-                <a:latin typeface="Calibri"/>
-              </a:rPr>
-              <a:t>ResumeFit  ·  TEQGRID seminar</a:t>
-            </a:r>
-          </a:p>
-        </p:txBody>
-      </p:sp>
-      <p:sp>
-        <p:nvSpPr>
-          <p:cNvPr id="13" name="TextBox 12"/>
-          <p:cNvSpPr txBox="1"/>
-          <p:nvPr/>
-        </p:nvSpPr>
-        <p:spPr>
-          <a:xfrm>
-            <a:off x="10607040" y="6601968"/>
-            <a:ext cx="1280160" cy="256032"/>
-          </a:xfrm>
-          <a:prstGeom prst="rect">
-            <a:avLst/>
-          </a:prstGeom>
-          <a:noFill/>
-        </p:spPr>
-        <p:txBody>
-          <a:bodyPr wrap="none">
-            <a:spAutoFit/>
-          </a:bodyPr>
-          <a:lstStyle/>
-          <a:p>
-            <a:pPr algn="r"/>
-            <a:r>
-              <a:rPr sz="1100" b="0">
-                <a:solidFill>
-                  <a:srgbClr val="FFFFFF"/>
-                </a:solidFill>
-                <a:latin typeface="Calibri"/>
-              </a:rPr>
-              <a:t>22  /  24</a:t>
-            </a:r>
-          </a:p>
-        </p:txBody>
-      </p:sp>
-    </p:spTree>
-  </p:cSld>
-  <p:clrMapOvr>
-    <a:masterClrMapping/>
-  </p:clrMapOvr>
-  <p:timing>
-    <p:tnLst>
-      <p:par>
-        <p:cTn id="1" dur="indefinite" restart="never" nodeType="tmRoot">
-          <p:childTnLst>
-            <p:video>
-              <p:cMediaNode vol="80000">
-                <p:cTn id="2" fill="hold" display="0">
-                  <p:stCondLst>
-                    <p:cond delay="indefinite"/>
-                  </p:stCondLst>
-                </p:cTn>
-                <p:tgtEl>
-                  <p:spTgt spid="9"/>
-                </p:tgtEl>
-              </p:cMediaNode>
-            </p:video>
-          </p:childTnLst>
-        </p:cTn>
-      </p:par>
-    </p:tnLst>
-  </p:timing>
-</p:sld>
-</file>
-
-<file path=ppt/slides/slide23.xml><?xml version="1.0" encoding="utf-8"?>
-<p:sld xmlns:a="http://schemas.openxmlformats.org/drawingml/2006/main" xmlns:p="http://schemas.openxmlformats.org/presentationml/2006/main" xmlns:r="http://schemas.openxmlformats.org/officeDocument/2006/relationships">
-  <p:cSld>
-    <p:spTree>
-      <p:nvGrpSpPr>
-        <p:cNvPr id="1" name=""/>
-        <p:cNvGrpSpPr/>
-        <p:nvPr/>
-      </p:nvGrpSpPr>
-      <p:grpSpPr/>
-      <p:sp>
-        <p:nvSpPr>
-          <p:cNvPr id="2" name="Rectangle 1"/>
-          <p:cNvSpPr/>
-          <p:nvPr/>
-        </p:nvSpPr>
-        <p:spPr>
-          <a:xfrm>
-            <a:off x="0" y="0"/>
-            <a:ext cx="12191695" cy="6858000"/>
-          </a:xfrm>
-          <a:prstGeom prst="rect">
-            <a:avLst/>
-          </a:prstGeom>
-          <a:solidFill>
-            <a:srgbClr val="0F172A"/>
-          </a:solidFill>
-          <a:ln>
-            <a:noFill/>
-          </a:ln>
-        </p:spPr>
-        <p:style>
-          <a:lnRef idx="1">
-            <a:schemeClr val="accent1"/>
-          </a:lnRef>
-          <a:fillRef idx="3">
-            <a:schemeClr val="accent1"/>
-          </a:fillRef>
-          <a:effectRef idx="2">
-            <a:schemeClr val="accent1"/>
-          </a:effectRef>
-          <a:fontRef idx="minor">
-            <a:schemeClr val="lt1"/>
-          </a:fontRef>
-        </p:style>
-        <p:txBody>
-          <a:bodyPr rtlCol="0" anchor="ctr"/>
-          <a:lstStyle/>
-          <a:p>
-            <a:pPr algn="ctr"/>
-          </a:p>
-        </p:txBody>
-      </p:sp>
-      <p:sp>
-        <p:nvSpPr>
-          <p:cNvPr id="3" name="Rectangle 2"/>
-          <p:cNvSpPr/>
-          <p:nvPr/>
-        </p:nvSpPr>
-        <p:spPr>
-          <a:xfrm>
-            <a:off x="0" y="0"/>
-            <a:ext cx="164592" cy="6858000"/>
-          </a:xfrm>
-          <a:prstGeom prst="rect">
-            <a:avLst/>
-          </a:prstGeom>
-          <a:solidFill>
-            <a:srgbClr val="2563EB"/>
-          </a:solidFill>
-          <a:ln>
-            <a:noFill/>
-          </a:ln>
-        </p:spPr>
-        <p:style>
-          <a:lnRef idx="1">
-            <a:schemeClr val="accent1"/>
-          </a:lnRef>
-          <a:fillRef idx="3">
-            <a:schemeClr val="accent1"/>
-          </a:fillRef>
-          <a:effectRef idx="2">
-            <a:schemeClr val="accent1"/>
-          </a:effectRef>
-          <a:fontRef idx="minor">
-            <a:schemeClr val="lt1"/>
-          </a:fontRef>
-        </p:style>
-        <p:txBody>
-          <a:bodyPr rtlCol="0" anchor="ctr"/>
-          <a:lstStyle/>
-          <a:p>
-            <a:pPr algn="ctr"/>
-          </a:p>
-        </p:txBody>
-      </p:sp>
-      <p:sp>
-        <p:nvSpPr>
-          <p:cNvPr id="4" name="TextBox 3"/>
-          <p:cNvSpPr txBox="1"/>
-          <p:nvPr/>
-        </p:nvSpPr>
-        <p:spPr>
-          <a:xfrm>
-            <a:off x="640080" y="411480"/>
-            <a:ext cx="10972800" cy="1097280"/>
-          </a:xfrm>
-          <a:prstGeom prst="rect">
-            <a:avLst/>
-          </a:prstGeom>
-          <a:noFill/>
-        </p:spPr>
-        <p:txBody>
-          <a:bodyPr wrap="square">
-            <a:spAutoFit/>
-          </a:bodyPr>
-          <a:lstStyle/>
-          <a:p>
-            <a:pPr algn="l">
-              <a:spcAft>
-                <a:spcPts val="600"/>
-              </a:spcAft>
-            </a:pPr>
-            <a:r>
-              <a:rPr sz="1600" b="1">
-                <a:solidFill>
-                  <a:srgbClr val="93C5FD"/>
-                </a:solidFill>
-                <a:latin typeface="Calibri"/>
-              </a:rPr>
-              <a:t>QUIZ WINNERS</a:t>
-            </a:r>
-          </a:p>
-          <a:p>
-            <a:pPr algn="l">
-              <a:spcAft>
-                <a:spcPts val="600"/>
-              </a:spcAft>
-            </a:pPr>
-            <a:r>
-              <a:rPr sz="3400" b="1">
-                <a:solidFill>
-                  <a:srgbClr val="FFFFFF"/>
-                </a:solidFill>
-                <a:latin typeface="Calibri"/>
-              </a:rPr>
-              <a:t>Top 3 students take the quiz</a:t>
-            </a:r>
-          </a:p>
-        </p:txBody>
-      </p:sp>
-      <p:sp>
-        <p:nvSpPr>
-          <p:cNvPr id="5" name="Rounded Rectangle 4"/>
-          <p:cNvSpPr/>
-          <p:nvPr/>
-        </p:nvSpPr>
-        <p:spPr>
-          <a:xfrm>
-            <a:off x="640080" y="1920240"/>
-            <a:ext cx="3520440" cy="3383280"/>
-          </a:xfrm>
-          <a:prstGeom prst="roundRect">
-            <a:avLst/>
-          </a:prstGeom>
-          <a:solidFill>
-            <a:srgbClr val="FFFFFF"/>
-          </a:solidFill>
-          <a:ln>
-            <a:noFill/>
-          </a:ln>
-        </p:spPr>
-        <p:style>
-          <a:lnRef idx="1">
-            <a:schemeClr val="accent1"/>
-          </a:lnRef>
-          <a:fillRef idx="3">
-            <a:schemeClr val="accent1"/>
-          </a:fillRef>
-          <a:effectRef idx="2">
-            <a:schemeClr val="accent1"/>
-          </a:effectRef>
-          <a:fontRef idx="minor">
-            <a:schemeClr val="lt1"/>
-          </a:fontRef>
-        </p:style>
-        <p:txBody>
-          <a:bodyPr rtlCol="0" anchor="ctr"/>
-          <a:lstStyle/>
-          <a:p>
-            <a:pPr algn="ctr"/>
-          </a:p>
-        </p:txBody>
-      </p:sp>
-      <p:sp>
-        <p:nvSpPr>
-          <p:cNvPr id="6" name="Oval 5"/>
-          <p:cNvSpPr/>
-          <p:nvPr/>
-        </p:nvSpPr>
-        <p:spPr>
-          <a:xfrm>
-            <a:off x="1965960" y="2148840"/>
-            <a:ext cx="868680" cy="868680"/>
-          </a:xfrm>
-          <a:prstGeom prst="ellipse">
-            <a:avLst/>
-          </a:prstGeom>
-          <a:solidFill>
-            <a:srgbClr val="D97706"/>
-          </a:solidFill>
-          <a:ln>
-            <a:noFill/>
-          </a:ln>
-        </p:spPr>
-        <p:style>
-          <a:lnRef idx="1">
-            <a:schemeClr val="accent1"/>
-          </a:lnRef>
-          <a:fillRef idx="3">
-            <a:schemeClr val="accent1"/>
-          </a:fillRef>
-          <a:effectRef idx="2">
-            <a:schemeClr val="accent1"/>
-          </a:effectRef>
-          <a:fontRef idx="minor">
-            <a:schemeClr val="lt1"/>
-          </a:fontRef>
-        </p:style>
-        <p:txBody>
-          <a:bodyPr rtlCol="0" anchor="ctr"/>
-          <a:lstStyle/>
-          <a:p>
-            <a:pPr algn="ctr"/>
-          </a:p>
-        </p:txBody>
-      </p:sp>
-      <p:sp>
-        <p:nvSpPr>
-          <p:cNvPr id="7" name="TextBox 6"/>
-          <p:cNvSpPr txBox="1"/>
-          <p:nvPr/>
-        </p:nvSpPr>
-        <p:spPr>
-          <a:xfrm>
-            <a:off x="1965960" y="2304288"/>
-            <a:ext cx="868680" cy="640080"/>
-          </a:xfrm>
-          <a:prstGeom prst="rect">
-            <a:avLst/>
-          </a:prstGeom>
-          <a:noFill/>
-        </p:spPr>
-        <p:txBody>
-          <a:bodyPr wrap="none">
-            <a:spAutoFit/>
-          </a:bodyPr>
-          <a:lstStyle/>
-          <a:p>
-            <a:pPr algn="ctr"/>
-            <a:r>
-              <a:rPr sz="1600" b="1">
-                <a:solidFill>
-                  <a:srgbClr val="FFFFFF"/>
-                </a:solidFill>
-                <a:latin typeface="Calibri"/>
-              </a:rPr>
-              <a:t>1st</a:t>
-            </a:r>
-          </a:p>
-        </p:txBody>
-      </p:sp>
-      <p:sp>
-        <p:nvSpPr>
-          <p:cNvPr id="8" name="TextBox 7"/>
-          <p:cNvSpPr txBox="1"/>
-          <p:nvPr/>
-        </p:nvSpPr>
-        <p:spPr>
-          <a:xfrm>
-            <a:off x="868680" y="3200400"/>
-            <a:ext cx="3063240" cy="1828800"/>
-          </a:xfrm>
-          <a:prstGeom prst="rect">
-            <a:avLst/>
-          </a:prstGeom>
-          <a:noFill/>
-        </p:spPr>
-        <p:txBody>
-          <a:bodyPr wrap="square">
-            <a:spAutoFit/>
-          </a:bodyPr>
-          <a:lstStyle/>
-          <a:p>
-            <a:pPr algn="l">
-              <a:spcAft>
-                <a:spcPts val="600"/>
-              </a:spcAft>
-            </a:pPr>
-            <a:r>
-              <a:rPr sz="2200" b="1">
-                <a:solidFill>
-                  <a:srgbClr val="0F172A"/>
-                </a:solidFill>
-                <a:latin typeface="Calibri"/>
-              </a:rPr>
-              <a:t>Gold</a:t>
-            </a:r>
-          </a:p>
-          <a:p>
-            <a:pPr algn="l">
-              <a:spcAft>
-                <a:spcPts val="600"/>
-              </a:spcAft>
-            </a:pPr>
-            <a:r>
-              <a:rPr sz="1600" b="0">
-                <a:solidFill>
-                  <a:srgbClr val="475569"/>
-                </a:solidFill>
-                <a:latin typeface="Calibri"/>
-              </a:rPr>
-              <a:t>Name: ____________________</a:t>
-            </a:r>
-          </a:p>
-          <a:p>
-            <a:pPr algn="l">
-              <a:spcAft>
-                <a:spcPts val="600"/>
-              </a:spcAft>
-            </a:pPr>
-            <a:r>
-              <a:rPr sz="1400" b="0">
-                <a:solidFill>
-                  <a:srgbClr val="475569"/>
-                </a:solidFill>
-                <a:latin typeface="Calibri"/>
-              </a:rPr>
-              <a:t>Highest score  ·  walks through one prompt line</a:t>
-            </a:r>
-          </a:p>
-        </p:txBody>
-      </p:sp>
-      <p:sp>
-        <p:nvSpPr>
-          <p:cNvPr id="9" name="Rounded Rectangle 8"/>
-          <p:cNvSpPr/>
-          <p:nvPr/>
-        </p:nvSpPr>
-        <p:spPr>
-          <a:xfrm>
-            <a:off x="4389119" y="1920240"/>
-            <a:ext cx="3520440" cy="3383280"/>
-          </a:xfrm>
-          <a:prstGeom prst="roundRect">
-            <a:avLst/>
-          </a:prstGeom>
-          <a:solidFill>
-            <a:srgbClr val="FFFFFF"/>
-          </a:solidFill>
-          <a:ln>
-            <a:noFill/>
-          </a:ln>
-        </p:spPr>
-        <p:style>
-          <a:lnRef idx="1">
-            <a:schemeClr val="accent1"/>
-          </a:lnRef>
-          <a:fillRef idx="3">
-            <a:schemeClr val="accent1"/>
-          </a:fillRef>
-          <a:effectRef idx="2">
-            <a:schemeClr val="accent1"/>
-          </a:effectRef>
-          <a:fontRef idx="minor">
-            <a:schemeClr val="lt1"/>
-          </a:fontRef>
-        </p:style>
-        <p:txBody>
-          <a:bodyPr rtlCol="0" anchor="ctr"/>
-          <a:lstStyle/>
-          <a:p>
-            <a:pPr algn="ctr"/>
-          </a:p>
-        </p:txBody>
-      </p:sp>
-      <p:sp>
-        <p:nvSpPr>
-          <p:cNvPr id="10" name="Oval 9"/>
-          <p:cNvSpPr/>
-          <p:nvPr/>
-        </p:nvSpPr>
-        <p:spPr>
-          <a:xfrm>
-            <a:off x="5714999" y="2148840"/>
-            <a:ext cx="868680" cy="868680"/>
-          </a:xfrm>
-          <a:prstGeom prst="ellipse">
-            <a:avLst/>
-          </a:prstGeom>
-          <a:solidFill>
-            <a:srgbClr val="64748B"/>
-          </a:solidFill>
-          <a:ln>
-            <a:noFill/>
-          </a:ln>
-        </p:spPr>
-        <p:style>
-          <a:lnRef idx="1">
-            <a:schemeClr val="accent1"/>
-          </a:lnRef>
-          <a:fillRef idx="3">
-            <a:schemeClr val="accent1"/>
-          </a:fillRef>
-          <a:effectRef idx="2">
-            <a:schemeClr val="accent1"/>
-          </a:effectRef>
-          <a:fontRef idx="minor">
-            <a:schemeClr val="lt1"/>
-          </a:fontRef>
-        </p:style>
-        <p:txBody>
-          <a:bodyPr rtlCol="0" anchor="ctr"/>
-          <a:lstStyle/>
-          <a:p>
-            <a:pPr algn="ctr"/>
-          </a:p>
-        </p:txBody>
-      </p:sp>
-      <p:sp>
-        <p:nvSpPr>
-          <p:cNvPr id="11" name="TextBox 10"/>
-          <p:cNvSpPr txBox="1"/>
-          <p:nvPr/>
-        </p:nvSpPr>
-        <p:spPr>
-          <a:xfrm>
-            <a:off x="5714999" y="2304288"/>
-            <a:ext cx="868680" cy="640080"/>
-          </a:xfrm>
-          <a:prstGeom prst="rect">
-            <a:avLst/>
-          </a:prstGeom>
-          <a:noFill/>
-        </p:spPr>
-        <p:txBody>
-          <a:bodyPr wrap="none">
-            <a:spAutoFit/>
-          </a:bodyPr>
-          <a:lstStyle/>
-          <a:p>
-            <a:pPr algn="ctr"/>
-            <a:r>
-              <a:rPr sz="1600" b="1">
-                <a:solidFill>
-                  <a:srgbClr val="FFFFFF"/>
-                </a:solidFill>
-                <a:latin typeface="Calibri"/>
-              </a:rPr>
-              <a:t>2nd</a:t>
-            </a:r>
-          </a:p>
-        </p:txBody>
-      </p:sp>
-      <p:sp>
-        <p:nvSpPr>
-          <p:cNvPr id="12" name="TextBox 11"/>
-          <p:cNvSpPr txBox="1"/>
-          <p:nvPr/>
-        </p:nvSpPr>
-        <p:spPr>
-          <a:xfrm>
-            <a:off x="4617719" y="3200400"/>
-            <a:ext cx="3063240" cy="1828800"/>
-          </a:xfrm>
-          <a:prstGeom prst="rect">
-            <a:avLst/>
-          </a:prstGeom>
-          <a:noFill/>
-        </p:spPr>
-        <p:txBody>
-          <a:bodyPr wrap="square">
-            <a:spAutoFit/>
-          </a:bodyPr>
-          <a:lstStyle/>
-          <a:p>
-            <a:pPr algn="l">
-              <a:spcAft>
-                <a:spcPts val="600"/>
-              </a:spcAft>
-            </a:pPr>
-            <a:r>
-              <a:rPr sz="2200" b="1">
-                <a:solidFill>
-                  <a:srgbClr val="0F172A"/>
-                </a:solidFill>
-                <a:latin typeface="Calibri"/>
-              </a:rPr>
-              <a:t>Silver</a:t>
-            </a:r>
-          </a:p>
-          <a:p>
-            <a:pPr algn="l">
-              <a:spcAft>
-                <a:spcPts val="600"/>
-              </a:spcAft>
-            </a:pPr>
-            <a:r>
-              <a:rPr sz="1600" b="0">
-                <a:solidFill>
-                  <a:srgbClr val="475569"/>
-                </a:solidFill>
-                <a:latin typeface="Calibri"/>
-              </a:rPr>
-              <a:t>Name: ____________________</a:t>
-            </a:r>
-          </a:p>
-          <a:p>
-            <a:pPr algn="l">
-              <a:spcAft>
-                <a:spcPts val="600"/>
-              </a:spcAft>
-            </a:pPr>
-            <a:r>
-              <a:rPr sz="1400" b="0">
-                <a:solidFill>
-                  <a:srgbClr val="475569"/>
-                </a:solidFill>
-                <a:latin typeface="Calibri"/>
-              </a:rPr>
-              <a:t>Next highest  ·  explains URL + key + JSON</a:t>
-            </a:r>
-          </a:p>
-        </p:txBody>
-      </p:sp>
-      <p:sp>
-        <p:nvSpPr>
-          <p:cNvPr id="13" name="Rounded Rectangle 12"/>
-          <p:cNvSpPr/>
-          <p:nvPr/>
-        </p:nvSpPr>
-        <p:spPr>
-          <a:xfrm>
-            <a:off x="8138158" y="1920240"/>
-            <a:ext cx="3520440" cy="3383280"/>
-          </a:xfrm>
-          <a:prstGeom prst="roundRect">
-            <a:avLst/>
-          </a:prstGeom>
-          <a:solidFill>
-            <a:srgbClr val="FFFFFF"/>
-          </a:solidFill>
-          <a:ln>
-            <a:noFill/>
-          </a:ln>
-        </p:spPr>
-        <p:style>
-          <a:lnRef idx="1">
-            <a:schemeClr val="accent1"/>
-          </a:lnRef>
-          <a:fillRef idx="3">
-            <a:schemeClr val="accent1"/>
-          </a:fillRef>
-          <a:effectRef idx="2">
-            <a:schemeClr val="accent1"/>
-          </a:effectRef>
-          <a:fontRef idx="minor">
-            <a:schemeClr val="lt1"/>
-          </a:fontRef>
-        </p:style>
-        <p:txBody>
-          <a:bodyPr rtlCol="0" anchor="ctr"/>
-          <a:lstStyle/>
-          <a:p>
-            <a:pPr algn="ctr"/>
-          </a:p>
-        </p:txBody>
-      </p:sp>
-      <p:sp>
-        <p:nvSpPr>
-          <p:cNvPr id="14" name="Oval 13"/>
-          <p:cNvSpPr/>
-          <p:nvPr/>
-        </p:nvSpPr>
-        <p:spPr>
-          <a:xfrm>
-            <a:off x="9464038" y="2148840"/>
-            <a:ext cx="868680" cy="868680"/>
-          </a:xfrm>
-          <a:prstGeom prst="ellipse">
-            <a:avLst/>
-          </a:prstGeom>
-          <a:solidFill>
-            <a:srgbClr val="B45309"/>
-          </a:solidFill>
-          <a:ln>
-            <a:noFill/>
-          </a:ln>
-        </p:spPr>
-        <p:style>
-          <a:lnRef idx="1">
-            <a:schemeClr val="accent1"/>
-          </a:lnRef>
-          <a:fillRef idx="3">
-            <a:schemeClr val="accent1"/>
-          </a:fillRef>
-          <a:effectRef idx="2">
-            <a:schemeClr val="accent1"/>
-          </a:effectRef>
-          <a:fontRef idx="minor">
-            <a:schemeClr val="lt1"/>
-          </a:fontRef>
-        </p:style>
-        <p:txBody>
-          <a:bodyPr rtlCol="0" anchor="ctr"/>
-          <a:lstStyle/>
-          <a:p>
-            <a:pPr algn="ctr"/>
-          </a:p>
-        </p:txBody>
-      </p:sp>
-      <p:sp>
-        <p:nvSpPr>
-          <p:cNvPr id="15" name="TextBox 14"/>
-          <p:cNvSpPr txBox="1"/>
-          <p:nvPr/>
-        </p:nvSpPr>
-        <p:spPr>
-          <a:xfrm>
-            <a:off x="9464038" y="2304288"/>
-            <a:ext cx="868680" cy="640080"/>
-          </a:xfrm>
-          <a:prstGeom prst="rect">
-            <a:avLst/>
-          </a:prstGeom>
-          <a:noFill/>
-        </p:spPr>
-        <p:txBody>
-          <a:bodyPr wrap="none">
-            <a:spAutoFit/>
-          </a:bodyPr>
-          <a:lstStyle/>
-          <a:p>
-            <a:pPr algn="ctr"/>
-            <a:r>
-              <a:rPr sz="1600" b="1">
-                <a:solidFill>
-                  <a:srgbClr val="FFFFFF"/>
-                </a:solidFill>
-                <a:latin typeface="Calibri"/>
-              </a:rPr>
-              <a:t>3rd</a:t>
-            </a:r>
-          </a:p>
-        </p:txBody>
-      </p:sp>
-      <p:sp>
-        <p:nvSpPr>
-          <p:cNvPr id="16" name="TextBox 15"/>
-          <p:cNvSpPr txBox="1"/>
-          <p:nvPr/>
-        </p:nvSpPr>
-        <p:spPr>
-          <a:xfrm>
-            <a:off x="8366758" y="3200400"/>
-            <a:ext cx="3063240" cy="1828800"/>
-          </a:xfrm>
-          <a:prstGeom prst="rect">
-            <a:avLst/>
-          </a:prstGeom>
-          <a:noFill/>
-        </p:spPr>
-        <p:txBody>
-          <a:bodyPr wrap="square">
-            <a:spAutoFit/>
-          </a:bodyPr>
-          <a:lstStyle/>
-          <a:p>
-            <a:pPr algn="l">
-              <a:spcAft>
-                <a:spcPts val="600"/>
-              </a:spcAft>
-            </a:pPr>
-            <a:r>
-              <a:rPr sz="2200" b="1">
-                <a:solidFill>
-                  <a:srgbClr val="0F172A"/>
-                </a:solidFill>
-                <a:latin typeface="Calibri"/>
-              </a:rPr>
-              <a:t>Bronze</a:t>
-            </a:r>
-          </a:p>
-          <a:p>
-            <a:pPr algn="l">
-              <a:spcAft>
-                <a:spcPts val="600"/>
-              </a:spcAft>
-            </a:pPr>
-            <a:r>
-              <a:rPr sz="1600" b="0">
-                <a:solidFill>
-                  <a:srgbClr val="475569"/>
-                </a:solidFill>
-                <a:latin typeface="Calibri"/>
-              </a:rPr>
-              <a:t>Name: ____________________</a:t>
-            </a:r>
-          </a:p>
-          <a:p>
-            <a:pPr algn="l">
-              <a:spcAft>
-                <a:spcPts val="600"/>
-              </a:spcAft>
-            </a:pPr>
-            <a:r>
-              <a:rPr sz="1400" b="0">
-                <a:solidFill>
-                  <a:srgbClr val="475569"/>
-                </a:solidFill>
-                <a:latin typeface="Calibri"/>
-              </a:rPr>
-              <a:t>Third  ·  names the 3 files</a:t>
-            </a:r>
-          </a:p>
-        </p:txBody>
-      </p:sp>
-      <p:pic>
-        <p:nvPicPr>
-          <p:cNvPr id="17" name="seminar-music.mp3">
-            <a:hlinkClick r:id="" action="ppaction://media"/>
-          </p:cNvPr>
-          <p:cNvPicPr>
-            <a:picLocks noChangeAspect="1"/>
-          </p:cNvPicPr>
-          <p:nvPr>
-            <a:videoFile r:link="rId3"/>
-            <p:extLst>
-              <p:ext uri="{DAA4B4D4-6D71-4841-9C94-3DE7FCFB9230}">
-                <p14:media xmlns:p14="http://schemas.microsoft.com/office/powerpoint/2010/main" r:embed="rId2"/>
-              </p:ext>
-            </p:extLst>
-          </p:nvPr>
-        </p:nvPicPr>
-        <p:blipFill>
-          <a:blip r:embed="rId4"/>
-          <a:stretch>
-            <a:fillRect/>
-          </a:stretch>
-        </p:blipFill>
-        <p:spPr>
-          <a:xfrm>
-            <a:off x="11292840" y="164592"/>
-            <a:ext cx="566928" cy="566928"/>
-          </a:xfrm>
-          <a:prstGeom prst="rect">
-            <a:avLst/>
-          </a:prstGeom>
-        </p:spPr>
-      </p:pic>
-      <p:sp>
-        <p:nvSpPr>
-          <p:cNvPr id="18" name="TextBox 17"/>
-          <p:cNvSpPr txBox="1"/>
-          <p:nvPr/>
-        </p:nvSpPr>
-        <p:spPr>
-          <a:xfrm>
-            <a:off x="9784080" y="256032"/>
-            <a:ext cx="1417320" cy="365760"/>
-          </a:xfrm>
-          <a:prstGeom prst="rect">
-            <a:avLst/>
-          </a:prstGeom>
-          <a:noFill/>
-        </p:spPr>
-        <p:txBody>
-          <a:bodyPr wrap="none">
-            <a:spAutoFit/>
-          </a:bodyPr>
-          <a:lstStyle/>
-          <a:p>
-            <a:pPr algn="r"/>
-            <a:r>
-              <a:rPr sz="1200" b="1">
-                <a:solidFill>
-                  <a:srgbClr val="FFFFFF"/>
-                </a:solidFill>
-                <a:latin typeface="Calibri"/>
-              </a:rPr>
-              <a:t>♪  play</a:t>
-            </a:r>
-          </a:p>
-        </p:txBody>
-      </p:sp>
-      <p:sp>
-        <p:nvSpPr>
-          <p:cNvPr id="19" name="Rectangle 18"/>
-          <p:cNvSpPr/>
-          <p:nvPr/>
-        </p:nvSpPr>
-        <p:spPr>
-          <a:xfrm>
-            <a:off x="0" y="6601968"/>
-            <a:ext cx="12191695" cy="256032"/>
-          </a:xfrm>
-          <a:prstGeom prst="rect">
-            <a:avLst/>
-          </a:prstGeom>
-          <a:solidFill>
-            <a:srgbClr val="0F172A"/>
-          </a:solidFill>
-          <a:ln>
-            <a:noFill/>
-          </a:ln>
-        </p:spPr>
-        <p:style>
-          <a:lnRef idx="1">
-            <a:schemeClr val="accent1"/>
-          </a:lnRef>
-          <a:fillRef idx="3">
-            <a:schemeClr val="accent1"/>
-          </a:fillRef>
-          <a:effectRef idx="2">
-            <a:schemeClr val="accent1"/>
-          </a:effectRef>
-          <a:fontRef idx="minor">
-            <a:schemeClr val="lt1"/>
-          </a:fontRef>
-        </p:style>
-        <p:txBody>
-          <a:bodyPr rtlCol="0" anchor="ctr"/>
-          <a:lstStyle/>
-          <a:p>
-            <a:pPr algn="ctr"/>
-          </a:p>
-        </p:txBody>
-      </p:sp>
-      <p:sp>
-        <p:nvSpPr>
-          <p:cNvPr id="20" name="TextBox 19"/>
-          <p:cNvSpPr txBox="1"/>
-          <p:nvPr/>
-        </p:nvSpPr>
-        <p:spPr>
-          <a:xfrm>
-            <a:off x="365760" y="6601968"/>
-            <a:ext cx="9144000" cy="256032"/>
-          </a:xfrm>
-          <a:prstGeom prst="rect">
-            <a:avLst/>
-          </a:prstGeom>
-          <a:noFill/>
-        </p:spPr>
-        <p:txBody>
-          <a:bodyPr wrap="none">
-            <a:spAutoFit/>
-          </a:bodyPr>
-          <a:lstStyle/>
-          <a:p>
-            <a:r>
-              <a:rPr sz="1100" b="0">
-                <a:solidFill>
-                  <a:srgbClr val="FFFFFF"/>
-                </a:solidFill>
-                <a:latin typeface="Calibri"/>
-              </a:rPr>
-              <a:t>ResumeFit  ·  TEQGRID seminar</a:t>
-            </a:r>
-          </a:p>
-        </p:txBody>
-      </p:sp>
-      <p:sp>
-        <p:nvSpPr>
-          <p:cNvPr id="21" name="TextBox 20"/>
-          <p:cNvSpPr txBox="1"/>
-          <p:nvPr/>
-        </p:nvSpPr>
-        <p:spPr>
-          <a:xfrm>
-            <a:off x="10607040" y="6601968"/>
-            <a:ext cx="1280160" cy="256032"/>
-          </a:xfrm>
-          <a:prstGeom prst="rect">
-            <a:avLst/>
-          </a:prstGeom>
-          <a:noFill/>
-        </p:spPr>
-        <p:txBody>
-          <a:bodyPr wrap="none">
-            <a:spAutoFit/>
-          </a:bodyPr>
-          <a:lstStyle/>
-          <a:p>
-            <a:pPr algn="r"/>
-            <a:r>
-              <a:rPr sz="1100" b="0">
-                <a:solidFill>
-                  <a:srgbClr val="FFFFFF"/>
-                </a:solidFill>
-                <a:latin typeface="Calibri"/>
-              </a:rPr>
-              <a:t>23  /  24</a:t>
-            </a:r>
-          </a:p>
-        </p:txBody>
-      </p:sp>
-    </p:spTree>
-  </p:cSld>
-  <p:clrMapOvr>
-    <a:masterClrMapping/>
-  </p:clrMapOvr>
-  <p:timing>
-    <p:tnLst>
-      <p:par>
-        <p:cTn id="1" dur="indefinite" restart="never" nodeType="tmRoot">
-          <p:childTnLst>
-            <p:video>
-              <p:cMediaNode vol="80000">
-                <p:cTn id="2" fill="hold" display="0">
-                  <p:stCondLst>
-                    <p:cond delay="indefinite"/>
-                  </p:stCondLst>
-                </p:cTn>
-                <p:tgtEl>
-                  <p:spTgt spid="17"/>
-                </p:tgtEl>
-              </p:cMediaNode>
-            </p:video>
-          </p:childTnLst>
-        </p:cTn>
-      </p:par>
-    </p:tnLst>
-  </p:timing>
-</p:sld>
-</file>
-
-<file path=ppt/slides/slide24.xml><?xml version="1.0" encoding="utf-8"?>
-<p:sld xmlns:a="http://schemas.openxmlformats.org/drawingml/2006/main" xmlns:p="http://schemas.openxmlformats.org/presentationml/2006/main" xmlns:r="http://schemas.openxmlformats.org/officeDocument/2006/relationships">
-  <p:cSld>
-    <p:spTree>
-      <p:nvGrpSpPr>
-        <p:cNvPr id="1" name=""/>
-        <p:cNvGrpSpPr/>
-        <p:nvPr/>
-      </p:nvGrpSpPr>
-      <p:grpSpPr/>
-      <p:sp>
-        <p:nvSpPr>
-          <p:cNvPr id="2" name="Rectangle 1"/>
-          <p:cNvSpPr/>
-          <p:nvPr/>
-        </p:nvSpPr>
-        <p:spPr>
-          <a:xfrm>
-            <a:off x="0" y="0"/>
-            <a:ext cx="12191695" cy="6858000"/>
-          </a:xfrm>
-          <a:prstGeom prst="rect">
-            <a:avLst/>
-          </a:prstGeom>
-          <a:solidFill>
-            <a:srgbClr val="0F172A"/>
-          </a:solidFill>
-          <a:ln>
-            <a:noFill/>
-          </a:ln>
-        </p:spPr>
-        <p:style>
-          <a:lnRef idx="1">
-            <a:schemeClr val="accent1"/>
-          </a:lnRef>
-          <a:fillRef idx="3">
-            <a:schemeClr val="accent1"/>
-          </a:fillRef>
-          <a:effectRef idx="2">
-            <a:schemeClr val="accent1"/>
-          </a:effectRef>
-          <a:fontRef idx="minor">
-            <a:schemeClr val="lt1"/>
-          </a:fontRef>
-        </p:style>
-        <p:txBody>
-          <a:bodyPr rtlCol="0" anchor="ctr"/>
-          <a:lstStyle/>
-          <a:p>
-            <a:pPr algn="ctr"/>
-          </a:p>
-        </p:txBody>
-      </p:sp>
-      <p:sp>
-        <p:nvSpPr>
-          <p:cNvPr id="3" name="Rectangle 2"/>
-          <p:cNvSpPr/>
-          <p:nvPr/>
-        </p:nvSpPr>
-        <p:spPr>
-          <a:xfrm>
-            <a:off x="0" y="0"/>
-            <a:ext cx="164592" cy="6858000"/>
-          </a:xfrm>
-          <a:prstGeom prst="rect">
-            <a:avLst/>
-          </a:prstGeom>
-          <a:solidFill>
-            <a:srgbClr val="2563EB"/>
-          </a:solidFill>
-          <a:ln>
-            <a:noFill/>
-          </a:ln>
-        </p:spPr>
-        <p:style>
-          <a:lnRef idx="1">
-            <a:schemeClr val="accent1"/>
-          </a:lnRef>
-          <a:fillRef idx="3">
-            <a:schemeClr val="accent1"/>
-          </a:fillRef>
-          <a:effectRef idx="2">
-            <a:schemeClr val="accent1"/>
-          </a:effectRef>
-          <a:fontRef idx="minor">
-            <a:schemeClr val="lt1"/>
-          </a:fontRef>
-        </p:style>
-        <p:txBody>
-          <a:bodyPr rtlCol="0" anchor="ctr"/>
-          <a:lstStyle/>
-          <a:p>
-            <a:pPr algn="ctr"/>
-          </a:p>
-        </p:txBody>
-      </p:sp>
-      <p:pic>
-        <p:nvPicPr>
-          <p:cNvPr id="4" name="Picture 3" descr="logo.png"/>
-          <p:cNvPicPr>
-            <a:picLocks noChangeAspect="1"/>
-          </p:cNvPicPr>
-          <p:nvPr/>
-        </p:nvPicPr>
-        <p:blipFill>
-          <a:blip r:embed="rId2"/>
-          <a:stretch>
-            <a:fillRect/>
-          </a:stretch>
-        </p:blipFill>
-        <p:spPr>
-          <a:xfrm>
-            <a:off x="685800" y="1051560"/>
-            <a:ext cx="868680" cy="868680"/>
-          </a:xfrm>
-          <a:prstGeom prst="rect">
-            <a:avLst/>
-          </a:prstGeom>
-        </p:spPr>
-      </p:pic>
-      <p:sp>
-        <p:nvSpPr>
-          <p:cNvPr id="5" name="TextBox 4"/>
-          <p:cNvSpPr txBox="1"/>
-          <p:nvPr/>
-        </p:nvSpPr>
-        <p:spPr>
-          <a:xfrm>
-            <a:off x="685800" y="2103120"/>
-            <a:ext cx="10972800" cy="4023360"/>
-          </a:xfrm>
-          <a:prstGeom prst="rect">
-            <a:avLst/>
-          </a:prstGeom>
-          <a:noFill/>
-        </p:spPr>
-        <p:txBody>
-          <a:bodyPr wrap="square">
-            <a:spAutoFit/>
-          </a:bodyPr>
-          <a:lstStyle/>
-          <a:p>
-            <a:pPr algn="l">
-              <a:spcAft>
-                <a:spcPts val="600"/>
-              </a:spcAft>
-            </a:pPr>
-            <a:r>
-              <a:rPr sz="1600" b="1">
-                <a:solidFill>
-                  <a:srgbClr val="93C5FD"/>
-                </a:solidFill>
-                <a:latin typeface="Calibri"/>
-              </a:rPr>
-              <a:t>THANK YOU</a:t>
-            </a:r>
-          </a:p>
-          <a:p>
-            <a:pPr algn="l">
-              <a:spcAft>
-                <a:spcPts val="600"/>
-              </a:spcAft>
-            </a:pPr>
-            <a:r>
-              <a:rPr sz="3000" b="1">
-                <a:solidFill>
-                  <a:srgbClr val="FFFFFF"/>
-                </a:solidFill>
-                <a:latin typeface="Calibri"/>
-              </a:rPr>
-              <a:t>Clone. Paste your key. Change one prompt line.</a:t>
-            </a:r>
-          </a:p>
-          <a:p>
-            <a:pPr algn="l">
-              <a:spcAft>
-                <a:spcPts val="600"/>
-              </a:spcAft>
-            </a:pPr>
-            <a:r>
-              <a:rPr sz="2200" b="0">
-                <a:solidFill>
-                  <a:srgbClr val="93C5FD"/>
-                </a:solidFill>
-                <a:latin typeface="Calibri"/>
-              </a:rPr>
-              <a:t>aistudio.google.com/apikey</a:t>
-            </a:r>
-          </a:p>
-          <a:p>
-            <a:pPr algn="l">
-              <a:spcAft>
-                <a:spcPts val="600"/>
-              </a:spcAft>
-            </a:pPr>
-            <a:r>
-              <a:rPr sz="1800" b="0">
-                <a:solidFill>
-                  <a:srgbClr val="CBD5E1"/>
-                </a:solidFill>
-                <a:latin typeface="Calibri"/>
-              </a:rPr>
-              <a:t>github.com/Aishwaryaofficial/resume-fit</a:t>
-            </a:r>
-          </a:p>
-          <a:p>
-            <a:pPr algn="l">
-              <a:spcAft>
-                <a:spcPts val="600"/>
-              </a:spcAft>
-            </a:pPr>
-            <a:r>
-              <a:rPr sz="1800" b="0">
-                <a:solidFill>
-                  <a:srgbClr val="94A3B8"/>
-                </a:solidFill>
-                <a:latin typeface="Calibri"/>
-              </a:rPr>
-              <a:t>npm start    then    npm run ios  /  npm run android</a:t>
-            </a:r>
-          </a:p>
-          <a:p>
-            <a:pPr algn="l">
-              <a:spcAft>
-                <a:spcPts val="600"/>
-              </a:spcAft>
-            </a:pPr>
-            <a:r>
-              <a:rPr sz="1600" b="0">
-                <a:solidFill>
-                  <a:srgbClr val="93C5FD"/>
-                </a:solidFill>
-                <a:latin typeface="Calibri"/>
-              </a:rPr>
-              <a:t>♪ click the note  ·  questions anytime  ·  TEQGRID</a:t>
-            </a:r>
-          </a:p>
-        </p:txBody>
-      </p:sp>
-      <p:pic>
-        <p:nvPicPr>
-          <p:cNvPr id="6" name="seminar-music.mp3">
-            <a:hlinkClick r:id="" action="ppaction://media"/>
-          </p:cNvPr>
-          <p:cNvPicPr>
-            <a:picLocks noChangeAspect="1"/>
-          </p:cNvPicPr>
-          <p:nvPr>
-            <a:videoFile r:link="rId4"/>
-            <p:extLst>
-              <p:ext uri="{DAA4B4D4-6D71-4841-9C94-3DE7FCFB9230}">
-                <p14:media xmlns:p14="http://schemas.microsoft.com/office/powerpoint/2010/main" r:embed="rId3"/>
-              </p:ext>
-            </p:extLst>
-          </p:nvPr>
-        </p:nvPicPr>
-        <p:blipFill>
-          <a:blip r:embed="rId2"/>
-          <a:stretch>
-            <a:fillRect/>
-          </a:stretch>
-        </p:blipFill>
-        <p:spPr>
-          <a:xfrm>
-            <a:off x="11292840" y="164592"/>
-            <a:ext cx="566928" cy="566928"/>
-          </a:xfrm>
-          <a:prstGeom prst="rect">
-            <a:avLst/>
-          </a:prstGeom>
-        </p:spPr>
-      </p:pic>
-      <p:sp>
-        <p:nvSpPr>
-          <p:cNvPr id="7" name="TextBox 6"/>
-          <p:cNvSpPr txBox="1"/>
-          <p:nvPr/>
-        </p:nvSpPr>
-        <p:spPr>
-          <a:xfrm>
-            <a:off x="9784080" y="256032"/>
-            <a:ext cx="1417320" cy="365760"/>
-          </a:xfrm>
-          <a:prstGeom prst="rect">
-            <a:avLst/>
-          </a:prstGeom>
-          <a:noFill/>
-        </p:spPr>
-        <p:txBody>
-          <a:bodyPr wrap="none">
-            <a:spAutoFit/>
-          </a:bodyPr>
-          <a:lstStyle/>
-          <a:p>
-            <a:pPr algn="r"/>
-            <a:r>
-              <a:rPr sz="1200" b="1">
-                <a:solidFill>
-                  <a:srgbClr val="FFFFFF"/>
-                </a:solidFill>
-                <a:latin typeface="Calibri"/>
-              </a:rPr>
-              <a:t>♪  play</a:t>
-            </a:r>
-          </a:p>
-        </p:txBody>
-      </p:sp>
-      <p:sp>
-        <p:nvSpPr>
-          <p:cNvPr id="8" name="Rectangle 7"/>
-          <p:cNvSpPr/>
-          <p:nvPr/>
-        </p:nvSpPr>
-        <p:spPr>
-          <a:xfrm>
-            <a:off x="0" y="6601968"/>
-            <a:ext cx="12191695" cy="256032"/>
-          </a:xfrm>
-          <a:prstGeom prst="rect">
-            <a:avLst/>
-          </a:prstGeom>
-          <a:solidFill>
-            <a:srgbClr val="0F172A"/>
-          </a:solidFill>
-          <a:ln>
-            <a:noFill/>
-          </a:ln>
-        </p:spPr>
-        <p:style>
-          <a:lnRef idx="1">
-            <a:schemeClr val="accent1"/>
-          </a:lnRef>
-          <a:fillRef idx="3">
-            <a:schemeClr val="accent1"/>
-          </a:fillRef>
-          <a:effectRef idx="2">
-            <a:schemeClr val="accent1"/>
-          </a:effectRef>
-          <a:fontRef idx="minor">
-            <a:schemeClr val="lt1"/>
-          </a:fontRef>
-        </p:style>
-        <p:txBody>
-          <a:bodyPr rtlCol="0" anchor="ctr"/>
-          <a:lstStyle/>
-          <a:p>
-            <a:pPr algn="ctr"/>
-          </a:p>
-        </p:txBody>
-      </p:sp>
-      <p:sp>
-        <p:nvSpPr>
-          <p:cNvPr id="9" name="TextBox 8"/>
-          <p:cNvSpPr txBox="1"/>
-          <p:nvPr/>
-        </p:nvSpPr>
-        <p:spPr>
-          <a:xfrm>
-            <a:off x="365760" y="6601968"/>
-            <a:ext cx="9144000" cy="256032"/>
-          </a:xfrm>
-          <a:prstGeom prst="rect">
-            <a:avLst/>
-          </a:prstGeom>
-          <a:noFill/>
-        </p:spPr>
-        <p:txBody>
-          <a:bodyPr wrap="none">
-            <a:spAutoFit/>
-          </a:bodyPr>
-          <a:lstStyle/>
-          <a:p>
-            <a:r>
-              <a:rPr sz="1100" b="0">
-                <a:solidFill>
-                  <a:srgbClr val="FFFFFF"/>
-                </a:solidFill>
-                <a:latin typeface="Calibri"/>
-              </a:rPr>
-              <a:t>ResumeFit  ·  TEQGRID seminar</a:t>
-            </a:r>
-          </a:p>
-        </p:txBody>
-      </p:sp>
-      <p:sp>
-        <p:nvSpPr>
-          <p:cNvPr id="10" name="TextBox 9"/>
-          <p:cNvSpPr txBox="1"/>
-          <p:nvPr/>
-        </p:nvSpPr>
-        <p:spPr>
-          <a:xfrm>
-            <a:off x="10607040" y="6601968"/>
-            <a:ext cx="1280160" cy="256032"/>
-          </a:xfrm>
-          <a:prstGeom prst="rect">
-            <a:avLst/>
-          </a:prstGeom>
-          <a:noFill/>
-        </p:spPr>
-        <p:txBody>
-          <a:bodyPr wrap="none">
-            <a:spAutoFit/>
-          </a:bodyPr>
-          <a:lstStyle/>
-          <a:p>
-            <a:pPr algn="r"/>
-            <a:r>
-              <a:rPr sz="1100" b="0">
-                <a:solidFill>
-                  <a:srgbClr val="FFFFFF"/>
-                </a:solidFill>
-                <a:latin typeface="Calibri"/>
-              </a:rPr>
-              <a:t>24  /  24</a:t>
-            </a:r>
-          </a:p>
-        </p:txBody>
-      </p:sp>
-    </p:spTree>
-  </p:cSld>
-  <p:clrMapOvr>
-    <a:masterClrMapping/>
-  </p:clrMapOvr>
-  <p:timing>
-    <p:tnLst>
-      <p:par>
-        <p:cTn id="1" dur="indefinite" restart="never" nodeType="tmRoot">
-          <p:childTnLst>
-            <p:video>
+            <p:audio>
               <p:cMediaNode vol="80000">
                 <p:cTn id="2" fill="hold" display="0">
                   <p:stCondLst>
@@ -15069,7 +14345,7 @@
                   <p:spTgt spid="6"/>
                 </p:tgtEl>
               </p:cMediaNode>
-            </p:video>
+            </p:audio>
           </p:childTnLst>
         </p:cTn>
       </p:par>
@@ -15079,7 +14355,7 @@
 </file>
 
 <file path=ppt/slides/slide3.xml><?xml version="1.0" encoding="utf-8"?>
-<p:sld xmlns:a="http://schemas.openxmlformats.org/drawingml/2006/main" xmlns:p="http://schemas.openxmlformats.org/presentationml/2006/main" xmlns:r="http://schemas.openxmlformats.org/officeDocument/2006/relationships">
+<p:sld xmlns:a="http://schemas.openxmlformats.org/drawingml/2006/main" xmlns:r="http://schemas.openxmlformats.org/officeDocument/2006/relationships" xmlns:p="http://schemas.openxmlformats.org/presentationml/2006/main">
   <p:cSld>
     <p:spTree>
       <p:nvGrpSpPr>
@@ -15087,7 +14363,14 @@
         <p:cNvGrpSpPr/>
         <p:nvPr/>
       </p:nvGrpSpPr>
-      <p:grpSpPr/>
+      <p:grpSpPr>
+        <a:xfrm>
+          <a:off x="0" y="0"/>
+          <a:ext cx="0" cy="0"/>
+          <a:chOff x="0" y="0"/>
+          <a:chExt cx="0" cy="0"/>
+        </a:xfrm>
+      </p:grpSpPr>
       <p:sp>
         <p:nvSpPr>
           <p:cNvPr id="2" name="Rectangle 1"/>
@@ -15128,6 +14411,7 @@
           <a:lstStyle/>
           <a:p>
             <a:pPr algn="ctr"/>
+            <a:endParaRPr/>
           </a:p>
         </p:txBody>
       </p:sp>
@@ -15171,6 +14455,7 @@
           <a:lstStyle/>
           <a:p>
             <a:pPr algn="ctr"/>
+            <a:endParaRPr/>
           </a:p>
         </p:txBody>
       </p:sp>
@@ -15292,6 +14577,7 @@
           <a:lstStyle/>
           <a:p>
             <a:pPr algn="ctr"/>
+            <a:endParaRPr/>
           </a:p>
         </p:txBody>
       </p:sp>
@@ -15335,6 +14621,7 @@
           <a:lstStyle/>
           <a:p>
             <a:pPr algn="ctr"/>
+            <a:endParaRPr/>
           </a:p>
         </p:txBody>
       </p:sp>
@@ -15710,6 +14997,7 @@
           <a:lstStyle/>
           <a:p>
             <a:pPr algn="ctr"/>
+            <a:endParaRPr/>
           </a:p>
         </p:txBody>
       </p:sp>
@@ -15742,7 +15030,7 @@
                 </a:solidFill>
                 <a:latin typeface="Calibri"/>
               </a:rPr>
-              <a:t>ResumeFit  ·  TEQGRID seminar</a:t>
+              <a:t>Meet TEQGRID  ·  ResumeFit seminar</a:t>
             </a:r>
           </a:p>
         </p:txBody>
@@ -15791,7 +15079,7 @@
 </file>
 
 <file path=ppt/slides/slide4.xml><?xml version="1.0" encoding="utf-8"?>
-<p:sld xmlns:a="http://schemas.openxmlformats.org/drawingml/2006/main" xmlns:p="http://schemas.openxmlformats.org/presentationml/2006/main" xmlns:r="http://schemas.openxmlformats.org/officeDocument/2006/relationships">
+<p:sld xmlns:a="http://schemas.openxmlformats.org/drawingml/2006/main" xmlns:r="http://schemas.openxmlformats.org/officeDocument/2006/relationships" xmlns:p="http://schemas.openxmlformats.org/presentationml/2006/main">
   <p:cSld>
     <p:spTree>
       <p:nvGrpSpPr>
@@ -15799,7 +15087,14 @@
         <p:cNvGrpSpPr/>
         <p:nvPr/>
       </p:nvGrpSpPr>
-      <p:grpSpPr/>
+      <p:grpSpPr>
+        <a:xfrm>
+          <a:off x="0" y="0"/>
+          <a:ext cx="0" cy="0"/>
+          <a:chOff x="0" y="0"/>
+          <a:chExt cx="0" cy="0"/>
+        </a:xfrm>
+      </p:grpSpPr>
       <p:sp>
         <p:nvSpPr>
           <p:cNvPr id="2" name="Rectangle 1"/>
@@ -15840,6 +15135,7 @@
           <a:lstStyle/>
           <a:p>
             <a:pPr algn="ctr"/>
+            <a:endParaRPr/>
           </a:p>
         </p:txBody>
       </p:sp>
@@ -15883,6 +15179,7 @@
           <a:lstStyle/>
           <a:p>
             <a:pPr algn="ctr"/>
+            <a:endParaRPr/>
           </a:p>
         </p:txBody>
       </p:sp>
@@ -16079,88 +15376,6 @@
                 <a:latin typeface="Calibri"/>
               </a:rPr>
               <a:t>  • Participation is the point. The quiz is how we pick the top 3.</a:t>
-            </a:r>
-          </a:p>
-        </p:txBody>
-      </p:sp>
-      <p:sp>
-        <p:nvSpPr>
-          <p:cNvPr id="7" name="Rounded Rectangle 6"/>
-          <p:cNvSpPr/>
-          <p:nvPr/>
-        </p:nvSpPr>
-        <p:spPr>
-          <a:xfrm>
-            <a:off x="502920" y="5623560"/>
-            <a:ext cx="11155680" cy="777240"/>
-          </a:xfrm>
-          <a:prstGeom prst="roundRect">
-            <a:avLst/>
-          </a:prstGeom>
-          <a:solidFill>
-            <a:srgbClr val="EEF3FF"/>
-          </a:solidFill>
-          <a:ln>
-            <a:noFill/>
-          </a:ln>
-        </p:spPr>
-        <p:style>
-          <a:lnRef idx="1">
-            <a:schemeClr val="accent1"/>
-          </a:lnRef>
-          <a:fillRef idx="3">
-            <a:schemeClr val="accent1"/>
-          </a:fillRef>
-          <a:effectRef idx="2">
-            <a:schemeClr val="accent1"/>
-          </a:effectRef>
-          <a:fontRef idx="minor">
-            <a:schemeClr val="lt1"/>
-          </a:fontRef>
-        </p:style>
-        <p:txBody>
-          <a:bodyPr rtlCol="0" anchor="ctr"/>
-          <a:lstStyle/>
-          <a:p>
-            <a:pPr algn="ctr"/>
-          </a:p>
-        </p:txBody>
-      </p:sp>
-      <p:sp>
-        <p:nvSpPr>
-          <p:cNvPr id="8" name="TextBox 7"/>
-          <p:cNvSpPr txBox="1"/>
-          <p:nvPr/>
-        </p:nvSpPr>
-        <p:spPr>
-          <a:xfrm>
-            <a:off x="685800" y="5742432"/>
-            <a:ext cx="10789920" cy="594360"/>
-          </a:xfrm>
-          <a:prstGeom prst="rect">
-            <a:avLst/>
-          </a:prstGeom>
-          <a:noFill/>
-        </p:spPr>
-        <p:txBody>
-          <a:bodyPr wrap="square">
-            <a:spAutoFit/>
-          </a:bodyPr>
-          <a:lstStyle/>
-          <a:p>
-            <a:pPr algn="l">
-              <a:spcAft>
-                <a:spcPts val="600"/>
-              </a:spcAft>
-            </a:pPr>
-            <a:r>
-              <a:rPr sz="1600" b="1">
-                <a:solidFill>
-                  <a:srgbClr val="1D4ED8"/>
-                </a:solidFill>
-                <a:latin typeface="Calibri"/>
-              </a:rPr>
-              <a:t>If TEQGRID is issuing certificates, mention that after the winners slide.</a:t>
             </a:r>
           </a:p>
         </p:txBody>
@@ -16205,6 +15420,7 @@
           <a:lstStyle/>
           <a:p>
             <a:pPr algn="ctr"/>
+            <a:endParaRPr/>
           </a:p>
         </p:txBody>
       </p:sp>
@@ -16237,7 +15453,7 @@
                 </a:solidFill>
                 <a:latin typeface="Calibri"/>
               </a:rPr>
-              <a:t>ResumeFit  ·  TEQGRID seminar</a:t>
+              <a:t>Meet TEQGRID  ·  ResumeFit seminar</a:t>
             </a:r>
           </a:p>
         </p:txBody>
@@ -16286,7 +15502,7 @@
 </file>
 
 <file path=ppt/slides/slide5.xml><?xml version="1.0" encoding="utf-8"?>
-<p:sld xmlns:a="http://schemas.openxmlformats.org/drawingml/2006/main" xmlns:p="http://schemas.openxmlformats.org/presentationml/2006/main" xmlns:r="http://schemas.openxmlformats.org/officeDocument/2006/relationships">
+<p:sld xmlns:a="http://schemas.openxmlformats.org/drawingml/2006/main" xmlns:r="http://schemas.openxmlformats.org/officeDocument/2006/relationships" xmlns:p="http://schemas.openxmlformats.org/presentationml/2006/main">
   <p:cSld>
     <p:spTree>
       <p:nvGrpSpPr>
@@ -16294,7 +15510,14 @@
         <p:cNvGrpSpPr/>
         <p:nvPr/>
       </p:nvGrpSpPr>
-      <p:grpSpPr/>
+      <p:grpSpPr>
+        <a:xfrm>
+          <a:off x="0" y="0"/>
+          <a:ext cx="0" cy="0"/>
+          <a:chOff x="0" y="0"/>
+          <a:chExt cx="0" cy="0"/>
+        </a:xfrm>
+      </p:grpSpPr>
       <p:sp>
         <p:nvSpPr>
           <p:cNvPr id="2" name="Rectangle 1"/>
@@ -16335,6 +15558,7 @@
           <a:lstStyle/>
           <a:p>
             <a:pPr algn="ctr"/>
+            <a:endParaRPr/>
           </a:p>
         </p:txBody>
       </p:sp>
@@ -16378,6 +15602,7 @@
           <a:lstStyle/>
           <a:p>
             <a:pPr algn="ctr"/>
+            <a:endParaRPr/>
           </a:p>
         </p:txBody>
       </p:sp>
@@ -16499,6 +15724,7 @@
           <a:lstStyle/>
           <a:p>
             <a:pPr algn="ctr"/>
+            <a:endParaRPr/>
           </a:p>
         </p:txBody>
       </p:sp>
@@ -16542,6 +15768,7 @@
           <a:lstStyle/>
           <a:p>
             <a:pPr algn="ctr"/>
+            <a:endParaRPr/>
           </a:p>
         </p:txBody>
       </p:sp>
@@ -16917,6 +16144,7 @@
           <a:lstStyle/>
           <a:p>
             <a:pPr algn="ctr"/>
+            <a:endParaRPr/>
           </a:p>
         </p:txBody>
       </p:sp>
@@ -16949,7 +16177,7 @@
                 </a:solidFill>
                 <a:latin typeface="Calibri"/>
               </a:rPr>
-              <a:t>ResumeFit  ·  TEQGRID seminar</a:t>
+              <a:t>Meet TEQGRID  ·  ResumeFit seminar</a:t>
             </a:r>
           </a:p>
         </p:txBody>
@@ -16998,7 +16226,7 @@
 </file>
 
 <file path=ppt/slides/slide6.xml><?xml version="1.0" encoding="utf-8"?>
-<p:sld xmlns:a="http://schemas.openxmlformats.org/drawingml/2006/main" xmlns:p="http://schemas.openxmlformats.org/presentationml/2006/main" xmlns:r="http://schemas.openxmlformats.org/officeDocument/2006/relationships">
+<p:sld xmlns:a="http://schemas.openxmlformats.org/drawingml/2006/main" xmlns:r="http://schemas.openxmlformats.org/officeDocument/2006/relationships" xmlns:p="http://schemas.openxmlformats.org/presentationml/2006/main">
   <p:cSld>
     <p:spTree>
       <p:nvGrpSpPr>
@@ -17006,7 +16234,14 @@
         <p:cNvGrpSpPr/>
         <p:nvPr/>
       </p:nvGrpSpPr>
-      <p:grpSpPr/>
+      <p:grpSpPr>
+        <a:xfrm>
+          <a:off x="0" y="0"/>
+          <a:ext cx="0" cy="0"/>
+          <a:chOff x="0" y="0"/>
+          <a:chExt cx="0" cy="0"/>
+        </a:xfrm>
+      </p:grpSpPr>
       <p:sp>
         <p:nvSpPr>
           <p:cNvPr id="2" name="Rectangle 1"/>
@@ -17047,6 +16282,7 @@
           <a:lstStyle/>
           <a:p>
             <a:pPr algn="ctr"/>
+            <a:endParaRPr/>
           </a:p>
         </p:txBody>
       </p:sp>
@@ -17090,6 +16326,7 @@
           <a:lstStyle/>
           <a:p>
             <a:pPr algn="ctr"/>
+            <a:endParaRPr/>
           </a:p>
         </p:txBody>
       </p:sp>
@@ -17314,6 +16551,7 @@
           <a:lstStyle/>
           <a:p>
             <a:pPr algn="ctr"/>
+            <a:endParaRPr/>
           </a:p>
         </p:txBody>
       </p:sp>
@@ -17396,6 +16634,7 @@
           <a:lstStyle/>
           <a:p>
             <a:pPr algn="ctr"/>
+            <a:endParaRPr/>
           </a:p>
         </p:txBody>
       </p:sp>
@@ -17428,7 +16667,7 @@
                 </a:solidFill>
                 <a:latin typeface="Calibri"/>
               </a:rPr>
-              <a:t>ResumeFit  ·  TEQGRID seminar</a:t>
+              <a:t>Meet TEQGRID  ·  ResumeFit seminar</a:t>
             </a:r>
           </a:p>
         </p:txBody>
@@ -17477,7 +16716,7 @@
 </file>
 
 <file path=ppt/slides/slide7.xml><?xml version="1.0" encoding="utf-8"?>
-<p:sld xmlns:a="http://schemas.openxmlformats.org/drawingml/2006/main" xmlns:p="http://schemas.openxmlformats.org/presentationml/2006/main" xmlns:r="http://schemas.openxmlformats.org/officeDocument/2006/relationships">
+<p:sld xmlns:a="http://schemas.openxmlformats.org/drawingml/2006/main" xmlns:r="http://schemas.openxmlformats.org/officeDocument/2006/relationships" xmlns:p="http://schemas.openxmlformats.org/presentationml/2006/main">
   <p:cSld>
     <p:spTree>
       <p:nvGrpSpPr>
@@ -17485,7 +16724,14 @@
         <p:cNvGrpSpPr/>
         <p:nvPr/>
       </p:nvGrpSpPr>
-      <p:grpSpPr/>
+      <p:grpSpPr>
+        <a:xfrm>
+          <a:off x="0" y="0"/>
+          <a:ext cx="0" cy="0"/>
+          <a:chOff x="0" y="0"/>
+          <a:chExt cx="0" cy="0"/>
+        </a:xfrm>
+      </p:grpSpPr>
       <p:sp>
         <p:nvSpPr>
           <p:cNvPr id="2" name="Rectangle 1"/>
@@ -17526,6 +16772,7 @@
           <a:lstStyle/>
           <a:p>
             <a:pPr algn="ctr"/>
+            <a:endParaRPr/>
           </a:p>
         </p:txBody>
       </p:sp>
@@ -17569,6 +16816,7 @@
           <a:lstStyle/>
           <a:p>
             <a:pPr algn="ctr"/>
+            <a:endParaRPr/>
           </a:p>
         </p:txBody>
       </p:sp>
@@ -17683,6 +16931,7 @@
           <a:lstStyle/>
           <a:p>
             <a:pPr algn="ctr"/>
+            <a:endParaRPr/>
           </a:p>
         </p:txBody>
       </p:sp>
@@ -17715,7 +16964,7 @@
                 </a:solidFill>
                 <a:latin typeface="Calibri"/>
               </a:rPr>
-              <a:t>ResumeFit  ·  TEQGRID seminar</a:t>
+              <a:t>Meet TEQGRID  ·  ResumeFit seminar</a:t>
             </a:r>
           </a:p>
         </p:txBody>
@@ -17764,7 +17013,7 @@
 </file>
 
 <file path=ppt/slides/slide8.xml><?xml version="1.0" encoding="utf-8"?>
-<p:sld xmlns:a="http://schemas.openxmlformats.org/drawingml/2006/main" xmlns:p="http://schemas.openxmlformats.org/presentationml/2006/main" xmlns:r="http://schemas.openxmlformats.org/officeDocument/2006/relationships">
+<p:sld xmlns:a="http://schemas.openxmlformats.org/drawingml/2006/main" xmlns:r="http://schemas.openxmlformats.org/officeDocument/2006/relationships" xmlns:p="http://schemas.openxmlformats.org/presentationml/2006/main">
   <p:cSld>
     <p:spTree>
       <p:nvGrpSpPr>
@@ -17772,7 +17021,14 @@
         <p:cNvGrpSpPr/>
         <p:nvPr/>
       </p:nvGrpSpPr>
-      <p:grpSpPr/>
+      <p:grpSpPr>
+        <a:xfrm>
+          <a:off x="0" y="0"/>
+          <a:ext cx="0" cy="0"/>
+          <a:chOff x="0" y="0"/>
+          <a:chExt cx="0" cy="0"/>
+        </a:xfrm>
+      </p:grpSpPr>
       <p:sp>
         <p:nvSpPr>
           <p:cNvPr id="2" name="Rectangle 1"/>
@@ -17813,6 +17069,7 @@
           <a:lstStyle/>
           <a:p>
             <a:pPr algn="ctr"/>
+            <a:endParaRPr/>
           </a:p>
         </p:txBody>
       </p:sp>
@@ -17856,6 +17113,7 @@
           <a:lstStyle/>
           <a:p>
             <a:pPr algn="ctr"/>
+            <a:endParaRPr/>
           </a:p>
         </p:txBody>
       </p:sp>
@@ -17977,6 +17235,7 @@
           <a:lstStyle/>
           <a:p>
             <a:pPr algn="ctr"/>
+            <a:endParaRPr/>
           </a:p>
         </p:txBody>
       </p:sp>
@@ -18020,6 +17279,7 @@
           <a:lstStyle/>
           <a:p>
             <a:pPr algn="ctr"/>
+            <a:endParaRPr/>
           </a:p>
         </p:txBody>
       </p:sp>
@@ -18153,6 +17413,7 @@
           <a:lstStyle/>
           <a:p>
             <a:pPr algn="ctr"/>
+            <a:endParaRPr/>
           </a:p>
         </p:txBody>
       </p:sp>
@@ -18196,6 +17457,7 @@
           <a:lstStyle/>
           <a:p>
             <a:pPr algn="ctr"/>
+            <a:endParaRPr/>
           </a:p>
         </p:txBody>
       </p:sp>
@@ -18329,6 +17591,7 @@
           <a:lstStyle/>
           <a:p>
             <a:pPr algn="ctr"/>
+            <a:endParaRPr/>
           </a:p>
         </p:txBody>
       </p:sp>
@@ -18372,6 +17635,7 @@
           <a:lstStyle/>
           <a:p>
             <a:pPr algn="ctr"/>
+            <a:endParaRPr/>
           </a:p>
         </p:txBody>
       </p:sp>
@@ -18505,6 +17769,7 @@
           <a:lstStyle/>
           <a:p>
             <a:pPr algn="ctr"/>
+            <a:endParaRPr/>
           </a:p>
         </p:txBody>
       </p:sp>
@@ -18537,7 +17802,7 @@
                 </a:solidFill>
                 <a:latin typeface="Calibri"/>
               </a:rPr>
-              <a:t>ResumeFit  ·  TEQGRID seminar</a:t>
+              <a:t>Meet TEQGRID  ·  ResumeFit seminar</a:t>
             </a:r>
           </a:p>
         </p:txBody>
@@ -18586,7 +17851,7 @@
 </file>
 
 <file path=ppt/slides/slide9.xml><?xml version="1.0" encoding="utf-8"?>
-<p:sld xmlns:a="http://schemas.openxmlformats.org/drawingml/2006/main" xmlns:p="http://schemas.openxmlformats.org/presentationml/2006/main" xmlns:r="http://schemas.openxmlformats.org/officeDocument/2006/relationships">
+<p:sld xmlns:a="http://schemas.openxmlformats.org/drawingml/2006/main" xmlns:r="http://schemas.openxmlformats.org/officeDocument/2006/relationships" xmlns:p="http://schemas.openxmlformats.org/presentationml/2006/main">
   <p:cSld>
     <p:spTree>
       <p:nvGrpSpPr>
@@ -18594,7 +17859,14 @@
         <p:cNvGrpSpPr/>
         <p:nvPr/>
       </p:nvGrpSpPr>
-      <p:grpSpPr/>
+      <p:grpSpPr>
+        <a:xfrm>
+          <a:off x="0" y="0"/>
+          <a:ext cx="0" cy="0"/>
+          <a:chOff x="0" y="0"/>
+          <a:chExt cx="0" cy="0"/>
+        </a:xfrm>
+      </p:grpSpPr>
       <p:sp>
         <p:nvSpPr>
           <p:cNvPr id="2" name="Rectangle 1"/>
@@ -18635,6 +17907,7 @@
           <a:lstStyle/>
           <a:p>
             <a:pPr algn="ctr"/>
+            <a:endParaRPr/>
           </a:p>
         </p:txBody>
       </p:sp>
@@ -18678,6 +17951,7 @@
           <a:lstStyle/>
           <a:p>
             <a:pPr algn="ctr"/>
+            <a:endParaRPr/>
           </a:p>
         </p:txBody>
       </p:sp>
@@ -18934,6 +18208,7 @@
           <a:lstStyle/>
           <a:p>
             <a:pPr algn="ctr"/>
+            <a:endParaRPr/>
           </a:p>
         </p:txBody>
       </p:sp>
@@ -19016,6 +18291,7 @@
           <a:lstStyle/>
           <a:p>
             <a:pPr algn="ctr"/>
+            <a:endParaRPr/>
           </a:p>
         </p:txBody>
       </p:sp>
@@ -19048,7 +18324,7 @@
                 </a:solidFill>
                 <a:latin typeface="Calibri"/>
               </a:rPr>
-              <a:t>ResumeFit  ·  TEQGRID seminar</a:t>
+              <a:t>Meet TEQGRID  ·  ResumeFit seminar</a:t>
             </a:r>
           </a:p>
         </p:txBody>
